--- a/output/wordlabs-harm-3day.pptx
+++ b/output/wordlabs-harm-3day.pptx
@@ -4240,7 +4240,7 @@
                 <a:ea typeface="Calibri" pitchFamily="34" charset="-122"/>
                 <a:cs typeface="Calibri" pitchFamily="34" charset="-120"/>
               </a:rPr>
-              <a:t>"damage, injury, or hurt"</a:t>
+              <a:t>"injury, damage, hurt"</a:t>
             </a:r>
             <a:endParaRPr lang="en-US" sz="2200" dirty="0"/>
           </a:p>
@@ -5288,7 +5288,7 @@
                 <a:ea typeface="Calibri" pitchFamily="34" charset="-122"/>
                 <a:cs typeface="Calibri" pitchFamily="34" charset="-120"/>
               </a:rPr>
-              <a:t>Word Labs  •  wordlabs.app  •  Root: 'harm' = damage, injury, or hurt</a:t>
+              <a:t>Word Labs  •  wordlabs.app  •  Root: 'harm' = injury, damage, hurt</a:t>
             </a:r>
             <a:endParaRPr lang="en-US" sz="800" dirty="0"/>
           </a:p>
@@ -5928,7 +5928,7 @@
                 <a:ea typeface="Calibri" pitchFamily="34" charset="-122"/>
                 <a:cs typeface="Calibri" pitchFamily="34" charset="-120"/>
               </a:rPr>
-              <a:t>Word Labs  •  wordlabs.app  •  Root: 'harm' = damage, injury, or hurt</a:t>
+              <a:t>Word Labs  •  wordlabs.app  •  Root: 'harm' = injury, damage, hurt</a:t>
             </a:r>
             <a:endParaRPr lang="en-US" sz="800" dirty="0"/>
           </a:p>
@@ -6040,7 +6040,7 @@
                 <a:ea typeface="Calibri" pitchFamily="34" charset="-122"/>
                 <a:cs typeface="Calibri" pitchFamily="34" charset="-120"/>
               </a:rPr>
-              <a:t>Eating too many </a:t>
+              <a:t>The ranger made sure the baby bird was </a:t>
             </a:r>
             <a:pPr algn="l" indent="0" marL="0">
               <a:buNone/>
@@ -6057,7 +6057,7 @@
                 <a:ea typeface="Calibri" pitchFamily="34" charset="-122"/>
                 <a:cs typeface="Calibri" pitchFamily="34" charset="-120"/>
               </a:rPr>
-              <a:t>harmful</a:t>
+              <a:t>unharmed</a:t>
             </a:r>
             <a:pPr algn="l" indent="0" marL="0">
               <a:buNone/>
@@ -6071,7 +6071,7 @@
                 <a:ea typeface="Calibri" pitchFamily="34" charset="-122"/>
                 <a:cs typeface="Calibri" pitchFamily="34" charset="-120"/>
               </a:rPr>
-              <a:t> chemicals in food can hurt you, but most fruit is completely </a:t>
+              <a:t> before releasing it, because </a:t>
             </a:r>
             <a:pPr algn="l" indent="0" marL="0">
               <a:buNone/>
@@ -6088,7 +6088,7 @@
                 <a:ea typeface="Calibri" pitchFamily="34" charset="-122"/>
                 <a:cs typeface="Calibri" pitchFamily="34" charset="-120"/>
               </a:rPr>
-              <a:t>harmless</a:t>
+              <a:t>harming</a:t>
             </a:r>
             <a:pPr algn="l" indent="0" marL="0">
               <a:buNone/>
@@ -6102,7 +6102,7 @@
                 <a:ea typeface="Calibri" pitchFamily="34" charset="-122"/>
                 <a:cs typeface="Calibri" pitchFamily="34" charset="-120"/>
               </a:rPr>
-              <a:t>.</a:t>
+              <a:t> any wildlife is against the law.</a:t>
             </a:r>
             <a:endParaRPr lang="en-US" sz="1800" dirty="0"/>
           </a:p>
@@ -6257,7 +6257,7 @@
                 <a:ea typeface="Trebuchet MS" pitchFamily="34" charset="-122"/>
                 <a:cs typeface="Trebuchet MS" pitchFamily="34" charset="-120"/>
               </a:rPr>
-              <a:t>harmful</a:t>
+              <a:t>unharmed</a:t>
             </a:r>
             <a:endParaRPr lang="en-US" sz="1400" dirty="0"/>
           </a:p>
@@ -6385,7 +6385,7 @@
                 <a:ea typeface="Trebuchet MS" pitchFamily="34" charset="-122"/>
                 <a:cs typeface="Trebuchet MS" pitchFamily="34" charset="-120"/>
               </a:rPr>
-              <a:t>harmless</a:t>
+              <a:t>harming</a:t>
             </a:r>
             <a:endParaRPr lang="en-US" sz="1400" dirty="0"/>
           </a:p>
@@ -6716,7 +6716,7 @@
                 <a:ea typeface="Calibri" pitchFamily="34" charset="-122"/>
                 <a:cs typeface="Calibri" pitchFamily="34" charset="-120"/>
               </a:rPr>
-              <a:t>Word Labs  •  wordlabs.app  •  Root: 'harm' = damage, injury, or hurt</a:t>
+              <a:t>Word Labs  •  wordlabs.app  •  Root: 'harm' = injury, damage, hurt</a:t>
             </a:r>
             <a:endParaRPr lang="en-US" sz="800" dirty="0"/>
           </a:p>
@@ -6855,7 +6855,7 @@
                 <a:ea typeface="Trebuchet MS" pitchFamily="34" charset="-122"/>
                 <a:cs typeface="Trebuchet MS" pitchFamily="34" charset="-120"/>
               </a:rPr>
-              <a:t>harmful</a:t>
+              <a:t>unharmed</a:t>
             </a:r>
             <a:endParaRPr lang="en-US" sz="2800" dirty="0"/>
           </a:p>
@@ -7543,7 +7543,7 @@
                 <a:ea typeface="Calibri" pitchFamily="34" charset="-122"/>
                 <a:cs typeface="Calibri" pitchFamily="34" charset="-120"/>
               </a:rPr>
-              <a:t>Word Labs  •  wordlabs.app  •  Root: 'harm' = damage, injury, or hurt</a:t>
+              <a:t>Word Labs  •  wordlabs.app  •  Root: 'harm' = injury, damage, hurt</a:t>
             </a:r>
             <a:endParaRPr lang="en-US" sz="800" dirty="0"/>
           </a:p>
@@ -7682,7 +7682,7 @@
                 <a:ea typeface="Trebuchet MS" pitchFamily="34" charset="-122"/>
                 <a:cs typeface="Trebuchet MS" pitchFamily="34" charset="-120"/>
               </a:rPr>
-              <a:t>harmful</a:t>
+              <a:t>unharmed</a:t>
             </a:r>
             <a:endParaRPr lang="en-US" sz="2800" dirty="0"/>
           </a:p>
@@ -7762,7 +7762,7 @@
         </p:nvSpPr>
         <p:spPr>
           <a:xfrm>
-            <a:off x="2938272" y="2258568"/>
+            <a:off x="2221992" y="2258568"/>
             <a:ext cx="1828800" cy="292608"/>
           </a:xfrm>
           <a:prstGeom prst="rect">
@@ -7771,11 +7771,11 @@
             </a:avLst>
           </a:prstGeom>
           <a:solidFill>
-            <a:srgbClr val="CCFBF1"/>
+            <a:srgbClr val="DDD6FE"/>
           </a:solidFill>
           <a:ln w="19050">
             <a:solidFill>
-              <a:srgbClr val="0D9488"/>
+              <a:srgbClr val="7C3AED"/>
             </a:solidFill>
             <a:prstDash val="solid"/>
           </a:ln>
@@ -7796,7 +7796,7 @@
         </p:nvSpPr>
         <p:spPr>
           <a:xfrm>
-            <a:off x="2938272" y="2258568"/>
+            <a:off x="2221992" y="2258568"/>
             <a:ext cx="1828800" cy="292608"/>
           </a:xfrm>
           <a:prstGeom prst="rect">
@@ -7815,13 +7815,13 @@
             <a:r>
               <a:rPr lang="en-US" sz="1300" b="1" dirty="0">
                 <a:solidFill>
-                  <a:srgbClr val="0F766E"/>
+                  <a:srgbClr val="4C1D95"/>
                 </a:solidFill>
                 <a:latin typeface="Trebuchet MS" pitchFamily="34" charset="0"/>
                 <a:ea typeface="Trebuchet MS" pitchFamily="34" charset="-122"/>
                 <a:cs typeface="Trebuchet MS" pitchFamily="34" charset="-120"/>
               </a:rPr>
-              <a:t>harm</a:t>
+              <a:t>un</a:t>
             </a:r>
             <a:endParaRPr lang="en-US" sz="1300" dirty="0"/>
           </a:p>
@@ -7835,7 +7835,7 @@
         </p:nvSpPr>
         <p:spPr>
           <a:xfrm>
-            <a:off x="2938272" y="2569464"/>
+            <a:off x="2221992" y="2569464"/>
             <a:ext cx="1828800" cy="201168"/>
           </a:xfrm>
           <a:prstGeom prst="rect">
@@ -7860,7 +7860,7 @@
                 <a:ea typeface="Calibri" pitchFamily="34" charset="-122"/>
                 <a:cs typeface="Calibri" pitchFamily="34" charset="-120"/>
               </a:rPr>
-              <a:t>damage or injury</a:t>
+              <a:t>not</a:t>
             </a:r>
             <a:endParaRPr lang="en-US" sz="850" dirty="0"/>
           </a:p>
@@ -7874,7 +7874,7 @@
         </p:nvSpPr>
         <p:spPr>
           <a:xfrm>
-            <a:off x="5803392" y="2258568"/>
+            <a:off x="4370832" y="2258568"/>
             <a:ext cx="1828800" cy="292608"/>
           </a:xfrm>
           <a:prstGeom prst="rect">
@@ -7883,11 +7883,11 @@
             </a:avLst>
           </a:prstGeom>
           <a:solidFill>
-            <a:srgbClr val="FCE7F3"/>
+            <a:srgbClr val="CCFBF1"/>
           </a:solidFill>
           <a:ln w="19050">
             <a:solidFill>
-              <a:srgbClr val="DB2777"/>
+              <a:srgbClr val="0D9488"/>
             </a:solidFill>
             <a:prstDash val="solid"/>
           </a:ln>
@@ -7908,7 +7908,7 @@
         </p:nvSpPr>
         <p:spPr>
           <a:xfrm>
-            <a:off x="5803392" y="2258568"/>
+            <a:off x="4370832" y="2258568"/>
             <a:ext cx="1828800" cy="292608"/>
           </a:xfrm>
           <a:prstGeom prst="rect">
@@ -7927,13 +7927,13 @@
             <a:r>
               <a:rPr lang="en-US" sz="1300" b="1" dirty="0">
                 <a:solidFill>
-                  <a:srgbClr val="9D174D"/>
+                  <a:srgbClr val="0F766E"/>
                 </a:solidFill>
                 <a:latin typeface="Trebuchet MS" pitchFamily="34" charset="0"/>
                 <a:ea typeface="Trebuchet MS" pitchFamily="34" charset="-122"/>
                 <a:cs typeface="Trebuchet MS" pitchFamily="34" charset="-120"/>
               </a:rPr>
-              <a:t>ful</a:t>
+              <a:t>harm</a:t>
             </a:r>
             <a:endParaRPr lang="en-US" sz="1300" dirty="0"/>
           </a:p>
@@ -7947,7 +7947,7 @@
         </p:nvSpPr>
         <p:spPr>
           <a:xfrm>
-            <a:off x="5803392" y="2569464"/>
+            <a:off x="4370832" y="2569464"/>
             <a:ext cx="1828800" cy="201168"/>
           </a:xfrm>
           <a:prstGeom prst="rect">
@@ -7972,7 +7972,7 @@
                 <a:ea typeface="Calibri" pitchFamily="34" charset="-122"/>
                 <a:cs typeface="Calibri" pitchFamily="34" charset="-120"/>
               </a:rPr>
-              <a:t>full of</a:t>
+              <a:t>injury or damage</a:t>
             </a:r>
             <a:endParaRPr lang="en-US" sz="850" dirty="0"/>
           </a:p>
@@ -7981,6 +7981,118 @@
       <p:sp>
         <p:nvSpPr>
           <p:cNvPr id="22" name="Shape 20"/>
+          <p:cNvSpPr/>
+          <p:nvPr/>
+        </p:nvSpPr>
+        <p:spPr>
+          <a:xfrm>
+            <a:off x="6519672" y="2258568"/>
+            <a:ext cx="1828800" cy="292608"/>
+          </a:xfrm>
+          <a:prstGeom prst="rect">
+            <a:avLst>
+              <a:gd name="adj" fmla="val 25000"/>
+            </a:avLst>
+          </a:prstGeom>
+          <a:solidFill>
+            <a:srgbClr val="FCE7F3"/>
+          </a:solidFill>
+          <a:ln w="19050">
+            <a:solidFill>
+              <a:srgbClr val="DB2777"/>
+            </a:solidFill>
+            <a:prstDash val="solid"/>
+          </a:ln>
+          <a:effectLst>
+            <a:outerShdw sx="100000" sy="100000" kx="0" ky="0" algn="bl" rotWithShape="0" blurRad="101600" dist="38100" dir="8100000">
+              <a:srgbClr val="000000">
+                <a:alpha val="12000"/>
+              </a:srgbClr>
+            </a:outerShdw>
+          </a:effectLst>
+        </p:spPr>
+      </p:sp>
+      <p:sp>
+        <p:nvSpPr>
+          <p:cNvPr id="23" name="Text 21"/>
+          <p:cNvSpPr/>
+          <p:nvPr/>
+        </p:nvSpPr>
+        <p:spPr>
+          <a:xfrm>
+            <a:off x="6519672" y="2258568"/>
+            <a:ext cx="1828800" cy="292608"/>
+          </a:xfrm>
+          <a:prstGeom prst="rect">
+            <a:avLst/>
+          </a:prstGeom>
+          <a:noFill/>
+          <a:ln/>
+        </p:spPr>
+        <p:txBody>
+          <a:bodyPr wrap="square" lIns="0" tIns="0" rIns="0" bIns="0" rtlCol="0" anchor="ctr"/>
+          <a:lstStyle/>
+          <a:p>
+            <a:pPr algn="ctr" indent="0" marL="0">
+              <a:buNone/>
+            </a:pPr>
+            <a:r>
+              <a:rPr lang="en-US" sz="1300" b="1" dirty="0">
+                <a:solidFill>
+                  <a:srgbClr val="9D174D"/>
+                </a:solidFill>
+                <a:latin typeface="Trebuchet MS" pitchFamily="34" charset="0"/>
+                <a:ea typeface="Trebuchet MS" pitchFamily="34" charset="-122"/>
+                <a:cs typeface="Trebuchet MS" pitchFamily="34" charset="-120"/>
+              </a:rPr>
+              <a:t>ed</a:t>
+            </a:r>
+            <a:endParaRPr lang="en-US" sz="1300" dirty="0"/>
+          </a:p>
+        </p:txBody>
+      </p:sp>
+      <p:sp>
+        <p:nvSpPr>
+          <p:cNvPr id="24" name="Text 22"/>
+          <p:cNvSpPr/>
+          <p:nvPr/>
+        </p:nvSpPr>
+        <p:spPr>
+          <a:xfrm>
+            <a:off x="6519672" y="2569464"/>
+            <a:ext cx="1828800" cy="201168"/>
+          </a:xfrm>
+          <a:prstGeom prst="rect">
+            <a:avLst/>
+          </a:prstGeom>
+          <a:noFill/>
+          <a:ln/>
+        </p:spPr>
+        <p:txBody>
+          <a:bodyPr wrap="square" lIns="0" tIns="0" rIns="0" bIns="0" rtlCol="0" anchor="t"/>
+          <a:lstStyle/>
+          <a:p>
+            <a:pPr algn="ctr" indent="0" marL="0">
+              <a:buNone/>
+            </a:pPr>
+            <a:r>
+              <a:rPr lang="en-US" sz="850" dirty="0">
+                <a:solidFill>
+                  <a:srgbClr val="475569"/>
+                </a:solidFill>
+                <a:latin typeface="Calibri" pitchFamily="34" charset="0"/>
+                <a:ea typeface="Calibri" pitchFamily="34" charset="-122"/>
+                <a:cs typeface="Calibri" pitchFamily="34" charset="-120"/>
+              </a:rPr>
+              <a:t>past tense or state of being</a:t>
+            </a:r>
+            <a:endParaRPr lang="en-US" sz="850" dirty="0"/>
+          </a:p>
+        </p:txBody>
+      </p:sp>
+      <p:sp>
+        <p:nvSpPr>
+          <p:cNvPr id="25" name="Shape 23"/>
           <p:cNvSpPr/>
           <p:nvPr/>
         </p:nvSpPr>
@@ -8007,7 +8119,7 @@
       </p:sp>
       <p:sp>
         <p:nvSpPr>
-          <p:cNvPr id="23" name="Text 21"/>
+          <p:cNvPr id="26" name="Text 24"/>
           <p:cNvSpPr/>
           <p:nvPr/>
         </p:nvSpPr>
@@ -8046,7 +8158,7 @@
       </p:sp>
       <p:sp>
         <p:nvSpPr>
-          <p:cNvPr id="24" name="Shape 22"/>
+          <p:cNvPr id="27" name="Shape 25"/>
           <p:cNvSpPr/>
           <p:nvPr/>
         </p:nvSpPr>
@@ -8073,7 +8185,7 @@
       </p:sp>
       <p:sp>
         <p:nvSpPr>
-          <p:cNvPr id="25" name="Text 23"/>
+          <p:cNvPr id="28" name="Text 26"/>
           <p:cNvSpPr/>
           <p:nvPr/>
         </p:nvSpPr>
@@ -8112,7 +8224,7 @@
       </p:sp>
       <p:sp>
         <p:nvSpPr>
-          <p:cNvPr id="26" name="Shape 24"/>
+          <p:cNvPr id="29" name="Shape 27"/>
           <p:cNvSpPr/>
           <p:nvPr/>
         </p:nvSpPr>
@@ -8139,7 +8251,7 @@
       </p:sp>
       <p:sp>
         <p:nvSpPr>
-          <p:cNvPr id="27" name="Text 25"/>
+          <p:cNvPr id="30" name="Text 28"/>
           <p:cNvSpPr/>
           <p:nvPr/>
         </p:nvSpPr>
@@ -8178,7 +8290,7 @@
       </p:sp>
       <p:sp>
         <p:nvSpPr>
-          <p:cNvPr id="28" name="Shape 26"/>
+          <p:cNvPr id="31" name="Shape 29"/>
           <p:cNvSpPr/>
           <p:nvPr/>
         </p:nvSpPr>
@@ -8205,7 +8317,7 @@
       </p:sp>
       <p:sp>
         <p:nvSpPr>
-          <p:cNvPr id="29" name="Text 27"/>
+          <p:cNvPr id="32" name="Text 30"/>
           <p:cNvSpPr/>
           <p:nvPr/>
         </p:nvSpPr>
@@ -8528,7 +8640,7 @@
                 <a:ea typeface="Calibri" pitchFamily="34" charset="-122"/>
                 <a:cs typeface="Calibri" pitchFamily="34" charset="-120"/>
               </a:rPr>
-              <a:t>Word Labs  •  wordlabs.app  •  Root: 'harm' = damage, injury, or hurt</a:t>
+              <a:t>Word Labs  •  wordlabs.app  •  Root: 'harm' = injury, damage, hurt</a:t>
             </a:r>
             <a:endParaRPr lang="en-US" sz="800" dirty="0"/>
           </a:p>
@@ -8667,7 +8779,7 @@
                 <a:ea typeface="Trebuchet MS" pitchFamily="34" charset="-122"/>
                 <a:cs typeface="Trebuchet MS" pitchFamily="34" charset="-120"/>
               </a:rPr>
-              <a:t>harmful</a:t>
+              <a:t>unharmed</a:t>
             </a:r>
             <a:endParaRPr lang="en-US" sz="2800" dirty="0"/>
           </a:p>
@@ -8747,7 +8859,7 @@
         </p:nvSpPr>
         <p:spPr>
           <a:xfrm>
-            <a:off x="2938272" y="2258568"/>
+            <a:off x="2221992" y="2258568"/>
             <a:ext cx="1828800" cy="292608"/>
           </a:xfrm>
           <a:prstGeom prst="rect">
@@ -8756,11 +8868,11 @@
             </a:avLst>
           </a:prstGeom>
           <a:solidFill>
-            <a:srgbClr val="CCFBF1"/>
+            <a:srgbClr val="DDD6FE"/>
           </a:solidFill>
           <a:ln w="19050">
             <a:solidFill>
-              <a:srgbClr val="0D9488"/>
+              <a:srgbClr val="7C3AED"/>
             </a:solidFill>
             <a:prstDash val="solid"/>
           </a:ln>
@@ -8781,7 +8893,7 @@
         </p:nvSpPr>
         <p:spPr>
           <a:xfrm>
-            <a:off x="2938272" y="2258568"/>
+            <a:off x="2221992" y="2258568"/>
             <a:ext cx="1828800" cy="292608"/>
           </a:xfrm>
           <a:prstGeom prst="rect">
@@ -8800,13 +8912,13 @@
             <a:r>
               <a:rPr lang="en-US" sz="1300" b="1" dirty="0">
                 <a:solidFill>
-                  <a:srgbClr val="0F766E"/>
+                  <a:srgbClr val="4C1D95"/>
                 </a:solidFill>
                 <a:latin typeface="Trebuchet MS" pitchFamily="34" charset="0"/>
                 <a:ea typeface="Trebuchet MS" pitchFamily="34" charset="-122"/>
                 <a:cs typeface="Trebuchet MS" pitchFamily="34" charset="-120"/>
               </a:rPr>
-              <a:t>harm</a:t>
+              <a:t>un</a:t>
             </a:r>
             <a:endParaRPr lang="en-US" sz="1300" dirty="0"/>
           </a:p>
@@ -8820,7 +8932,7 @@
         </p:nvSpPr>
         <p:spPr>
           <a:xfrm>
-            <a:off x="2938272" y="2569464"/>
+            <a:off x="2221992" y="2569464"/>
             <a:ext cx="1828800" cy="201168"/>
           </a:xfrm>
           <a:prstGeom prst="rect">
@@ -8845,7 +8957,7 @@
                 <a:ea typeface="Calibri" pitchFamily="34" charset="-122"/>
                 <a:cs typeface="Calibri" pitchFamily="34" charset="-120"/>
               </a:rPr>
-              <a:t>damage or injury</a:t>
+              <a:t>not</a:t>
             </a:r>
             <a:endParaRPr lang="en-US" sz="850" dirty="0"/>
           </a:p>
@@ -8859,7 +8971,7 @@
         </p:nvSpPr>
         <p:spPr>
           <a:xfrm>
-            <a:off x="5803392" y="2258568"/>
+            <a:off x="4370832" y="2258568"/>
             <a:ext cx="1828800" cy="292608"/>
           </a:xfrm>
           <a:prstGeom prst="rect">
@@ -8868,11 +8980,11 @@
             </a:avLst>
           </a:prstGeom>
           <a:solidFill>
-            <a:srgbClr val="FCE7F3"/>
+            <a:srgbClr val="CCFBF1"/>
           </a:solidFill>
           <a:ln w="19050">
             <a:solidFill>
-              <a:srgbClr val="DB2777"/>
+              <a:srgbClr val="0D9488"/>
             </a:solidFill>
             <a:prstDash val="solid"/>
           </a:ln>
@@ -8893,7 +9005,7 @@
         </p:nvSpPr>
         <p:spPr>
           <a:xfrm>
-            <a:off x="5803392" y="2258568"/>
+            <a:off x="4370832" y="2258568"/>
             <a:ext cx="1828800" cy="292608"/>
           </a:xfrm>
           <a:prstGeom prst="rect">
@@ -8912,13 +9024,13 @@
             <a:r>
               <a:rPr lang="en-US" sz="1300" b="1" dirty="0">
                 <a:solidFill>
-                  <a:srgbClr val="9D174D"/>
+                  <a:srgbClr val="0F766E"/>
                 </a:solidFill>
                 <a:latin typeface="Trebuchet MS" pitchFamily="34" charset="0"/>
                 <a:ea typeface="Trebuchet MS" pitchFamily="34" charset="-122"/>
                 <a:cs typeface="Trebuchet MS" pitchFamily="34" charset="-120"/>
               </a:rPr>
-              <a:t>ful</a:t>
+              <a:t>harm</a:t>
             </a:r>
             <a:endParaRPr lang="en-US" sz="1300" dirty="0"/>
           </a:p>
@@ -8932,7 +9044,7 @@
         </p:nvSpPr>
         <p:spPr>
           <a:xfrm>
-            <a:off x="5803392" y="2569464"/>
+            <a:off x="4370832" y="2569464"/>
             <a:ext cx="1828800" cy="201168"/>
           </a:xfrm>
           <a:prstGeom prst="rect">
@@ -8957,7 +9069,7 @@
                 <a:ea typeface="Calibri" pitchFamily="34" charset="-122"/>
                 <a:cs typeface="Calibri" pitchFamily="34" charset="-120"/>
               </a:rPr>
-              <a:t>full of</a:t>
+              <a:t>injury or damage</a:t>
             </a:r>
             <a:endParaRPr lang="en-US" sz="850" dirty="0"/>
           </a:p>
@@ -8966,6 +9078,118 @@
       <p:sp>
         <p:nvSpPr>
           <p:cNvPr id="22" name="Shape 20"/>
+          <p:cNvSpPr/>
+          <p:nvPr/>
+        </p:nvSpPr>
+        <p:spPr>
+          <a:xfrm>
+            <a:off x="6519672" y="2258568"/>
+            <a:ext cx="1828800" cy="292608"/>
+          </a:xfrm>
+          <a:prstGeom prst="rect">
+            <a:avLst>
+              <a:gd name="adj" fmla="val 25000"/>
+            </a:avLst>
+          </a:prstGeom>
+          <a:solidFill>
+            <a:srgbClr val="FCE7F3"/>
+          </a:solidFill>
+          <a:ln w="19050">
+            <a:solidFill>
+              <a:srgbClr val="DB2777"/>
+            </a:solidFill>
+            <a:prstDash val="solid"/>
+          </a:ln>
+          <a:effectLst>
+            <a:outerShdw sx="100000" sy="100000" kx="0" ky="0" algn="bl" rotWithShape="0" blurRad="101600" dist="38100" dir="8100000">
+              <a:srgbClr val="000000">
+                <a:alpha val="12000"/>
+              </a:srgbClr>
+            </a:outerShdw>
+          </a:effectLst>
+        </p:spPr>
+      </p:sp>
+      <p:sp>
+        <p:nvSpPr>
+          <p:cNvPr id="23" name="Text 21"/>
+          <p:cNvSpPr/>
+          <p:nvPr/>
+        </p:nvSpPr>
+        <p:spPr>
+          <a:xfrm>
+            <a:off x="6519672" y="2258568"/>
+            <a:ext cx="1828800" cy="292608"/>
+          </a:xfrm>
+          <a:prstGeom prst="rect">
+            <a:avLst/>
+          </a:prstGeom>
+          <a:noFill/>
+          <a:ln/>
+        </p:spPr>
+        <p:txBody>
+          <a:bodyPr wrap="square" lIns="0" tIns="0" rIns="0" bIns="0" rtlCol="0" anchor="ctr"/>
+          <a:lstStyle/>
+          <a:p>
+            <a:pPr algn="ctr" indent="0" marL="0">
+              <a:buNone/>
+            </a:pPr>
+            <a:r>
+              <a:rPr lang="en-US" sz="1300" b="1" dirty="0">
+                <a:solidFill>
+                  <a:srgbClr val="9D174D"/>
+                </a:solidFill>
+                <a:latin typeface="Trebuchet MS" pitchFamily="34" charset="0"/>
+                <a:ea typeface="Trebuchet MS" pitchFamily="34" charset="-122"/>
+                <a:cs typeface="Trebuchet MS" pitchFamily="34" charset="-120"/>
+              </a:rPr>
+              <a:t>ed</a:t>
+            </a:r>
+            <a:endParaRPr lang="en-US" sz="1300" dirty="0"/>
+          </a:p>
+        </p:txBody>
+      </p:sp>
+      <p:sp>
+        <p:nvSpPr>
+          <p:cNvPr id="24" name="Text 22"/>
+          <p:cNvSpPr/>
+          <p:nvPr/>
+        </p:nvSpPr>
+        <p:spPr>
+          <a:xfrm>
+            <a:off x="6519672" y="2569464"/>
+            <a:ext cx="1828800" cy="201168"/>
+          </a:xfrm>
+          <a:prstGeom prst="rect">
+            <a:avLst/>
+          </a:prstGeom>
+          <a:noFill/>
+          <a:ln/>
+        </p:spPr>
+        <p:txBody>
+          <a:bodyPr wrap="square" lIns="0" tIns="0" rIns="0" bIns="0" rtlCol="0" anchor="t"/>
+          <a:lstStyle/>
+          <a:p>
+            <a:pPr algn="ctr" indent="0" marL="0">
+              <a:buNone/>
+            </a:pPr>
+            <a:r>
+              <a:rPr lang="en-US" sz="850" dirty="0">
+                <a:solidFill>
+                  <a:srgbClr val="475569"/>
+                </a:solidFill>
+                <a:latin typeface="Calibri" pitchFamily="34" charset="0"/>
+                <a:ea typeface="Calibri" pitchFamily="34" charset="-122"/>
+                <a:cs typeface="Calibri" pitchFamily="34" charset="-120"/>
+              </a:rPr>
+              <a:t>past tense or state of being</a:t>
+            </a:r>
+            <a:endParaRPr lang="en-US" sz="850" dirty="0"/>
+          </a:p>
+        </p:txBody>
+      </p:sp>
+      <p:sp>
+        <p:nvSpPr>
+          <p:cNvPr id="25" name="Shape 23"/>
           <p:cNvSpPr/>
           <p:nvPr/>
         </p:nvSpPr>
@@ -8992,7 +9216,7 @@
       </p:sp>
       <p:sp>
         <p:nvSpPr>
-          <p:cNvPr id="23" name="Text 21"/>
+          <p:cNvPr id="26" name="Text 24"/>
           <p:cNvSpPr/>
           <p:nvPr/>
         </p:nvSpPr>
@@ -9031,7 +9255,7 @@
       </p:sp>
       <p:sp>
         <p:nvSpPr>
-          <p:cNvPr id="24" name="Shape 22"/>
+          <p:cNvPr id="27" name="Shape 25"/>
           <p:cNvSpPr/>
           <p:nvPr/>
         </p:nvSpPr>
@@ -9058,7 +9282,7 @@
       </p:sp>
       <p:sp>
         <p:nvSpPr>
-          <p:cNvPr id="25" name="Shape 23"/>
+          <p:cNvPr id="28" name="Shape 26"/>
           <p:cNvSpPr/>
           <p:nvPr/>
         </p:nvSpPr>
@@ -9085,7 +9309,7 @@
       </p:sp>
       <p:sp>
         <p:nvSpPr>
-          <p:cNvPr id="26" name="Text 24"/>
+          <p:cNvPr id="29" name="Text 27"/>
           <p:cNvSpPr/>
           <p:nvPr/>
         </p:nvSpPr>
@@ -9116,7 +9340,7 @@
                 <a:ea typeface="Trebuchet MS" pitchFamily="34" charset="-122"/>
                 <a:cs typeface="Trebuchet MS" pitchFamily="34" charset="-120"/>
               </a:rPr>
-              <a:t>harm</a:t>
+              <a:t>un</a:t>
             </a:r>
             <a:endParaRPr lang="en-US" sz="1400" dirty="0"/>
           </a:p>
@@ -9124,7 +9348,7 @@
       </p:sp>
       <p:sp>
         <p:nvSpPr>
-          <p:cNvPr id="27" name="Text 25"/>
+          <p:cNvPr id="30" name="Text 28"/>
           <p:cNvSpPr/>
           <p:nvPr/>
         </p:nvSpPr>
@@ -9163,7 +9387,7 @@
       </p:sp>
       <p:sp>
         <p:nvSpPr>
-          <p:cNvPr id="28" name="Shape 26"/>
+          <p:cNvPr id="31" name="Shape 29"/>
           <p:cNvSpPr/>
           <p:nvPr/>
         </p:nvSpPr>
@@ -9190,7 +9414,7 @@
       </p:sp>
       <p:sp>
         <p:nvSpPr>
-          <p:cNvPr id="29" name="Text 27"/>
+          <p:cNvPr id="32" name="Text 30"/>
           <p:cNvSpPr/>
           <p:nvPr/>
         </p:nvSpPr>
@@ -9221,7 +9445,7 @@
                 <a:ea typeface="Trebuchet MS" pitchFamily="34" charset="-122"/>
                 <a:cs typeface="Trebuchet MS" pitchFamily="34" charset="-120"/>
               </a:rPr>
-              <a:t>ful</a:t>
+              <a:t>harmed</a:t>
             </a:r>
             <a:endParaRPr lang="en-US" sz="1400" dirty="0"/>
           </a:p>
@@ -9229,7 +9453,7 @@
       </p:sp>
       <p:sp>
         <p:nvSpPr>
-          <p:cNvPr id="30" name="Shape 28"/>
+          <p:cNvPr id="33" name="Shape 31"/>
           <p:cNvSpPr/>
           <p:nvPr/>
         </p:nvSpPr>
@@ -9256,7 +9480,7 @@
       </p:sp>
       <p:sp>
         <p:nvSpPr>
-          <p:cNvPr id="31" name="Text 29"/>
+          <p:cNvPr id="34" name="Text 32"/>
           <p:cNvSpPr/>
           <p:nvPr/>
         </p:nvSpPr>
@@ -9295,7 +9519,7 @@
       </p:sp>
       <p:sp>
         <p:nvSpPr>
-          <p:cNvPr id="32" name="Shape 30"/>
+          <p:cNvPr id="35" name="Shape 33"/>
           <p:cNvSpPr/>
           <p:nvPr/>
         </p:nvSpPr>
@@ -9322,7 +9546,7 @@
       </p:sp>
       <p:sp>
         <p:nvSpPr>
-          <p:cNvPr id="33" name="Text 31"/>
+          <p:cNvPr id="36" name="Text 34"/>
           <p:cNvSpPr/>
           <p:nvPr/>
         </p:nvSpPr>
@@ -9645,7 +9869,7 @@
                 <a:ea typeface="Calibri" pitchFamily="34" charset="-122"/>
                 <a:cs typeface="Calibri" pitchFamily="34" charset="-120"/>
               </a:rPr>
-              <a:t>Word Labs  •  wordlabs.app  •  Root: 'harm' = damage, injury, or hurt</a:t>
+              <a:t>Word Labs  •  wordlabs.app  •  Root: 'harm' = injury, damage, hurt</a:t>
             </a:r>
             <a:endParaRPr lang="en-US" sz="800" dirty="0"/>
           </a:p>
@@ -9784,7 +10008,7 @@
                 <a:ea typeface="Trebuchet MS" pitchFamily="34" charset="-122"/>
                 <a:cs typeface="Trebuchet MS" pitchFamily="34" charset="-120"/>
               </a:rPr>
-              <a:t>harmful</a:t>
+              <a:t>unharmed</a:t>
             </a:r>
             <a:endParaRPr lang="en-US" sz="2800" dirty="0"/>
           </a:p>
@@ -9864,7 +10088,7 @@
         </p:nvSpPr>
         <p:spPr>
           <a:xfrm>
-            <a:off x="2938272" y="2258568"/>
+            <a:off x="2221992" y="2258568"/>
             <a:ext cx="1828800" cy="292608"/>
           </a:xfrm>
           <a:prstGeom prst="rect">
@@ -9873,11 +10097,11 @@
             </a:avLst>
           </a:prstGeom>
           <a:solidFill>
-            <a:srgbClr val="CCFBF1"/>
+            <a:srgbClr val="DDD6FE"/>
           </a:solidFill>
           <a:ln w="19050">
             <a:solidFill>
-              <a:srgbClr val="0D9488"/>
+              <a:srgbClr val="7C3AED"/>
             </a:solidFill>
             <a:prstDash val="solid"/>
           </a:ln>
@@ -9898,7 +10122,7 @@
         </p:nvSpPr>
         <p:spPr>
           <a:xfrm>
-            <a:off x="2938272" y="2258568"/>
+            <a:off x="2221992" y="2258568"/>
             <a:ext cx="1828800" cy="292608"/>
           </a:xfrm>
           <a:prstGeom prst="rect">
@@ -9917,13 +10141,13 @@
             <a:r>
               <a:rPr lang="en-US" sz="1300" b="1" dirty="0">
                 <a:solidFill>
-                  <a:srgbClr val="0F766E"/>
+                  <a:srgbClr val="4C1D95"/>
                 </a:solidFill>
                 <a:latin typeface="Trebuchet MS" pitchFamily="34" charset="0"/>
                 <a:ea typeface="Trebuchet MS" pitchFamily="34" charset="-122"/>
                 <a:cs typeface="Trebuchet MS" pitchFamily="34" charset="-120"/>
               </a:rPr>
-              <a:t>harm</a:t>
+              <a:t>un</a:t>
             </a:r>
             <a:endParaRPr lang="en-US" sz="1300" dirty="0"/>
           </a:p>
@@ -9937,7 +10161,7 @@
         </p:nvSpPr>
         <p:spPr>
           <a:xfrm>
-            <a:off x="2938272" y="2569464"/>
+            <a:off x="2221992" y="2569464"/>
             <a:ext cx="1828800" cy="201168"/>
           </a:xfrm>
           <a:prstGeom prst="rect">
@@ -9962,7 +10186,7 @@
                 <a:ea typeface="Calibri" pitchFamily="34" charset="-122"/>
                 <a:cs typeface="Calibri" pitchFamily="34" charset="-120"/>
               </a:rPr>
-              <a:t>damage or injury</a:t>
+              <a:t>not</a:t>
             </a:r>
             <a:endParaRPr lang="en-US" sz="850" dirty="0"/>
           </a:p>
@@ -9976,7 +10200,7 @@
         </p:nvSpPr>
         <p:spPr>
           <a:xfrm>
-            <a:off x="5803392" y="2258568"/>
+            <a:off x="4370832" y="2258568"/>
             <a:ext cx="1828800" cy="292608"/>
           </a:xfrm>
           <a:prstGeom prst="rect">
@@ -9985,11 +10209,11 @@
             </a:avLst>
           </a:prstGeom>
           <a:solidFill>
-            <a:srgbClr val="FCE7F3"/>
+            <a:srgbClr val="CCFBF1"/>
           </a:solidFill>
           <a:ln w="19050">
             <a:solidFill>
-              <a:srgbClr val="DB2777"/>
+              <a:srgbClr val="0D9488"/>
             </a:solidFill>
             <a:prstDash val="solid"/>
           </a:ln>
@@ -10010,7 +10234,7 @@
         </p:nvSpPr>
         <p:spPr>
           <a:xfrm>
-            <a:off x="5803392" y="2258568"/>
+            <a:off x="4370832" y="2258568"/>
             <a:ext cx="1828800" cy="292608"/>
           </a:xfrm>
           <a:prstGeom prst="rect">
@@ -10029,13 +10253,13 @@
             <a:r>
               <a:rPr lang="en-US" sz="1300" b="1" dirty="0">
                 <a:solidFill>
-                  <a:srgbClr val="9D174D"/>
+                  <a:srgbClr val="0F766E"/>
                 </a:solidFill>
                 <a:latin typeface="Trebuchet MS" pitchFamily="34" charset="0"/>
                 <a:ea typeface="Trebuchet MS" pitchFamily="34" charset="-122"/>
                 <a:cs typeface="Trebuchet MS" pitchFamily="34" charset="-120"/>
               </a:rPr>
-              <a:t>ful</a:t>
+              <a:t>harm</a:t>
             </a:r>
             <a:endParaRPr lang="en-US" sz="1300" dirty="0"/>
           </a:p>
@@ -10049,7 +10273,7 @@
         </p:nvSpPr>
         <p:spPr>
           <a:xfrm>
-            <a:off x="5803392" y="2569464"/>
+            <a:off x="4370832" y="2569464"/>
             <a:ext cx="1828800" cy="201168"/>
           </a:xfrm>
           <a:prstGeom prst="rect">
@@ -10074,7 +10298,7 @@
                 <a:ea typeface="Calibri" pitchFamily="34" charset="-122"/>
                 <a:cs typeface="Calibri" pitchFamily="34" charset="-120"/>
               </a:rPr>
-              <a:t>full of</a:t>
+              <a:t>injury or damage</a:t>
             </a:r>
             <a:endParaRPr lang="en-US" sz="850" dirty="0"/>
           </a:p>
@@ -10083,6 +10307,118 @@
       <p:sp>
         <p:nvSpPr>
           <p:cNvPr id="22" name="Shape 20"/>
+          <p:cNvSpPr/>
+          <p:nvPr/>
+        </p:nvSpPr>
+        <p:spPr>
+          <a:xfrm>
+            <a:off x="6519672" y="2258568"/>
+            <a:ext cx="1828800" cy="292608"/>
+          </a:xfrm>
+          <a:prstGeom prst="rect">
+            <a:avLst>
+              <a:gd name="adj" fmla="val 25000"/>
+            </a:avLst>
+          </a:prstGeom>
+          <a:solidFill>
+            <a:srgbClr val="FCE7F3"/>
+          </a:solidFill>
+          <a:ln w="19050">
+            <a:solidFill>
+              <a:srgbClr val="DB2777"/>
+            </a:solidFill>
+            <a:prstDash val="solid"/>
+          </a:ln>
+          <a:effectLst>
+            <a:outerShdw sx="100000" sy="100000" kx="0" ky="0" algn="bl" rotWithShape="0" blurRad="101600" dist="38100" dir="8100000">
+              <a:srgbClr val="000000">
+                <a:alpha val="12000"/>
+              </a:srgbClr>
+            </a:outerShdw>
+          </a:effectLst>
+        </p:spPr>
+      </p:sp>
+      <p:sp>
+        <p:nvSpPr>
+          <p:cNvPr id="23" name="Text 21"/>
+          <p:cNvSpPr/>
+          <p:nvPr/>
+        </p:nvSpPr>
+        <p:spPr>
+          <a:xfrm>
+            <a:off x="6519672" y="2258568"/>
+            <a:ext cx="1828800" cy="292608"/>
+          </a:xfrm>
+          <a:prstGeom prst="rect">
+            <a:avLst/>
+          </a:prstGeom>
+          <a:noFill/>
+          <a:ln/>
+        </p:spPr>
+        <p:txBody>
+          <a:bodyPr wrap="square" lIns="0" tIns="0" rIns="0" bIns="0" rtlCol="0" anchor="ctr"/>
+          <a:lstStyle/>
+          <a:p>
+            <a:pPr algn="ctr" indent="0" marL="0">
+              <a:buNone/>
+            </a:pPr>
+            <a:r>
+              <a:rPr lang="en-US" sz="1300" b="1" dirty="0">
+                <a:solidFill>
+                  <a:srgbClr val="9D174D"/>
+                </a:solidFill>
+                <a:latin typeface="Trebuchet MS" pitchFamily="34" charset="0"/>
+                <a:ea typeface="Trebuchet MS" pitchFamily="34" charset="-122"/>
+                <a:cs typeface="Trebuchet MS" pitchFamily="34" charset="-120"/>
+              </a:rPr>
+              <a:t>ed</a:t>
+            </a:r>
+            <a:endParaRPr lang="en-US" sz="1300" dirty="0"/>
+          </a:p>
+        </p:txBody>
+      </p:sp>
+      <p:sp>
+        <p:nvSpPr>
+          <p:cNvPr id="24" name="Text 22"/>
+          <p:cNvSpPr/>
+          <p:nvPr/>
+        </p:nvSpPr>
+        <p:spPr>
+          <a:xfrm>
+            <a:off x="6519672" y="2569464"/>
+            <a:ext cx="1828800" cy="201168"/>
+          </a:xfrm>
+          <a:prstGeom prst="rect">
+            <a:avLst/>
+          </a:prstGeom>
+          <a:noFill/>
+          <a:ln/>
+        </p:spPr>
+        <p:txBody>
+          <a:bodyPr wrap="square" lIns="0" tIns="0" rIns="0" bIns="0" rtlCol="0" anchor="t"/>
+          <a:lstStyle/>
+          <a:p>
+            <a:pPr algn="ctr" indent="0" marL="0">
+              <a:buNone/>
+            </a:pPr>
+            <a:r>
+              <a:rPr lang="en-US" sz="850" dirty="0">
+                <a:solidFill>
+                  <a:srgbClr val="475569"/>
+                </a:solidFill>
+                <a:latin typeface="Calibri" pitchFamily="34" charset="0"/>
+                <a:ea typeface="Calibri" pitchFamily="34" charset="-122"/>
+                <a:cs typeface="Calibri" pitchFamily="34" charset="-120"/>
+              </a:rPr>
+              <a:t>past tense or state of being</a:t>
+            </a:r>
+            <a:endParaRPr lang="en-US" sz="850" dirty="0"/>
+          </a:p>
+        </p:txBody>
+      </p:sp>
+      <p:sp>
+        <p:nvSpPr>
+          <p:cNvPr id="25" name="Shape 23"/>
           <p:cNvSpPr/>
           <p:nvPr/>
         </p:nvSpPr>
@@ -10109,7 +10445,7 @@
       </p:sp>
       <p:sp>
         <p:nvSpPr>
-          <p:cNvPr id="23" name="Text 21"/>
+          <p:cNvPr id="26" name="Text 24"/>
           <p:cNvSpPr/>
           <p:nvPr/>
         </p:nvSpPr>
@@ -10148,7 +10484,7 @@
       </p:sp>
       <p:sp>
         <p:nvSpPr>
-          <p:cNvPr id="24" name="Shape 22"/>
+          <p:cNvPr id="27" name="Shape 25"/>
           <p:cNvSpPr/>
           <p:nvPr/>
         </p:nvSpPr>
@@ -10175,7 +10511,7 @@
       </p:sp>
       <p:sp>
         <p:nvSpPr>
-          <p:cNvPr id="25" name="Shape 23"/>
+          <p:cNvPr id="28" name="Shape 26"/>
           <p:cNvSpPr/>
           <p:nvPr/>
         </p:nvSpPr>
@@ -10202,7 +10538,7 @@
       </p:sp>
       <p:sp>
         <p:nvSpPr>
-          <p:cNvPr id="26" name="Text 24"/>
+          <p:cNvPr id="29" name="Text 27"/>
           <p:cNvSpPr/>
           <p:nvPr/>
         </p:nvSpPr>
@@ -10233,7 +10569,7 @@
                 <a:ea typeface="Trebuchet MS" pitchFamily="34" charset="-122"/>
                 <a:cs typeface="Trebuchet MS" pitchFamily="34" charset="-120"/>
               </a:rPr>
-              <a:t>harm</a:t>
+              <a:t>un</a:t>
             </a:r>
             <a:endParaRPr lang="en-US" sz="1400" dirty="0"/>
           </a:p>
@@ -10241,7 +10577,7 @@
       </p:sp>
       <p:sp>
         <p:nvSpPr>
-          <p:cNvPr id="27" name="Text 25"/>
+          <p:cNvPr id="30" name="Text 28"/>
           <p:cNvSpPr/>
           <p:nvPr/>
         </p:nvSpPr>
@@ -10280,7 +10616,7 @@
       </p:sp>
       <p:sp>
         <p:nvSpPr>
-          <p:cNvPr id="28" name="Shape 26"/>
+          <p:cNvPr id="31" name="Shape 29"/>
           <p:cNvSpPr/>
           <p:nvPr/>
         </p:nvSpPr>
@@ -10307,7 +10643,7 @@
       </p:sp>
       <p:sp>
         <p:nvSpPr>
-          <p:cNvPr id="29" name="Text 27"/>
+          <p:cNvPr id="32" name="Text 30"/>
           <p:cNvSpPr/>
           <p:nvPr/>
         </p:nvSpPr>
@@ -10338,7 +10674,7 @@
                 <a:ea typeface="Trebuchet MS" pitchFamily="34" charset="-122"/>
                 <a:cs typeface="Trebuchet MS" pitchFamily="34" charset="-120"/>
               </a:rPr>
-              <a:t>ful</a:t>
+              <a:t>harmed</a:t>
             </a:r>
             <a:endParaRPr lang="en-US" sz="1400" dirty="0"/>
           </a:p>
@@ -10346,7 +10682,7 @@
       </p:sp>
       <p:sp>
         <p:nvSpPr>
-          <p:cNvPr id="30" name="Shape 28"/>
+          <p:cNvPr id="33" name="Shape 31"/>
           <p:cNvSpPr/>
           <p:nvPr/>
         </p:nvSpPr>
@@ -10373,7 +10709,7 @@
       </p:sp>
       <p:sp>
         <p:nvSpPr>
-          <p:cNvPr id="31" name="Text 29"/>
+          <p:cNvPr id="34" name="Text 32"/>
           <p:cNvSpPr/>
           <p:nvPr/>
         </p:nvSpPr>
@@ -10412,7 +10748,7 @@
       </p:sp>
       <p:sp>
         <p:nvSpPr>
-          <p:cNvPr id="32" name="Shape 30"/>
+          <p:cNvPr id="35" name="Shape 33"/>
           <p:cNvSpPr/>
           <p:nvPr/>
         </p:nvSpPr>
@@ -10439,7 +10775,7 @@
       </p:sp>
       <p:sp>
         <p:nvSpPr>
-          <p:cNvPr id="33" name="Shape 31"/>
+          <p:cNvPr id="36" name="Shape 34"/>
           <p:cNvSpPr/>
           <p:nvPr/>
         </p:nvSpPr>
@@ -10466,7 +10802,7 @@
       </p:sp>
       <p:sp>
         <p:nvSpPr>
-          <p:cNvPr id="34" name="Text 32"/>
+          <p:cNvPr id="37" name="Text 35"/>
           <p:cNvSpPr/>
           <p:nvPr/>
         </p:nvSpPr>
@@ -10497,7 +10833,7 @@
                 <a:ea typeface="Trebuchet MS" pitchFamily="34" charset="-122"/>
                 <a:cs typeface="Trebuchet MS" pitchFamily="34" charset="-120"/>
               </a:rPr>
-              <a:t>h</a:t>
+              <a:t>u</a:t>
             </a:r>
             <a:endParaRPr lang="en-US" sz="900" dirty="0"/>
           </a:p>
@@ -10505,7 +10841,7 @@
       </p:sp>
       <p:sp>
         <p:nvSpPr>
-          <p:cNvPr id="35" name="Shape 33"/>
+          <p:cNvPr id="38" name="Shape 36"/>
           <p:cNvSpPr/>
           <p:nvPr/>
         </p:nvSpPr>
@@ -10532,7 +10868,7 @@
       </p:sp>
       <p:sp>
         <p:nvSpPr>
-          <p:cNvPr id="36" name="Text 34"/>
+          <p:cNvPr id="39" name="Text 37"/>
           <p:cNvSpPr/>
           <p:nvPr/>
         </p:nvSpPr>
@@ -10563,7 +10899,7 @@
                 <a:ea typeface="Trebuchet MS" pitchFamily="34" charset="-122"/>
                 <a:cs typeface="Trebuchet MS" pitchFamily="34" charset="-120"/>
               </a:rPr>
-              <a:t>ar</a:t>
+              <a:t>n</a:t>
             </a:r>
             <a:endParaRPr lang="en-US" sz="900" dirty="0"/>
           </a:p>
@@ -10571,7 +10907,7 @@
       </p:sp>
       <p:sp>
         <p:nvSpPr>
-          <p:cNvPr id="37" name="Shape 35"/>
+          <p:cNvPr id="40" name="Shape 38"/>
           <p:cNvSpPr/>
           <p:nvPr/>
         </p:nvSpPr>
@@ -10598,7 +10934,7 @@
       </p:sp>
       <p:sp>
         <p:nvSpPr>
-          <p:cNvPr id="38" name="Text 36"/>
+          <p:cNvPr id="41" name="Text 39"/>
           <p:cNvSpPr/>
           <p:nvPr/>
         </p:nvSpPr>
@@ -10629,7 +10965,7 @@
                 <a:ea typeface="Trebuchet MS" pitchFamily="34" charset="-122"/>
                 <a:cs typeface="Trebuchet MS" pitchFamily="34" charset="-120"/>
               </a:rPr>
-              <a:t>m</a:t>
+              <a:t>h</a:t>
             </a:r>
             <a:endParaRPr lang="en-US" sz="900" dirty="0"/>
           </a:p>
@@ -10637,7 +10973,7 @@
       </p:sp>
       <p:sp>
         <p:nvSpPr>
-          <p:cNvPr id="39" name="Shape 37"/>
+          <p:cNvPr id="42" name="Shape 40"/>
           <p:cNvSpPr/>
           <p:nvPr/>
         </p:nvSpPr>
@@ -10664,7 +11000,7 @@
       </p:sp>
       <p:sp>
         <p:nvSpPr>
-          <p:cNvPr id="40" name="Text 38"/>
+          <p:cNvPr id="43" name="Text 41"/>
           <p:cNvSpPr/>
           <p:nvPr/>
         </p:nvSpPr>
@@ -10695,7 +11031,7 @@
                 <a:ea typeface="Trebuchet MS" pitchFamily="34" charset="-122"/>
                 <a:cs typeface="Trebuchet MS" pitchFamily="34" charset="-120"/>
               </a:rPr>
-              <a:t>f</a:t>
+              <a:t>ar</a:t>
             </a:r>
             <a:endParaRPr lang="en-US" sz="900" dirty="0"/>
           </a:p>
@@ -10703,7 +11039,7 @@
       </p:sp>
       <p:sp>
         <p:nvSpPr>
-          <p:cNvPr id="41" name="Shape 39"/>
+          <p:cNvPr id="44" name="Shape 42"/>
           <p:cNvSpPr/>
           <p:nvPr/>
         </p:nvSpPr>
@@ -10730,7 +11066,7 @@
       </p:sp>
       <p:sp>
         <p:nvSpPr>
-          <p:cNvPr id="42" name="Text 40"/>
+          <p:cNvPr id="45" name="Text 43"/>
           <p:cNvSpPr/>
           <p:nvPr/>
         </p:nvSpPr>
@@ -10761,7 +11097,7 @@
                 <a:ea typeface="Trebuchet MS" pitchFamily="34" charset="-122"/>
                 <a:cs typeface="Trebuchet MS" pitchFamily="34" charset="-120"/>
               </a:rPr>
-              <a:t>u</a:t>
+              <a:t>m</a:t>
             </a:r>
             <a:endParaRPr lang="en-US" sz="900" dirty="0"/>
           </a:p>
@@ -10769,7 +11105,7 @@
       </p:sp>
       <p:sp>
         <p:nvSpPr>
-          <p:cNvPr id="43" name="Shape 41"/>
+          <p:cNvPr id="46" name="Shape 44"/>
           <p:cNvSpPr/>
           <p:nvPr/>
         </p:nvSpPr>
@@ -10796,7 +11132,7 @@
       </p:sp>
       <p:sp>
         <p:nvSpPr>
-          <p:cNvPr id="44" name="Text 42"/>
+          <p:cNvPr id="47" name="Text 45"/>
           <p:cNvSpPr/>
           <p:nvPr/>
         </p:nvSpPr>
@@ -10827,7 +11163,7 @@
                 <a:ea typeface="Trebuchet MS" pitchFamily="34" charset="-122"/>
                 <a:cs typeface="Trebuchet MS" pitchFamily="34" charset="-120"/>
               </a:rPr>
-              <a:t>l</a:t>
+              <a:t>d</a:t>
             </a:r>
             <a:endParaRPr lang="en-US" sz="900" dirty="0"/>
           </a:p>
@@ -11119,7 +11455,7 @@
                 <a:ea typeface="Calibri" pitchFamily="34" charset="-122"/>
                 <a:cs typeface="Calibri" pitchFamily="34" charset="-120"/>
               </a:rPr>
-              <a:t>Word Labs  •  wordlabs.app  •  Root: 'harm' = damage, injury, or hurt</a:t>
+              <a:t>Word Labs  •  wordlabs.app  •  Root: 'harm' = injury, damage, hurt</a:t>
             </a:r>
             <a:endParaRPr lang="en-US" sz="800" dirty="0"/>
           </a:p>
@@ -11258,7 +11594,7 @@
                 <a:ea typeface="Trebuchet MS" pitchFamily="34" charset="-122"/>
                 <a:cs typeface="Trebuchet MS" pitchFamily="34" charset="-120"/>
               </a:rPr>
-              <a:t>harmless</a:t>
+              <a:t>harming</a:t>
             </a:r>
             <a:endParaRPr lang="en-US" sz="2800" dirty="0"/>
           </a:p>
@@ -11946,7 +12282,7 @@
                 <a:ea typeface="Calibri" pitchFamily="34" charset="-122"/>
                 <a:cs typeface="Calibri" pitchFamily="34" charset="-120"/>
               </a:rPr>
-              <a:t>Word Labs  •  wordlabs.app  •  Root: 'harm' = damage, injury, or hurt</a:t>
+              <a:t>Word Labs  •  wordlabs.app  •  Root: 'harm' = injury, damage, hurt</a:t>
             </a:r>
             <a:endParaRPr lang="en-US" sz="800" dirty="0"/>
           </a:p>
@@ -12085,7 +12421,7 @@
                 <a:ea typeface="Trebuchet MS" pitchFamily="34" charset="-122"/>
                 <a:cs typeface="Trebuchet MS" pitchFamily="34" charset="-120"/>
               </a:rPr>
-              <a:t>harmless</a:t>
+              <a:t>harming</a:t>
             </a:r>
             <a:endParaRPr lang="en-US" sz="2800" dirty="0"/>
           </a:p>
@@ -12263,7 +12599,7 @@
                 <a:ea typeface="Calibri" pitchFamily="34" charset="-122"/>
                 <a:cs typeface="Calibri" pitchFamily="34" charset="-120"/>
               </a:rPr>
-              <a:t>damage or injury</a:t>
+              <a:t>injury or damage</a:t>
             </a:r>
             <a:endParaRPr lang="en-US" sz="850" dirty="0"/>
           </a:p>
@@ -12286,11 +12622,11 @@
             </a:avLst>
           </a:prstGeom>
           <a:solidFill>
-            <a:srgbClr val="DDD6FE"/>
+            <a:srgbClr val="FCE7F3"/>
           </a:solidFill>
           <a:ln w="19050">
             <a:solidFill>
-              <a:srgbClr val="7C3AED"/>
+              <a:srgbClr val="DB2777"/>
             </a:solidFill>
             <a:prstDash val="solid"/>
           </a:ln>
@@ -12330,13 +12666,13 @@
             <a:r>
               <a:rPr lang="en-US" sz="1300" b="1" dirty="0">
                 <a:solidFill>
-                  <a:srgbClr val="4C1D95"/>
+                  <a:srgbClr val="9D174D"/>
                 </a:solidFill>
                 <a:latin typeface="Trebuchet MS" pitchFamily="34" charset="0"/>
                 <a:ea typeface="Trebuchet MS" pitchFamily="34" charset="-122"/>
                 <a:cs typeface="Trebuchet MS" pitchFamily="34" charset="-120"/>
               </a:rPr>
-              <a:t>less</a:t>
+              <a:t>ing</a:t>
             </a:r>
             <a:endParaRPr lang="en-US" sz="1300" dirty="0"/>
           </a:p>
@@ -12375,7 +12711,7 @@
                 <a:ea typeface="Calibri" pitchFamily="34" charset="-122"/>
                 <a:cs typeface="Calibri" pitchFamily="34" charset="-120"/>
               </a:rPr>
-              <a:t>without</a:t>
+              <a:t>action happening now</a:t>
             </a:r>
             <a:endParaRPr lang="en-US" sz="850" dirty="0"/>
           </a:p>
@@ -12931,7 +13267,7 @@
                 <a:ea typeface="Calibri" pitchFamily="34" charset="-122"/>
                 <a:cs typeface="Calibri" pitchFamily="34" charset="-120"/>
               </a:rPr>
-              <a:t>Word Labs  •  wordlabs.app  •  Root: 'harm' = damage, injury, or hurt</a:t>
+              <a:t>Word Labs  •  wordlabs.app  •  Root: 'harm' = injury, damage, hurt</a:t>
             </a:r>
             <a:endParaRPr lang="en-US" sz="800" dirty="0"/>
           </a:p>
@@ -13070,7 +13406,7 @@
                 <a:ea typeface="Trebuchet MS" pitchFamily="34" charset="-122"/>
                 <a:cs typeface="Trebuchet MS" pitchFamily="34" charset="-120"/>
               </a:rPr>
-              <a:t>harmless</a:t>
+              <a:t>harming</a:t>
             </a:r>
             <a:endParaRPr lang="en-US" sz="2800" dirty="0"/>
           </a:p>
@@ -13248,7 +13584,7 @@
                 <a:ea typeface="Calibri" pitchFamily="34" charset="-122"/>
                 <a:cs typeface="Calibri" pitchFamily="34" charset="-120"/>
               </a:rPr>
-              <a:t>damage or injury</a:t>
+              <a:t>injury or damage</a:t>
             </a:r>
             <a:endParaRPr lang="en-US" sz="850" dirty="0"/>
           </a:p>
@@ -13271,11 +13607,11 @@
             </a:avLst>
           </a:prstGeom>
           <a:solidFill>
-            <a:srgbClr val="DDD6FE"/>
+            <a:srgbClr val="FCE7F3"/>
           </a:solidFill>
           <a:ln w="19050">
             <a:solidFill>
-              <a:srgbClr val="7C3AED"/>
+              <a:srgbClr val="DB2777"/>
             </a:solidFill>
             <a:prstDash val="solid"/>
           </a:ln>
@@ -13315,13 +13651,13 @@
             <a:r>
               <a:rPr lang="en-US" sz="1300" b="1" dirty="0">
                 <a:solidFill>
-                  <a:srgbClr val="4C1D95"/>
+                  <a:srgbClr val="9D174D"/>
                 </a:solidFill>
                 <a:latin typeface="Trebuchet MS" pitchFamily="34" charset="0"/>
                 <a:ea typeface="Trebuchet MS" pitchFamily="34" charset="-122"/>
                 <a:cs typeface="Trebuchet MS" pitchFamily="34" charset="-120"/>
               </a:rPr>
-              <a:t>less</a:t>
+              <a:t>ing</a:t>
             </a:r>
             <a:endParaRPr lang="en-US" sz="1300" dirty="0"/>
           </a:p>
@@ -13360,7 +13696,7 @@
                 <a:ea typeface="Calibri" pitchFamily="34" charset="-122"/>
                 <a:cs typeface="Calibri" pitchFamily="34" charset="-120"/>
               </a:rPr>
-              <a:t>without</a:t>
+              <a:t>action happening now</a:t>
             </a:r>
             <a:endParaRPr lang="en-US" sz="850" dirty="0"/>
           </a:p>
@@ -13624,7 +13960,7 @@
                 <a:ea typeface="Trebuchet MS" pitchFamily="34" charset="-122"/>
                 <a:cs typeface="Trebuchet MS" pitchFamily="34" charset="-120"/>
               </a:rPr>
-              <a:t>less</a:t>
+              <a:t>ing</a:t>
             </a:r>
             <a:endParaRPr lang="en-US" sz="1400" dirty="0"/>
           </a:p>
@@ -13957,7 +14293,7 @@
                 <a:ea typeface="Calibri" pitchFamily="34" charset="-122"/>
                 <a:cs typeface="Calibri" pitchFamily="34" charset="-120"/>
               </a:rPr>
-              <a:t>Root 'harm' — damage, injury, or hurt</a:t>
+              <a:t>Root 'harm' — injury, damage, hurt</a:t>
             </a:r>
             <a:endParaRPr lang="en-US" sz="1600" dirty="0"/>
           </a:p>
@@ -14313,7 +14649,7 @@
                 <a:ea typeface="Calibri" pitchFamily="34" charset="-122"/>
                 <a:cs typeface="Calibri" pitchFamily="34" charset="-120"/>
               </a:rPr>
-              <a:t>Word Labs  •  wordlabs.app  •  Root: 'harm' = damage, injury, or hurt</a:t>
+              <a:t>Word Labs  •  wordlabs.app  •  Root: 'harm' = injury, damage, hurt</a:t>
             </a:r>
             <a:endParaRPr lang="en-US" sz="800" dirty="0"/>
           </a:p>
@@ -14452,7 +14788,7 @@
                 <a:ea typeface="Trebuchet MS" pitchFamily="34" charset="-122"/>
                 <a:cs typeface="Trebuchet MS" pitchFamily="34" charset="-120"/>
               </a:rPr>
-              <a:t>harmless</a:t>
+              <a:t>harming</a:t>
             </a:r>
             <a:endParaRPr lang="en-US" sz="2800" dirty="0"/>
           </a:p>
@@ -14630,7 +14966,7 @@
                 <a:ea typeface="Calibri" pitchFamily="34" charset="-122"/>
                 <a:cs typeface="Calibri" pitchFamily="34" charset="-120"/>
               </a:rPr>
-              <a:t>damage or injury</a:t>
+              <a:t>injury or damage</a:t>
             </a:r>
             <a:endParaRPr lang="en-US" sz="850" dirty="0"/>
           </a:p>
@@ -14653,11 +14989,11 @@
             </a:avLst>
           </a:prstGeom>
           <a:solidFill>
-            <a:srgbClr val="DDD6FE"/>
+            <a:srgbClr val="FCE7F3"/>
           </a:solidFill>
           <a:ln w="19050">
             <a:solidFill>
-              <a:srgbClr val="7C3AED"/>
+              <a:srgbClr val="DB2777"/>
             </a:solidFill>
             <a:prstDash val="solid"/>
           </a:ln>
@@ -14697,13 +15033,13 @@
             <a:r>
               <a:rPr lang="en-US" sz="1300" b="1" dirty="0">
                 <a:solidFill>
-                  <a:srgbClr val="4C1D95"/>
+                  <a:srgbClr val="9D174D"/>
                 </a:solidFill>
                 <a:latin typeface="Trebuchet MS" pitchFamily="34" charset="0"/>
                 <a:ea typeface="Trebuchet MS" pitchFamily="34" charset="-122"/>
                 <a:cs typeface="Trebuchet MS" pitchFamily="34" charset="-120"/>
               </a:rPr>
-              <a:t>less</a:t>
+              <a:t>ing</a:t>
             </a:r>
             <a:endParaRPr lang="en-US" sz="1300" dirty="0"/>
           </a:p>
@@ -14742,7 +15078,7 @@
                 <a:ea typeface="Calibri" pitchFamily="34" charset="-122"/>
                 <a:cs typeface="Calibri" pitchFamily="34" charset="-120"/>
               </a:rPr>
-              <a:t>without</a:t>
+              <a:t>action happening now</a:t>
             </a:r>
             <a:endParaRPr lang="en-US" sz="850" dirty="0"/>
           </a:p>
@@ -15006,7 +15342,7 @@
                 <a:ea typeface="Trebuchet MS" pitchFamily="34" charset="-122"/>
                 <a:cs typeface="Trebuchet MS" pitchFamily="34" charset="-120"/>
               </a:rPr>
-              <a:t>less</a:t>
+              <a:t>ing</a:t>
             </a:r>
             <a:endParaRPr lang="en-US" sz="1400" dirty="0"/>
           </a:p>
@@ -15113,7 +15449,7 @@
         </p:nvSpPr>
         <p:spPr>
           <a:xfrm>
-            <a:off x="2254649" y="4169664"/>
+            <a:off x="2427732" y="4169664"/>
             <a:ext cx="685800" cy="475488"/>
           </a:xfrm>
           <a:prstGeom prst="rect">
@@ -15140,7 +15476,7 @@
         </p:nvSpPr>
         <p:spPr>
           <a:xfrm>
-            <a:off x="2254649" y="4169664"/>
+            <a:off x="2427732" y="4169664"/>
             <a:ext cx="685800" cy="475488"/>
           </a:xfrm>
           <a:prstGeom prst="rect">
@@ -15179,7 +15515,7 @@
         </p:nvSpPr>
         <p:spPr>
           <a:xfrm>
-            <a:off x="3293146" y="4169664"/>
+            <a:off x="3639312" y="4169664"/>
             <a:ext cx="685800" cy="475488"/>
           </a:xfrm>
           <a:prstGeom prst="rect">
@@ -15206,7 +15542,7 @@
         </p:nvSpPr>
         <p:spPr>
           <a:xfrm>
-            <a:off x="3293146" y="4169664"/>
+            <a:off x="3639312" y="4169664"/>
             <a:ext cx="685800" cy="475488"/>
           </a:xfrm>
           <a:prstGeom prst="rect">
@@ -15245,7 +15581,7 @@
         </p:nvSpPr>
         <p:spPr>
           <a:xfrm>
-            <a:off x="4331643" y="4169664"/>
+            <a:off x="4850892" y="4169664"/>
             <a:ext cx="685800" cy="475488"/>
           </a:xfrm>
           <a:prstGeom prst="rect">
@@ -15272,7 +15608,7 @@
         </p:nvSpPr>
         <p:spPr>
           <a:xfrm>
-            <a:off x="4331643" y="4169664"/>
+            <a:off x="4850892" y="4169664"/>
             <a:ext cx="685800" cy="475488"/>
           </a:xfrm>
           <a:prstGeom prst="rect">
@@ -15311,7 +15647,7 @@
         </p:nvSpPr>
         <p:spPr>
           <a:xfrm>
-            <a:off x="5370141" y="4169664"/>
+            <a:off x="6062472" y="4169664"/>
             <a:ext cx="685800" cy="475488"/>
           </a:xfrm>
           <a:prstGeom prst="rect">
@@ -15338,7 +15674,7 @@
         </p:nvSpPr>
         <p:spPr>
           <a:xfrm>
-            <a:off x="5370141" y="4169664"/>
+            <a:off x="6062472" y="4169664"/>
             <a:ext cx="685800" cy="475488"/>
           </a:xfrm>
           <a:prstGeom prst="rect">
@@ -15363,7 +15699,7 @@
                 <a:ea typeface="Trebuchet MS" pitchFamily="34" charset="-122"/>
                 <a:cs typeface="Trebuchet MS" pitchFamily="34" charset="-120"/>
               </a:rPr>
-              <a:t>l</a:t>
+              <a:t>i</a:t>
             </a:r>
             <a:endParaRPr lang="en-US" sz="900" dirty="0"/>
           </a:p>
@@ -15377,7 +15713,7 @@
         </p:nvSpPr>
         <p:spPr>
           <a:xfrm>
-            <a:off x="6408638" y="4169664"/>
+            <a:off x="7274052" y="4169664"/>
             <a:ext cx="685800" cy="475488"/>
           </a:xfrm>
           <a:prstGeom prst="rect">
@@ -15404,7 +15740,7 @@
         </p:nvSpPr>
         <p:spPr>
           <a:xfrm>
-            <a:off x="6408638" y="4169664"/>
+            <a:off x="7274052" y="4169664"/>
             <a:ext cx="685800" cy="475488"/>
           </a:xfrm>
           <a:prstGeom prst="rect">
@@ -15429,73 +15765,7 @@
                 <a:ea typeface="Trebuchet MS" pitchFamily="34" charset="-122"/>
                 <a:cs typeface="Trebuchet MS" pitchFamily="34" charset="-120"/>
               </a:rPr>
-              <a:t>e</a:t>
-            </a:r>
-            <a:endParaRPr lang="en-US" sz="900" dirty="0"/>
-          </a:p>
-        </p:txBody>
-      </p:sp>
-      <p:sp>
-        <p:nvSpPr>
-          <p:cNvPr id="43" name="Shape 41"/>
-          <p:cNvSpPr/>
-          <p:nvPr/>
-        </p:nvSpPr>
-        <p:spPr>
-          <a:xfrm>
-            <a:off x="7447135" y="4169664"/>
-            <a:ext cx="685800" cy="475488"/>
-          </a:xfrm>
-          <a:prstGeom prst="rect">
-            <a:avLst>
-              <a:gd name="adj" fmla="val 7692"/>
-            </a:avLst>
-          </a:prstGeom>
-          <a:solidFill>
-            <a:srgbClr val="FFFFFF"/>
-          </a:solidFill>
-          <a:ln w="12700">
-            <a:solidFill>
-              <a:srgbClr val="DB2777"/>
-            </a:solidFill>
-            <a:prstDash val="solid"/>
-          </a:ln>
-        </p:spPr>
-      </p:sp>
-      <p:sp>
-        <p:nvSpPr>
-          <p:cNvPr id="44" name="Text 42"/>
-          <p:cNvSpPr/>
-          <p:nvPr/>
-        </p:nvSpPr>
-        <p:spPr>
-          <a:xfrm>
-            <a:off x="7447135" y="4169664"/>
-            <a:ext cx="685800" cy="475488"/>
-          </a:xfrm>
-          <a:prstGeom prst="rect">
-            <a:avLst/>
-          </a:prstGeom>
-          <a:noFill/>
-          <a:ln/>
-        </p:spPr>
-        <p:txBody>
-          <a:bodyPr wrap="square" lIns="0" tIns="0" rIns="0" bIns="0" rtlCol="0" anchor="ctr"/>
-          <a:lstStyle/>
-          <a:p>
-            <a:pPr algn="ctr" indent="0" marL="0">
-              <a:buNone/>
-            </a:pPr>
-            <a:r>
-              <a:rPr lang="en-US" sz="900" b="1" dirty="0">
-                <a:solidFill>
-                  <a:srgbClr val="9D174D"/>
-                </a:solidFill>
-                <a:latin typeface="Trebuchet MS" pitchFamily="34" charset="0"/>
-                <a:ea typeface="Trebuchet MS" pitchFamily="34" charset="-122"/>
-                <a:cs typeface="Trebuchet MS" pitchFamily="34" charset="-120"/>
-              </a:rPr>
-              <a:t>ss</a:t>
+              <a:t>ng</a:t>
             </a:r>
             <a:endParaRPr lang="en-US" sz="900" dirty="0"/>
           </a:p>
@@ -16069,7 +16339,7 @@
                 <a:ea typeface="Calibri" pitchFamily="34" charset="-122"/>
                 <a:cs typeface="Calibri" pitchFamily="34" charset="-120"/>
               </a:rPr>
-              <a:t>Word Labs  •  wordlabs.app  •  Root: 'harm' = damage, injury, or hurt</a:t>
+              <a:t>Word Labs  •  wordlabs.app  •  Root: 'harm' = injury, damage, hurt</a:t>
             </a:r>
             <a:endParaRPr lang="en-US" sz="800" dirty="0"/>
           </a:p>
@@ -16709,7 +16979,7 @@
                 <a:ea typeface="Calibri" pitchFamily="34" charset="-122"/>
                 <a:cs typeface="Calibri" pitchFamily="34" charset="-120"/>
               </a:rPr>
-              <a:t>Word Labs  •  wordlabs.app  •  Root: 'harm' = damage, injury, or hurt</a:t>
+              <a:t>Word Labs  •  wordlabs.app  •  Root: 'harm' = injury, damage, hurt</a:t>
             </a:r>
             <a:endParaRPr lang="en-US" sz="800" dirty="0"/>
           </a:p>
@@ -16821,7 +17091,7 @@
                 <a:ea typeface="Calibri" pitchFamily="34" charset="-122"/>
                 <a:cs typeface="Calibri" pitchFamily="34" charset="-120"/>
               </a:rPr>
-              <a:t>Although the old paint was </a:t>
+              <a:t>The teacher explained that </a:t>
             </a:r>
             <a:pPr algn="l" indent="0" marL="0">
               <a:buNone/>
@@ -16852,7 +17122,7 @@
                 <a:ea typeface="Calibri" pitchFamily="34" charset="-122"/>
                 <a:cs typeface="Calibri" pitchFamily="34" charset="-120"/>
               </a:rPr>
-              <a:t>, the children were </a:t>
+              <a:t> chemicals must be stored safely; fortunately, the </a:t>
             </a:r>
             <a:pPr algn="l" indent="0" marL="0">
               <a:buNone/>
@@ -16869,7 +17139,7 @@
                 <a:ea typeface="Calibri" pitchFamily="34" charset="-122"/>
                 <a:cs typeface="Calibri" pitchFamily="34" charset="-120"/>
               </a:rPr>
-              <a:t>unharmed</a:t>
+              <a:t>harmless</a:t>
             </a:r>
             <a:pPr algn="l" indent="0" marL="0">
               <a:buNone/>
@@ -16883,7 +17153,7 @@
                 <a:ea typeface="Calibri" pitchFamily="34" charset="-122"/>
                 <a:cs typeface="Calibri" pitchFamily="34" charset="-120"/>
               </a:rPr>
-              <a:t> because they played </a:t>
+              <a:t> ones caused no damage, and the </a:t>
             </a:r>
             <a:pPr algn="l" indent="0" marL="0">
               <a:buNone/>
@@ -16900,7 +17170,7 @@
                 <a:ea typeface="Calibri" pitchFamily="34" charset="-122"/>
                 <a:cs typeface="Calibri" pitchFamily="34" charset="-120"/>
               </a:rPr>
-              <a:t>harmlessly</a:t>
+              <a:t>harmfulness</a:t>
             </a:r>
             <a:pPr algn="l" indent="0" marL="0">
               <a:buNone/>
@@ -16914,7 +17184,7 @@
                 <a:ea typeface="Calibri" pitchFamily="34" charset="-122"/>
                 <a:cs typeface="Calibri" pitchFamily="34" charset="-120"/>
               </a:rPr>
-              <a:t> in another room.</a:t>
+              <a:t> of each was clearly labelled.</a:t>
             </a:r>
             <a:endParaRPr lang="en-US" sz="1800" dirty="0"/>
           </a:p>
@@ -17197,7 +17467,7 @@
                 <a:ea typeface="Trebuchet MS" pitchFamily="34" charset="-122"/>
                 <a:cs typeface="Trebuchet MS" pitchFamily="34" charset="-120"/>
               </a:rPr>
-              <a:t>unharmed</a:t>
+              <a:t>harmless</a:t>
             </a:r>
             <a:endParaRPr lang="en-US" sz="1400" dirty="0"/>
           </a:p>
@@ -17325,7 +17595,7 @@
                 <a:ea typeface="Trebuchet MS" pitchFamily="34" charset="-122"/>
                 <a:cs typeface="Trebuchet MS" pitchFamily="34" charset="-120"/>
               </a:rPr>
-              <a:t>harmlessly</a:t>
+              <a:t>harmfulness</a:t>
             </a:r>
             <a:endParaRPr lang="en-US" sz="1400" dirty="0"/>
           </a:p>
@@ -17656,7 +17926,7 @@
                 <a:ea typeface="Calibri" pitchFamily="34" charset="-122"/>
                 <a:cs typeface="Calibri" pitchFamily="34" charset="-120"/>
               </a:rPr>
-              <a:t>Word Labs  •  wordlabs.app  •  Root: 'harm' = damage, injury, or hurt</a:t>
+              <a:t>Word Labs  •  wordlabs.app  •  Root: 'harm' = injury, damage, hurt</a:t>
             </a:r>
             <a:endParaRPr lang="en-US" sz="800" dirty="0"/>
           </a:p>
@@ -18483,7 +18753,7 @@
                 <a:ea typeface="Calibri" pitchFamily="34" charset="-122"/>
                 <a:cs typeface="Calibri" pitchFamily="34" charset="-120"/>
               </a:rPr>
-              <a:t>Word Labs  •  wordlabs.app  •  Root: 'harm' = damage, injury, or hurt</a:t>
+              <a:t>Word Labs  •  wordlabs.app  •  Root: 'harm' = injury, damage, hurt</a:t>
             </a:r>
             <a:endParaRPr lang="en-US" sz="800" dirty="0"/>
           </a:p>
@@ -18800,7 +19070,7 @@
                 <a:ea typeface="Calibri" pitchFamily="34" charset="-122"/>
                 <a:cs typeface="Calibri" pitchFamily="34" charset="-120"/>
               </a:rPr>
-              <a:t>damage or injury</a:t>
+              <a:t>injury or damage</a:t>
             </a:r>
             <a:endParaRPr lang="en-US" sz="850" dirty="0"/>
           </a:p>
@@ -18912,7 +19182,7 @@
                 <a:ea typeface="Calibri" pitchFamily="34" charset="-122"/>
                 <a:cs typeface="Calibri" pitchFamily="34" charset="-120"/>
               </a:rPr>
-              <a:t>full of</a:t>
+              <a:t>full of or having</a:t>
             </a:r>
             <a:endParaRPr lang="en-US" sz="850" dirty="0"/>
           </a:p>
@@ -19468,7 +19738,7 @@
                 <a:ea typeface="Calibri" pitchFamily="34" charset="-122"/>
                 <a:cs typeface="Calibri" pitchFamily="34" charset="-120"/>
               </a:rPr>
-              <a:t>Word Labs  •  wordlabs.app  •  Root: 'harm' = damage, injury, or hurt</a:t>
+              <a:t>Word Labs  •  wordlabs.app  •  Root: 'harm' = injury, damage, hurt</a:t>
             </a:r>
             <a:endParaRPr lang="en-US" sz="800" dirty="0"/>
           </a:p>
@@ -19785,7 +20055,7 @@
                 <a:ea typeface="Calibri" pitchFamily="34" charset="-122"/>
                 <a:cs typeface="Calibri" pitchFamily="34" charset="-120"/>
               </a:rPr>
-              <a:t>damage or injury</a:t>
+              <a:t>injury or damage</a:t>
             </a:r>
             <a:endParaRPr lang="en-US" sz="850" dirty="0"/>
           </a:p>
@@ -19897,7 +20167,7 @@
                 <a:ea typeface="Calibri" pitchFamily="34" charset="-122"/>
                 <a:cs typeface="Calibri" pitchFamily="34" charset="-120"/>
               </a:rPr>
-              <a:t>full of</a:t>
+              <a:t>full of or having</a:t>
             </a:r>
             <a:endParaRPr lang="en-US" sz="850" dirty="0"/>
           </a:p>
@@ -20585,7 +20855,7 @@
                 <a:ea typeface="Calibri" pitchFamily="34" charset="-122"/>
                 <a:cs typeface="Calibri" pitchFamily="34" charset="-120"/>
               </a:rPr>
-              <a:t>Word Labs  •  wordlabs.app  •  Root: 'harm' = damage, injury, or hurt</a:t>
+              <a:t>Word Labs  •  wordlabs.app  •  Root: 'harm' = injury, damage, hurt</a:t>
             </a:r>
             <a:endParaRPr lang="en-US" sz="800" dirty="0"/>
           </a:p>
@@ -20902,7 +21172,7 @@
                 <a:ea typeface="Calibri" pitchFamily="34" charset="-122"/>
                 <a:cs typeface="Calibri" pitchFamily="34" charset="-120"/>
               </a:rPr>
-              <a:t>damage or injury</a:t>
+              <a:t>injury or damage</a:t>
             </a:r>
             <a:endParaRPr lang="en-US" sz="850" dirty="0"/>
           </a:p>
@@ -21014,7 +21284,7 @@
                 <a:ea typeface="Calibri" pitchFamily="34" charset="-122"/>
                 <a:cs typeface="Calibri" pitchFamily="34" charset="-120"/>
               </a:rPr>
-              <a:t>full of</a:t>
+              <a:t>full of or having</a:t>
             </a:r>
             <a:endParaRPr lang="en-US" sz="850" dirty="0"/>
           </a:p>
@@ -22059,7 +22329,7 @@
                 <a:ea typeface="Calibri" pitchFamily="34" charset="-122"/>
                 <a:cs typeface="Calibri" pitchFamily="34" charset="-120"/>
               </a:rPr>
-              <a:t>Word Labs  •  wordlabs.app  •  Root: 'harm' = damage, injury, or hurt</a:t>
+              <a:t>Word Labs  •  wordlabs.app  •  Root: 'harm' = injury, damage, hurt</a:t>
             </a:r>
             <a:endParaRPr lang="en-US" sz="800" dirty="0"/>
           </a:p>
@@ -22198,7 +22468,7 @@
                 <a:ea typeface="Trebuchet MS" pitchFamily="34" charset="-122"/>
                 <a:cs typeface="Trebuchet MS" pitchFamily="34" charset="-120"/>
               </a:rPr>
-              <a:t>unharmed</a:t>
+              <a:t>harmless</a:t>
             </a:r>
             <a:endParaRPr lang="en-US" sz="2800" dirty="0"/>
           </a:p>
@@ -22886,7 +23156,7 @@
                 <a:ea typeface="Calibri" pitchFamily="34" charset="-122"/>
                 <a:cs typeface="Calibri" pitchFamily="34" charset="-120"/>
               </a:rPr>
-              <a:t>Word Labs  •  wordlabs.app  •  Root: 'harm' = damage, injury, or hurt</a:t>
+              <a:t>Word Labs  •  wordlabs.app  •  Root: 'harm' = injury, damage, hurt</a:t>
             </a:r>
             <a:endParaRPr lang="en-US" sz="800" dirty="0"/>
           </a:p>
@@ -23025,7 +23295,7 @@
                 <a:ea typeface="Trebuchet MS" pitchFamily="34" charset="-122"/>
                 <a:cs typeface="Trebuchet MS" pitchFamily="34" charset="-120"/>
               </a:rPr>
-              <a:t>unharmed</a:t>
+              <a:t>harmless</a:t>
             </a:r>
             <a:endParaRPr lang="en-US" sz="2800" dirty="0"/>
           </a:p>
@@ -23105,7 +23375,7 @@
         </p:nvSpPr>
         <p:spPr>
           <a:xfrm>
-            <a:off x="2221992" y="2258568"/>
+            <a:off x="2938272" y="2258568"/>
             <a:ext cx="1828800" cy="292608"/>
           </a:xfrm>
           <a:prstGeom prst="rect">
@@ -23114,11 +23384,11 @@
             </a:avLst>
           </a:prstGeom>
           <a:solidFill>
-            <a:srgbClr val="DDD6FE"/>
+            <a:srgbClr val="CCFBF1"/>
           </a:solidFill>
           <a:ln w="19050">
             <a:solidFill>
-              <a:srgbClr val="7C3AED"/>
+              <a:srgbClr val="0D9488"/>
             </a:solidFill>
             <a:prstDash val="solid"/>
           </a:ln>
@@ -23139,7 +23409,7 @@
         </p:nvSpPr>
         <p:spPr>
           <a:xfrm>
-            <a:off x="2221992" y="2258568"/>
+            <a:off x="2938272" y="2258568"/>
             <a:ext cx="1828800" cy="292608"/>
           </a:xfrm>
           <a:prstGeom prst="rect">
@@ -23158,13 +23428,13 @@
             <a:r>
               <a:rPr lang="en-US" sz="1300" b="1" dirty="0">
                 <a:solidFill>
-                  <a:srgbClr val="4C1D95"/>
+                  <a:srgbClr val="0F766E"/>
                 </a:solidFill>
                 <a:latin typeface="Trebuchet MS" pitchFamily="34" charset="0"/>
                 <a:ea typeface="Trebuchet MS" pitchFamily="34" charset="-122"/>
                 <a:cs typeface="Trebuchet MS" pitchFamily="34" charset="-120"/>
               </a:rPr>
-              <a:t>un</a:t>
+              <a:t>harm</a:t>
             </a:r>
             <a:endParaRPr lang="en-US" sz="1300" dirty="0"/>
           </a:p>
@@ -23178,7 +23448,7 @@
         </p:nvSpPr>
         <p:spPr>
           <a:xfrm>
-            <a:off x="2221992" y="2569464"/>
+            <a:off x="2938272" y="2569464"/>
             <a:ext cx="1828800" cy="201168"/>
           </a:xfrm>
           <a:prstGeom prst="rect">
@@ -23203,7 +23473,7 @@
                 <a:ea typeface="Calibri" pitchFamily="34" charset="-122"/>
                 <a:cs typeface="Calibri" pitchFamily="34" charset="-120"/>
               </a:rPr>
-              <a:t>not</a:t>
+              <a:t>injury or damage</a:t>
             </a:r>
             <a:endParaRPr lang="en-US" sz="850" dirty="0"/>
           </a:p>
@@ -23217,7 +23487,7 @@
         </p:nvSpPr>
         <p:spPr>
           <a:xfrm>
-            <a:off x="4370832" y="2258568"/>
+            <a:off x="5803392" y="2258568"/>
             <a:ext cx="1828800" cy="292608"/>
           </a:xfrm>
           <a:prstGeom prst="rect">
@@ -23226,11 +23496,11 @@
             </a:avLst>
           </a:prstGeom>
           <a:solidFill>
-            <a:srgbClr val="CCFBF1"/>
+            <a:srgbClr val="DDD6FE"/>
           </a:solidFill>
           <a:ln w="19050">
             <a:solidFill>
-              <a:srgbClr val="0D9488"/>
+              <a:srgbClr val="7C3AED"/>
             </a:solidFill>
             <a:prstDash val="solid"/>
           </a:ln>
@@ -23251,7 +23521,7 @@
         </p:nvSpPr>
         <p:spPr>
           <a:xfrm>
-            <a:off x="4370832" y="2258568"/>
+            <a:off x="5803392" y="2258568"/>
             <a:ext cx="1828800" cy="292608"/>
           </a:xfrm>
           <a:prstGeom prst="rect">
@@ -23270,13 +23540,13 @@
             <a:r>
               <a:rPr lang="en-US" sz="1300" b="1" dirty="0">
                 <a:solidFill>
-                  <a:srgbClr val="0F766E"/>
+                  <a:srgbClr val="4C1D95"/>
                 </a:solidFill>
                 <a:latin typeface="Trebuchet MS" pitchFamily="34" charset="0"/>
                 <a:ea typeface="Trebuchet MS" pitchFamily="34" charset="-122"/>
                 <a:cs typeface="Trebuchet MS" pitchFamily="34" charset="-120"/>
               </a:rPr>
-              <a:t>harm</a:t>
+              <a:t>less</a:t>
             </a:r>
             <a:endParaRPr lang="en-US" sz="1300" dirty="0"/>
           </a:p>
@@ -23290,7 +23560,7 @@
         </p:nvSpPr>
         <p:spPr>
           <a:xfrm>
-            <a:off x="4370832" y="2569464"/>
+            <a:off x="5803392" y="2569464"/>
             <a:ext cx="1828800" cy="201168"/>
           </a:xfrm>
           <a:prstGeom prst="rect">
@@ -23315,7 +23585,7 @@
                 <a:ea typeface="Calibri" pitchFamily="34" charset="-122"/>
                 <a:cs typeface="Calibri" pitchFamily="34" charset="-120"/>
               </a:rPr>
-              <a:t>damage or injury</a:t>
+              <a:t>without</a:t>
             </a:r>
             <a:endParaRPr lang="en-US" sz="850" dirty="0"/>
           </a:p>
@@ -23329,30 +23599,23 @@
         </p:nvSpPr>
         <p:spPr>
           <a:xfrm>
-            <a:off x="6519672" y="2258568"/>
-            <a:ext cx="1828800" cy="292608"/>
+            <a:off x="365760" y="3273552"/>
+            <a:ext cx="1371600" cy="658368"/>
           </a:xfrm>
           <a:prstGeom prst="rect">
             <a:avLst>
-              <a:gd name="adj" fmla="val 25000"/>
+              <a:gd name="adj" fmla="val 8333"/>
             </a:avLst>
           </a:prstGeom>
           <a:solidFill>
-            <a:srgbClr val="FCE7F3"/>
-          </a:solidFill>
-          <a:ln w="19050">
-            <a:solidFill>
-              <a:srgbClr val="DB2777"/>
-            </a:solidFill>
-            <a:prstDash val="solid"/>
-          </a:ln>
-          <a:effectLst>
-            <a:outerShdw sx="100000" sy="100000" kx="0" ky="0" algn="bl" rotWithShape="0" blurRad="101600" dist="38100" dir="8100000">
-              <a:srgbClr val="000000">
-                <a:alpha val="12000"/>
-              </a:srgbClr>
-            </a:outerShdw>
-          </a:effectLst>
+            <a:srgbClr val="E2E8F0"/>
+          </a:solidFill>
+          <a:ln w="12700">
+            <a:solidFill>
+              <a:srgbClr val="E2E8F0"/>
+            </a:solidFill>
+            <a:prstDash val="solid"/>
+          </a:ln>
         </p:spPr>
       </p:sp>
       <p:sp>
@@ -23363,8 +23626,8 @@
         </p:nvSpPr>
         <p:spPr>
           <a:xfrm>
-            <a:off x="6519672" y="2258568"/>
-            <a:ext cx="1828800" cy="292608"/>
+            <a:off x="365760" y="3273552"/>
+            <a:ext cx="1371600" cy="658368"/>
           </a:xfrm>
           <a:prstGeom prst="rect">
             <a:avLst/>
@@ -23380,73 +23643,100 @@
               <a:buNone/>
             </a:pPr>
             <a:r>
-              <a:rPr lang="en-US" sz="1300" b="1" dirty="0">
-                <a:solidFill>
-                  <a:srgbClr val="9D174D"/>
+              <a:rPr lang="en-US" sz="1100" b="1" dirty="0">
+                <a:solidFill>
+                  <a:srgbClr val="475569"/>
                 </a:solidFill>
                 <a:latin typeface="Trebuchet MS" pitchFamily="34" charset="0"/>
                 <a:ea typeface="Trebuchet MS" pitchFamily="34" charset="-122"/>
                 <a:cs typeface="Trebuchet MS" pitchFamily="34" charset="-120"/>
               </a:rPr>
-              <a:t>ed</a:t>
-            </a:r>
-            <a:endParaRPr lang="en-US" sz="1300" dirty="0"/>
-          </a:p>
-        </p:txBody>
-      </p:sp>
-      <p:sp>
-        <p:nvSpPr>
-          <p:cNvPr id="24" name="Text 22"/>
-          <p:cNvSpPr/>
-          <p:nvPr/>
-        </p:nvSpPr>
-        <p:spPr>
-          <a:xfrm>
-            <a:off x="6519672" y="2569464"/>
-            <a:ext cx="1828800" cy="201168"/>
-          </a:xfrm>
-          <a:prstGeom prst="rect">
-            <a:avLst/>
-          </a:prstGeom>
-          <a:noFill/>
-          <a:ln/>
-        </p:spPr>
-        <p:txBody>
-          <a:bodyPr wrap="square" lIns="0" tIns="0" rIns="0" bIns="0" rtlCol="0" anchor="t"/>
-          <a:lstStyle/>
-          <a:p>
-            <a:pPr algn="ctr" indent="0" marL="0">
-              <a:buNone/>
-            </a:pPr>
-            <a:r>
-              <a:rPr lang="en-US" sz="850" dirty="0">
-                <a:solidFill>
-                  <a:srgbClr val="475569"/>
+              <a:t>Syllables</a:t>
+            </a:r>
+            <a:endParaRPr lang="en-US" sz="1100" dirty="0"/>
+          </a:p>
+        </p:txBody>
+      </p:sp>
+      <p:sp>
+        <p:nvSpPr>
+          <p:cNvPr id="24" name="Shape 22"/>
+          <p:cNvSpPr/>
+          <p:nvPr/>
+        </p:nvSpPr>
+        <p:spPr>
+          <a:xfrm>
+            <a:off x="1874520" y="3273552"/>
+            <a:ext cx="6903720" cy="658368"/>
+          </a:xfrm>
+          <a:prstGeom prst="rect">
+            <a:avLst>
+              <a:gd name="adj" fmla="val 8333"/>
+            </a:avLst>
+          </a:prstGeom>
+          <a:solidFill>
+            <a:srgbClr val="F8FAFC"/>
+          </a:solidFill>
+          <a:ln w="12700">
+            <a:solidFill>
+              <a:srgbClr val="E2E8F0"/>
+            </a:solidFill>
+            <a:prstDash val="dash"/>
+          </a:ln>
+        </p:spPr>
+      </p:sp>
+      <p:sp>
+        <p:nvSpPr>
+          <p:cNvPr id="25" name="Text 23"/>
+          <p:cNvSpPr/>
+          <p:nvPr/>
+        </p:nvSpPr>
+        <p:spPr>
+          <a:xfrm>
+            <a:off x="1874520" y="3273552"/>
+            <a:ext cx="6903720" cy="658368"/>
+          </a:xfrm>
+          <a:prstGeom prst="rect">
+            <a:avLst/>
+          </a:prstGeom>
+          <a:noFill/>
+          <a:ln/>
+        </p:spPr>
+        <p:txBody>
+          <a:bodyPr wrap="square" rtlCol="0" anchor="ctr"/>
+          <a:lstStyle/>
+          <a:p>
+            <a:pPr algn="ctr" indent="0" marL="0">
+              <a:buNone/>
+            </a:pPr>
+            <a:r>
+              <a:rPr lang="en-US" sz="1100" i="1" dirty="0">
+                <a:solidFill>
+                  <a:srgbClr val="CBD5E1"/>
                 </a:solidFill>
                 <a:latin typeface="Calibri" pitchFamily="34" charset="0"/>
                 <a:ea typeface="Calibri" pitchFamily="34" charset="-122"/>
                 <a:cs typeface="Calibri" pitchFamily="34" charset="-120"/>
               </a:rPr>
-              <a:t>past tense</a:t>
-            </a:r>
-            <a:endParaRPr lang="en-US" sz="850" dirty="0"/>
-          </a:p>
-        </p:txBody>
-      </p:sp>
-      <p:sp>
-        <p:nvSpPr>
-          <p:cNvPr id="25" name="Shape 23"/>
-          <p:cNvSpPr/>
-          <p:nvPr/>
-        </p:nvSpPr>
-        <p:spPr>
-          <a:xfrm>
-            <a:off x="365760" y="3273552"/>
-            <a:ext cx="1371600" cy="658368"/>
+              <a:t>Write here...</a:t>
+            </a:r>
+            <a:endParaRPr lang="en-US" sz="1100" dirty="0"/>
+          </a:p>
+        </p:txBody>
+      </p:sp>
+      <p:sp>
+        <p:nvSpPr>
+          <p:cNvPr id="26" name="Shape 24"/>
+          <p:cNvSpPr/>
+          <p:nvPr/>
+        </p:nvSpPr>
+        <p:spPr>
+          <a:xfrm>
+            <a:off x="365760" y="4096512"/>
+            <a:ext cx="1371600" cy="804672"/>
           </a:xfrm>
           <a:prstGeom prst="rect">
             <a:avLst>
-              <a:gd name="adj" fmla="val 8333"/>
+              <a:gd name="adj" fmla="val 6818"/>
             </a:avLst>
           </a:prstGeom>
           <a:solidFill>
@@ -23462,14 +23752,14 @@
       </p:sp>
       <p:sp>
         <p:nvSpPr>
-          <p:cNvPr id="26" name="Text 24"/>
-          <p:cNvSpPr/>
-          <p:nvPr/>
-        </p:nvSpPr>
-        <p:spPr>
-          <a:xfrm>
-            <a:off x="365760" y="3273552"/>
-            <a:ext cx="1371600" cy="658368"/>
+          <p:cNvPr id="27" name="Text 25"/>
+          <p:cNvSpPr/>
+          <p:nvPr/>
+        </p:nvSpPr>
+        <p:spPr>
+          <a:xfrm>
+            <a:off x="365760" y="4096512"/>
+            <a:ext cx="1371600" cy="804672"/>
           </a:xfrm>
           <a:prstGeom prst="rect">
             <a:avLst/>
@@ -23493,7 +23783,7 @@
                 <a:ea typeface="Trebuchet MS" pitchFamily="34" charset="-122"/>
                 <a:cs typeface="Trebuchet MS" pitchFamily="34" charset="-120"/>
               </a:rPr>
-              <a:t>Syllables</a:t>
+              <a:t>Phonemes</a:t>
             </a:r>
             <a:endParaRPr lang="en-US" sz="1100" dirty="0"/>
           </a:p>
@@ -23501,80 +23791,14 @@
       </p:sp>
       <p:sp>
         <p:nvSpPr>
-          <p:cNvPr id="27" name="Shape 25"/>
-          <p:cNvSpPr/>
-          <p:nvPr/>
-        </p:nvSpPr>
-        <p:spPr>
-          <a:xfrm>
-            <a:off x="1874520" y="3273552"/>
-            <a:ext cx="6903720" cy="658368"/>
-          </a:xfrm>
-          <a:prstGeom prst="rect">
-            <a:avLst>
-              <a:gd name="adj" fmla="val 8333"/>
-            </a:avLst>
-          </a:prstGeom>
-          <a:solidFill>
-            <a:srgbClr val="F8FAFC"/>
-          </a:solidFill>
-          <a:ln w="12700">
-            <a:solidFill>
-              <a:srgbClr val="E2E8F0"/>
-            </a:solidFill>
-            <a:prstDash val="dash"/>
-          </a:ln>
-        </p:spPr>
-      </p:sp>
-      <p:sp>
-        <p:nvSpPr>
-          <p:cNvPr id="28" name="Text 26"/>
-          <p:cNvSpPr/>
-          <p:nvPr/>
-        </p:nvSpPr>
-        <p:spPr>
-          <a:xfrm>
-            <a:off x="1874520" y="3273552"/>
-            <a:ext cx="6903720" cy="658368"/>
-          </a:xfrm>
-          <a:prstGeom prst="rect">
-            <a:avLst/>
-          </a:prstGeom>
-          <a:noFill/>
-          <a:ln/>
-        </p:spPr>
-        <p:txBody>
-          <a:bodyPr wrap="square" rtlCol="0" anchor="ctr"/>
-          <a:lstStyle/>
-          <a:p>
-            <a:pPr algn="ctr" indent="0" marL="0">
-              <a:buNone/>
-            </a:pPr>
-            <a:r>
-              <a:rPr lang="en-US" sz="1100" i="1" dirty="0">
-                <a:solidFill>
-                  <a:srgbClr val="CBD5E1"/>
-                </a:solidFill>
-                <a:latin typeface="Calibri" pitchFamily="34" charset="0"/>
-                <a:ea typeface="Calibri" pitchFamily="34" charset="-122"/>
-                <a:cs typeface="Calibri" pitchFamily="34" charset="-120"/>
-              </a:rPr>
-              <a:t>Write here...</a:t>
-            </a:r>
-            <a:endParaRPr lang="en-US" sz="1100" dirty="0"/>
-          </a:p>
-        </p:txBody>
-      </p:sp>
-      <p:sp>
-        <p:nvSpPr>
-          <p:cNvPr id="29" name="Shape 27"/>
-          <p:cNvSpPr/>
-          <p:nvPr/>
-        </p:nvSpPr>
-        <p:spPr>
-          <a:xfrm>
-            <a:off x="365760" y="4096512"/>
-            <a:ext cx="1371600" cy="804672"/>
+          <p:cNvPr id="28" name="Shape 26"/>
+          <p:cNvSpPr/>
+          <p:nvPr/>
+        </p:nvSpPr>
+        <p:spPr>
+          <a:xfrm>
+            <a:off x="1874520" y="4096512"/>
+            <a:ext cx="6903720" cy="804672"/>
           </a:xfrm>
           <a:prstGeom prst="rect">
             <a:avLst>
@@ -23582,85 +23806,19 @@
             </a:avLst>
           </a:prstGeom>
           <a:solidFill>
-            <a:srgbClr val="E2E8F0"/>
+            <a:srgbClr val="F8FAFC"/>
           </a:solidFill>
           <a:ln w="12700">
             <a:solidFill>
               <a:srgbClr val="E2E8F0"/>
             </a:solidFill>
-            <a:prstDash val="solid"/>
-          </a:ln>
-        </p:spPr>
-      </p:sp>
-      <p:sp>
-        <p:nvSpPr>
-          <p:cNvPr id="30" name="Text 28"/>
-          <p:cNvSpPr/>
-          <p:nvPr/>
-        </p:nvSpPr>
-        <p:spPr>
-          <a:xfrm>
-            <a:off x="365760" y="4096512"/>
-            <a:ext cx="1371600" cy="804672"/>
-          </a:xfrm>
-          <a:prstGeom prst="rect">
-            <a:avLst/>
-          </a:prstGeom>
-          <a:noFill/>
-          <a:ln/>
-        </p:spPr>
-        <p:txBody>
-          <a:bodyPr wrap="square" lIns="0" tIns="0" rIns="0" bIns="0" rtlCol="0" anchor="ctr"/>
-          <a:lstStyle/>
-          <a:p>
-            <a:pPr algn="ctr" indent="0" marL="0">
-              <a:buNone/>
-            </a:pPr>
-            <a:r>
-              <a:rPr lang="en-US" sz="1100" b="1" dirty="0">
-                <a:solidFill>
-                  <a:srgbClr val="475569"/>
-                </a:solidFill>
-                <a:latin typeface="Trebuchet MS" pitchFamily="34" charset="0"/>
-                <a:ea typeface="Trebuchet MS" pitchFamily="34" charset="-122"/>
-                <a:cs typeface="Trebuchet MS" pitchFamily="34" charset="-120"/>
-              </a:rPr>
-              <a:t>Phonemes</a:t>
-            </a:r>
-            <a:endParaRPr lang="en-US" sz="1100" dirty="0"/>
-          </a:p>
-        </p:txBody>
-      </p:sp>
-      <p:sp>
-        <p:nvSpPr>
-          <p:cNvPr id="31" name="Shape 29"/>
-          <p:cNvSpPr/>
-          <p:nvPr/>
-        </p:nvSpPr>
-        <p:spPr>
-          <a:xfrm>
-            <a:off x="1874520" y="4096512"/>
-            <a:ext cx="6903720" cy="804672"/>
-          </a:xfrm>
-          <a:prstGeom prst="rect">
-            <a:avLst>
-              <a:gd name="adj" fmla="val 6818"/>
-            </a:avLst>
-          </a:prstGeom>
-          <a:solidFill>
-            <a:srgbClr val="F8FAFC"/>
-          </a:solidFill>
-          <a:ln w="12700">
-            <a:solidFill>
-              <a:srgbClr val="E2E8F0"/>
-            </a:solidFill>
             <a:prstDash val="dash"/>
           </a:ln>
         </p:spPr>
       </p:sp>
       <p:sp>
         <p:nvSpPr>
-          <p:cNvPr id="32" name="Text 30"/>
+          <p:cNvPr id="29" name="Text 27"/>
           <p:cNvSpPr/>
           <p:nvPr/>
         </p:nvSpPr>
@@ -23983,7 +24141,7 @@
                 <a:ea typeface="Calibri" pitchFamily="34" charset="-122"/>
                 <a:cs typeface="Calibri" pitchFamily="34" charset="-120"/>
               </a:rPr>
-              <a:t>Word Labs  •  wordlabs.app  •  Root: 'harm' = damage, injury, or hurt</a:t>
+              <a:t>Word Labs  •  wordlabs.app  •  Root: 'harm' = injury, damage, hurt</a:t>
             </a:r>
             <a:endParaRPr lang="en-US" sz="800" dirty="0"/>
           </a:p>
@@ -24056,7 +24214,7 @@
                 <a:ea typeface="Trebuchet MS" pitchFamily="34" charset="-122"/>
                 <a:cs typeface="Trebuchet MS" pitchFamily="34" charset="-120"/>
               </a:rPr>
-              <a:t>We are learning that the root 'harm' means 'damage, injury, or hurt'.</a:t>
+              <a:t>We are learning that the root 'harm' means 'injury, damage, hurt'.</a:t>
             </a:r>
             <a:endParaRPr lang="en-US" sz="2000" dirty="0"/>
           </a:p>
@@ -24702,7 +24860,7 @@
                 <a:ea typeface="Calibri" pitchFamily="34" charset="-122"/>
                 <a:cs typeface="Calibri" pitchFamily="34" charset="-120"/>
               </a:rPr>
-              <a:t>Word Labs  •  wordlabs.app  •  Root: 'harm' = damage, injury, or hurt</a:t>
+              <a:t>Word Labs  •  wordlabs.app  •  Root: 'harm' = injury, damage, hurt</a:t>
             </a:r>
             <a:endParaRPr lang="en-US" sz="800" dirty="0"/>
           </a:p>
@@ -24841,7 +24999,7 @@
                 <a:ea typeface="Trebuchet MS" pitchFamily="34" charset="-122"/>
                 <a:cs typeface="Trebuchet MS" pitchFamily="34" charset="-120"/>
               </a:rPr>
-              <a:t>unharmed</a:t>
+              <a:t>harmless</a:t>
             </a:r>
             <a:endParaRPr lang="en-US" sz="2800" dirty="0"/>
           </a:p>
@@ -24921,7 +25079,7 @@
         </p:nvSpPr>
         <p:spPr>
           <a:xfrm>
-            <a:off x="2221992" y="2258568"/>
+            <a:off x="2938272" y="2258568"/>
             <a:ext cx="1828800" cy="292608"/>
           </a:xfrm>
           <a:prstGeom prst="rect">
@@ -24930,11 +25088,11 @@
             </a:avLst>
           </a:prstGeom>
           <a:solidFill>
-            <a:srgbClr val="DDD6FE"/>
+            <a:srgbClr val="CCFBF1"/>
           </a:solidFill>
           <a:ln w="19050">
             <a:solidFill>
-              <a:srgbClr val="7C3AED"/>
+              <a:srgbClr val="0D9488"/>
             </a:solidFill>
             <a:prstDash val="solid"/>
           </a:ln>
@@ -24955,7 +25113,7 @@
         </p:nvSpPr>
         <p:spPr>
           <a:xfrm>
-            <a:off x="2221992" y="2258568"/>
+            <a:off x="2938272" y="2258568"/>
             <a:ext cx="1828800" cy="292608"/>
           </a:xfrm>
           <a:prstGeom prst="rect">
@@ -24974,13 +25132,13 @@
             <a:r>
               <a:rPr lang="en-US" sz="1300" b="1" dirty="0">
                 <a:solidFill>
-                  <a:srgbClr val="4C1D95"/>
+                  <a:srgbClr val="0F766E"/>
                 </a:solidFill>
                 <a:latin typeface="Trebuchet MS" pitchFamily="34" charset="0"/>
                 <a:ea typeface="Trebuchet MS" pitchFamily="34" charset="-122"/>
                 <a:cs typeface="Trebuchet MS" pitchFamily="34" charset="-120"/>
               </a:rPr>
-              <a:t>un</a:t>
+              <a:t>harm</a:t>
             </a:r>
             <a:endParaRPr lang="en-US" sz="1300" dirty="0"/>
           </a:p>
@@ -24994,7 +25152,7 @@
         </p:nvSpPr>
         <p:spPr>
           <a:xfrm>
-            <a:off x="2221992" y="2569464"/>
+            <a:off x="2938272" y="2569464"/>
             <a:ext cx="1828800" cy="201168"/>
           </a:xfrm>
           <a:prstGeom prst="rect">
@@ -25019,7 +25177,7 @@
                 <a:ea typeface="Calibri" pitchFamily="34" charset="-122"/>
                 <a:cs typeface="Calibri" pitchFamily="34" charset="-120"/>
               </a:rPr>
-              <a:t>not</a:t>
+              <a:t>injury or damage</a:t>
             </a:r>
             <a:endParaRPr lang="en-US" sz="850" dirty="0"/>
           </a:p>
@@ -25033,7 +25191,7 @@
         </p:nvSpPr>
         <p:spPr>
           <a:xfrm>
-            <a:off x="4370832" y="2258568"/>
+            <a:off x="5803392" y="2258568"/>
             <a:ext cx="1828800" cy="292608"/>
           </a:xfrm>
           <a:prstGeom prst="rect">
@@ -25042,11 +25200,11 @@
             </a:avLst>
           </a:prstGeom>
           <a:solidFill>
-            <a:srgbClr val="CCFBF1"/>
+            <a:srgbClr val="DDD6FE"/>
           </a:solidFill>
           <a:ln w="19050">
             <a:solidFill>
-              <a:srgbClr val="0D9488"/>
+              <a:srgbClr val="7C3AED"/>
             </a:solidFill>
             <a:prstDash val="solid"/>
           </a:ln>
@@ -25067,7 +25225,7 @@
         </p:nvSpPr>
         <p:spPr>
           <a:xfrm>
-            <a:off x="4370832" y="2258568"/>
+            <a:off x="5803392" y="2258568"/>
             <a:ext cx="1828800" cy="292608"/>
           </a:xfrm>
           <a:prstGeom prst="rect">
@@ -25086,13 +25244,13 @@
             <a:r>
               <a:rPr lang="en-US" sz="1300" b="1" dirty="0">
                 <a:solidFill>
-                  <a:srgbClr val="0F766E"/>
+                  <a:srgbClr val="4C1D95"/>
                 </a:solidFill>
                 <a:latin typeface="Trebuchet MS" pitchFamily="34" charset="0"/>
                 <a:ea typeface="Trebuchet MS" pitchFamily="34" charset="-122"/>
                 <a:cs typeface="Trebuchet MS" pitchFamily="34" charset="-120"/>
               </a:rPr>
-              <a:t>harm</a:t>
+              <a:t>less</a:t>
             </a:r>
             <a:endParaRPr lang="en-US" sz="1300" dirty="0"/>
           </a:p>
@@ -25106,7 +25264,7 @@
         </p:nvSpPr>
         <p:spPr>
           <a:xfrm>
-            <a:off x="4370832" y="2569464"/>
+            <a:off x="5803392" y="2569464"/>
             <a:ext cx="1828800" cy="201168"/>
           </a:xfrm>
           <a:prstGeom prst="rect">
@@ -25131,7 +25289,7 @@
                 <a:ea typeface="Calibri" pitchFamily="34" charset="-122"/>
                 <a:cs typeface="Calibri" pitchFamily="34" charset="-120"/>
               </a:rPr>
-              <a:t>damage or injury</a:t>
+              <a:t>without</a:t>
             </a:r>
             <a:endParaRPr lang="en-US" sz="850" dirty="0"/>
           </a:p>
@@ -25145,30 +25303,23 @@
         </p:nvSpPr>
         <p:spPr>
           <a:xfrm>
-            <a:off x="6519672" y="2258568"/>
-            <a:ext cx="1828800" cy="292608"/>
+            <a:off x="365760" y="3273552"/>
+            <a:ext cx="1371600" cy="658368"/>
           </a:xfrm>
           <a:prstGeom prst="rect">
             <a:avLst>
-              <a:gd name="adj" fmla="val 25000"/>
+              <a:gd name="adj" fmla="val 8333"/>
             </a:avLst>
           </a:prstGeom>
           <a:solidFill>
-            <a:srgbClr val="FCE7F3"/>
-          </a:solidFill>
-          <a:ln w="19050">
-            <a:solidFill>
-              <a:srgbClr val="DB2777"/>
-            </a:solidFill>
-            <a:prstDash val="solid"/>
-          </a:ln>
-          <a:effectLst>
-            <a:outerShdw sx="100000" sy="100000" kx="0" ky="0" algn="bl" rotWithShape="0" blurRad="101600" dist="38100" dir="8100000">
-              <a:srgbClr val="000000">
-                <a:alpha val="12000"/>
-              </a:srgbClr>
-            </a:outerShdw>
-          </a:effectLst>
+            <a:srgbClr val="E2E8F0"/>
+          </a:solidFill>
+          <a:ln w="12700">
+            <a:solidFill>
+              <a:srgbClr val="E2E8F0"/>
+            </a:solidFill>
+            <a:prstDash val="solid"/>
+          </a:ln>
         </p:spPr>
       </p:sp>
       <p:sp>
@@ -25179,8 +25330,8 @@
         </p:nvSpPr>
         <p:spPr>
           <a:xfrm>
-            <a:off x="6519672" y="2258568"/>
-            <a:ext cx="1828800" cy="292608"/>
+            <a:off x="365760" y="3273552"/>
+            <a:ext cx="1371600" cy="658368"/>
           </a:xfrm>
           <a:prstGeom prst="rect">
             <a:avLst/>
@@ -25196,69 +25347,30 @@
               <a:buNone/>
             </a:pPr>
             <a:r>
-              <a:rPr lang="en-US" sz="1300" b="1" dirty="0">
-                <a:solidFill>
-                  <a:srgbClr val="9D174D"/>
+              <a:rPr lang="en-US" sz="1100" b="1" dirty="0">
+                <a:solidFill>
+                  <a:srgbClr val="475569"/>
                 </a:solidFill>
                 <a:latin typeface="Trebuchet MS" pitchFamily="34" charset="0"/>
                 <a:ea typeface="Trebuchet MS" pitchFamily="34" charset="-122"/>
                 <a:cs typeface="Trebuchet MS" pitchFamily="34" charset="-120"/>
               </a:rPr>
-              <a:t>ed</a:t>
-            </a:r>
-            <a:endParaRPr lang="en-US" sz="1300" dirty="0"/>
-          </a:p>
-        </p:txBody>
-      </p:sp>
-      <p:sp>
-        <p:nvSpPr>
-          <p:cNvPr id="24" name="Text 22"/>
-          <p:cNvSpPr/>
-          <p:nvPr/>
-        </p:nvSpPr>
-        <p:spPr>
-          <a:xfrm>
-            <a:off x="6519672" y="2569464"/>
-            <a:ext cx="1828800" cy="201168"/>
-          </a:xfrm>
-          <a:prstGeom prst="rect">
-            <a:avLst/>
-          </a:prstGeom>
-          <a:noFill/>
-          <a:ln/>
-        </p:spPr>
-        <p:txBody>
-          <a:bodyPr wrap="square" lIns="0" tIns="0" rIns="0" bIns="0" rtlCol="0" anchor="t"/>
-          <a:lstStyle/>
-          <a:p>
-            <a:pPr algn="ctr" indent="0" marL="0">
-              <a:buNone/>
-            </a:pPr>
-            <a:r>
-              <a:rPr lang="en-US" sz="850" dirty="0">
-                <a:solidFill>
-                  <a:srgbClr val="475569"/>
-                </a:solidFill>
-                <a:latin typeface="Calibri" pitchFamily="34" charset="0"/>
-                <a:ea typeface="Calibri" pitchFamily="34" charset="-122"/>
-                <a:cs typeface="Calibri" pitchFamily="34" charset="-120"/>
-              </a:rPr>
-              <a:t>past tense</a:t>
-            </a:r>
-            <a:endParaRPr lang="en-US" sz="850" dirty="0"/>
-          </a:p>
-        </p:txBody>
-      </p:sp>
-      <p:sp>
-        <p:nvSpPr>
-          <p:cNvPr id="25" name="Shape 23"/>
-          <p:cNvSpPr/>
-          <p:nvPr/>
-        </p:nvSpPr>
-        <p:spPr>
-          <a:xfrm>
-            <a:off x="365760" y="3273552"/>
-            <a:ext cx="1371600" cy="658368"/>
+              <a:t>Syllables</a:t>
+            </a:r>
+            <a:endParaRPr lang="en-US" sz="1100" dirty="0"/>
+          </a:p>
+        </p:txBody>
+      </p:sp>
+      <p:sp>
+        <p:nvSpPr>
+          <p:cNvPr id="24" name="Shape 22"/>
+          <p:cNvSpPr/>
+          <p:nvPr/>
+        </p:nvSpPr>
+        <p:spPr>
+          <a:xfrm>
+            <a:off x="1874520" y="3273552"/>
+            <a:ext cx="6903720" cy="658368"/>
           </a:xfrm>
           <a:prstGeom prst="rect">
             <a:avLst>
@@ -25266,11 +25378,38 @@
             </a:avLst>
           </a:prstGeom>
           <a:solidFill>
-            <a:srgbClr val="E2E8F0"/>
-          </a:solidFill>
-          <a:ln w="12700">
-            <a:solidFill>
-              <a:srgbClr val="E2E8F0"/>
+            <a:srgbClr val="CCFBF1"/>
+          </a:solidFill>
+          <a:ln w="12700">
+            <a:solidFill>
+              <a:srgbClr val="0D9488"/>
+            </a:solidFill>
+            <a:prstDash val="solid"/>
+          </a:ln>
+        </p:spPr>
+      </p:sp>
+      <p:sp>
+        <p:nvSpPr>
+          <p:cNvPr id="25" name="Shape 23"/>
+          <p:cNvSpPr/>
+          <p:nvPr/>
+        </p:nvSpPr>
+        <p:spPr>
+          <a:xfrm>
+            <a:off x="2999232" y="3364992"/>
+            <a:ext cx="1645920" cy="475488"/>
+          </a:xfrm>
+          <a:prstGeom prst="rect">
+            <a:avLst>
+              <a:gd name="adj" fmla="val 9615"/>
+            </a:avLst>
+          </a:prstGeom>
+          <a:solidFill>
+            <a:srgbClr val="FFFFFF"/>
+          </a:solidFill>
+          <a:ln w="12700">
+            <a:solidFill>
+              <a:srgbClr val="0D9488"/>
             </a:solidFill>
             <a:prstDash val="solid"/>
           </a:ln>
@@ -25284,8 +25423,8 @@
         </p:nvSpPr>
         <p:spPr>
           <a:xfrm>
-            <a:off x="365760" y="3273552"/>
-            <a:ext cx="1371600" cy="658368"/>
+            <a:off x="2999232" y="3364992"/>
+            <a:ext cx="1645920" cy="475488"/>
           </a:xfrm>
           <a:prstGeom prst="rect">
             <a:avLst/>
@@ -25301,46 +25440,58 @@
               <a:buNone/>
             </a:pPr>
             <a:r>
-              <a:rPr lang="en-US" sz="1100" b="1" dirty="0">
-                <a:solidFill>
-                  <a:srgbClr val="475569"/>
+              <a:rPr lang="en-US" sz="1400" b="1" dirty="0">
+                <a:solidFill>
+                  <a:srgbClr val="0D9488"/>
                 </a:solidFill>
                 <a:latin typeface="Trebuchet MS" pitchFamily="34" charset="0"/>
                 <a:ea typeface="Trebuchet MS" pitchFamily="34" charset="-122"/>
                 <a:cs typeface="Trebuchet MS" pitchFamily="34" charset="-120"/>
               </a:rPr>
-              <a:t>Syllables</a:t>
-            </a:r>
-            <a:endParaRPr lang="en-US" sz="1100" dirty="0"/>
-          </a:p>
-        </p:txBody>
-      </p:sp>
-      <p:sp>
-        <p:nvSpPr>
-          <p:cNvPr id="27" name="Shape 25"/>
-          <p:cNvSpPr/>
-          <p:nvPr/>
-        </p:nvSpPr>
-        <p:spPr>
-          <a:xfrm>
-            <a:off x="1874520" y="3273552"/>
-            <a:ext cx="6903720" cy="658368"/>
-          </a:xfrm>
-          <a:prstGeom prst="rect">
-            <a:avLst>
-              <a:gd name="adj" fmla="val 8333"/>
-            </a:avLst>
-          </a:prstGeom>
-          <a:solidFill>
-            <a:srgbClr val="CCFBF1"/>
-          </a:solidFill>
-          <a:ln w="12700">
-            <a:solidFill>
-              <a:srgbClr val="0D9488"/>
-            </a:solidFill>
-            <a:prstDash val="solid"/>
-          </a:ln>
-        </p:spPr>
+              <a:t>harm</a:t>
+            </a:r>
+            <a:endParaRPr lang="en-US" sz="1400" dirty="0"/>
+          </a:p>
+        </p:txBody>
+      </p:sp>
+      <p:sp>
+        <p:nvSpPr>
+          <p:cNvPr id="27" name="Text 25"/>
+          <p:cNvSpPr/>
+          <p:nvPr/>
+        </p:nvSpPr>
+        <p:spPr>
+          <a:xfrm>
+            <a:off x="4645152" y="3364992"/>
+            <a:ext cx="1097280" cy="475488"/>
+          </a:xfrm>
+          <a:prstGeom prst="rect">
+            <a:avLst/>
+          </a:prstGeom>
+          <a:noFill/>
+          <a:ln/>
+        </p:spPr>
+        <p:txBody>
+          <a:bodyPr wrap="square" lIns="0" tIns="0" rIns="0" bIns="0" rtlCol="0" anchor="ctr"/>
+          <a:lstStyle/>
+          <a:p>
+            <a:pPr algn="ctr" indent="0" marL="0">
+              <a:buNone/>
+            </a:pPr>
+            <a:r>
+              <a:rPr lang="en-US" sz="1600" b="1" dirty="0">
+                <a:solidFill>
+                  <a:srgbClr val="0D9488"/>
+                </a:solidFill>
+                <a:latin typeface="Trebuchet MS" pitchFamily="34" charset="0"/>
+                <a:ea typeface="Trebuchet MS" pitchFamily="34" charset="-122"/>
+                <a:cs typeface="Trebuchet MS" pitchFamily="34" charset="-120"/>
+              </a:rPr>
+              <a:t>·</a:t>
+            </a:r>
+            <a:endParaRPr lang="en-US" sz="1600" dirty="0"/>
+          </a:p>
+        </p:txBody>
       </p:sp>
       <p:sp>
         <p:nvSpPr>
@@ -25350,7 +25501,7 @@
         </p:nvSpPr>
         <p:spPr>
           <a:xfrm>
-            <a:off x="2999232" y="3364992"/>
+            <a:off x="5742432" y="3364992"/>
             <a:ext cx="1645920" cy="475488"/>
           </a:xfrm>
           <a:prstGeom prst="rect">
@@ -25377,7 +25528,7 @@
         </p:nvSpPr>
         <p:spPr>
           <a:xfrm>
-            <a:off x="2999232" y="3364992"/>
+            <a:off x="5742432" y="3364992"/>
             <a:ext cx="1645920" cy="475488"/>
           </a:xfrm>
           <a:prstGeom prst="rect">
@@ -25402,7 +25553,7 @@
                 <a:ea typeface="Trebuchet MS" pitchFamily="34" charset="-122"/>
                 <a:cs typeface="Trebuchet MS" pitchFamily="34" charset="-120"/>
               </a:rPr>
-              <a:t>un</a:t>
+              <a:t>less</a:t>
             </a:r>
             <a:endParaRPr lang="en-US" sz="1400" dirty="0"/>
           </a:p>
@@ -25410,14 +25561,41 @@
       </p:sp>
       <p:sp>
         <p:nvSpPr>
-          <p:cNvPr id="30" name="Text 28"/>
-          <p:cNvSpPr/>
-          <p:nvPr/>
-        </p:nvSpPr>
-        <p:spPr>
-          <a:xfrm>
-            <a:off x="4645152" y="3364992"/>
-            <a:ext cx="1097280" cy="475488"/>
+          <p:cNvPr id="30" name="Shape 28"/>
+          <p:cNvSpPr/>
+          <p:nvPr/>
+        </p:nvSpPr>
+        <p:spPr>
+          <a:xfrm>
+            <a:off x="365760" y="4096512"/>
+            <a:ext cx="1371600" cy="804672"/>
+          </a:xfrm>
+          <a:prstGeom prst="rect">
+            <a:avLst>
+              <a:gd name="adj" fmla="val 6818"/>
+            </a:avLst>
+          </a:prstGeom>
+          <a:solidFill>
+            <a:srgbClr val="E2E8F0"/>
+          </a:solidFill>
+          <a:ln w="12700">
+            <a:solidFill>
+              <a:srgbClr val="E2E8F0"/>
+            </a:solidFill>
+            <a:prstDash val="solid"/>
+          </a:ln>
+        </p:spPr>
+      </p:sp>
+      <p:sp>
+        <p:nvSpPr>
+          <p:cNvPr id="31" name="Text 29"/>
+          <p:cNvSpPr/>
+          <p:nvPr/>
+        </p:nvSpPr>
+        <p:spPr>
+          <a:xfrm>
+            <a:off x="365760" y="4096512"/>
+            <a:ext cx="1371600" cy="804672"/>
           </a:xfrm>
           <a:prstGeom prst="rect">
             <a:avLst/>
@@ -25433,96 +25611,30 @@
               <a:buNone/>
             </a:pPr>
             <a:r>
-              <a:rPr lang="en-US" sz="1600" b="1" dirty="0">
-                <a:solidFill>
-                  <a:srgbClr val="0D9488"/>
+              <a:rPr lang="en-US" sz="1100" b="1" dirty="0">
+                <a:solidFill>
+                  <a:srgbClr val="475569"/>
                 </a:solidFill>
                 <a:latin typeface="Trebuchet MS" pitchFamily="34" charset="0"/>
                 <a:ea typeface="Trebuchet MS" pitchFamily="34" charset="-122"/>
                 <a:cs typeface="Trebuchet MS" pitchFamily="34" charset="-120"/>
               </a:rPr>
-              <a:t>·</a:t>
-            </a:r>
-            <a:endParaRPr lang="en-US" sz="1600" dirty="0"/>
-          </a:p>
-        </p:txBody>
-      </p:sp>
-      <p:sp>
-        <p:nvSpPr>
-          <p:cNvPr id="31" name="Shape 29"/>
-          <p:cNvSpPr/>
-          <p:nvPr/>
-        </p:nvSpPr>
-        <p:spPr>
-          <a:xfrm>
-            <a:off x="5742432" y="3364992"/>
-            <a:ext cx="1645920" cy="475488"/>
-          </a:xfrm>
-          <a:prstGeom prst="rect">
-            <a:avLst>
-              <a:gd name="adj" fmla="val 9615"/>
-            </a:avLst>
-          </a:prstGeom>
-          <a:solidFill>
-            <a:srgbClr val="FFFFFF"/>
-          </a:solidFill>
-          <a:ln w="12700">
-            <a:solidFill>
-              <a:srgbClr val="0D9488"/>
-            </a:solidFill>
-            <a:prstDash val="solid"/>
-          </a:ln>
-        </p:spPr>
-      </p:sp>
-      <p:sp>
-        <p:nvSpPr>
-          <p:cNvPr id="32" name="Text 30"/>
-          <p:cNvSpPr/>
-          <p:nvPr/>
-        </p:nvSpPr>
-        <p:spPr>
-          <a:xfrm>
-            <a:off x="5742432" y="3364992"/>
-            <a:ext cx="1645920" cy="475488"/>
-          </a:xfrm>
-          <a:prstGeom prst="rect">
-            <a:avLst/>
-          </a:prstGeom>
-          <a:noFill/>
-          <a:ln/>
-        </p:spPr>
-        <p:txBody>
-          <a:bodyPr wrap="square" lIns="0" tIns="0" rIns="0" bIns="0" rtlCol="0" anchor="ctr"/>
-          <a:lstStyle/>
-          <a:p>
-            <a:pPr algn="ctr" indent="0" marL="0">
-              <a:buNone/>
-            </a:pPr>
-            <a:r>
-              <a:rPr lang="en-US" sz="1400" b="1" dirty="0">
-                <a:solidFill>
-                  <a:srgbClr val="0D9488"/>
-                </a:solidFill>
-                <a:latin typeface="Trebuchet MS" pitchFamily="34" charset="0"/>
-                <a:ea typeface="Trebuchet MS" pitchFamily="34" charset="-122"/>
-                <a:cs typeface="Trebuchet MS" pitchFamily="34" charset="-120"/>
-              </a:rPr>
-              <a:t>harmed</a:t>
-            </a:r>
-            <a:endParaRPr lang="en-US" sz="1400" dirty="0"/>
-          </a:p>
-        </p:txBody>
-      </p:sp>
-      <p:sp>
-        <p:nvSpPr>
-          <p:cNvPr id="33" name="Shape 31"/>
-          <p:cNvSpPr/>
-          <p:nvPr/>
-        </p:nvSpPr>
-        <p:spPr>
-          <a:xfrm>
-            <a:off x="365760" y="4096512"/>
-            <a:ext cx="1371600" cy="804672"/>
+              <a:t>Phonemes</a:t>
+            </a:r>
+            <a:endParaRPr lang="en-US" sz="1100" dirty="0"/>
+          </a:p>
+        </p:txBody>
+      </p:sp>
+      <p:sp>
+        <p:nvSpPr>
+          <p:cNvPr id="32" name="Shape 30"/>
+          <p:cNvSpPr/>
+          <p:nvPr/>
+        </p:nvSpPr>
+        <p:spPr>
+          <a:xfrm>
+            <a:off x="1874520" y="4096512"/>
+            <a:ext cx="6903720" cy="804672"/>
           </a:xfrm>
           <a:prstGeom prst="rect">
             <a:avLst>
@@ -25530,85 +25642,19 @@
             </a:avLst>
           </a:prstGeom>
           <a:solidFill>
-            <a:srgbClr val="E2E8F0"/>
+            <a:srgbClr val="F8FAFC"/>
           </a:solidFill>
           <a:ln w="12700">
             <a:solidFill>
               <a:srgbClr val="E2E8F0"/>
             </a:solidFill>
-            <a:prstDash val="solid"/>
-          </a:ln>
-        </p:spPr>
-      </p:sp>
-      <p:sp>
-        <p:nvSpPr>
-          <p:cNvPr id="34" name="Text 32"/>
-          <p:cNvSpPr/>
-          <p:nvPr/>
-        </p:nvSpPr>
-        <p:spPr>
-          <a:xfrm>
-            <a:off x="365760" y="4096512"/>
-            <a:ext cx="1371600" cy="804672"/>
-          </a:xfrm>
-          <a:prstGeom prst="rect">
-            <a:avLst/>
-          </a:prstGeom>
-          <a:noFill/>
-          <a:ln/>
-        </p:spPr>
-        <p:txBody>
-          <a:bodyPr wrap="square" lIns="0" tIns="0" rIns="0" bIns="0" rtlCol="0" anchor="ctr"/>
-          <a:lstStyle/>
-          <a:p>
-            <a:pPr algn="ctr" indent="0" marL="0">
-              <a:buNone/>
-            </a:pPr>
-            <a:r>
-              <a:rPr lang="en-US" sz="1100" b="1" dirty="0">
-                <a:solidFill>
-                  <a:srgbClr val="475569"/>
-                </a:solidFill>
-                <a:latin typeface="Trebuchet MS" pitchFamily="34" charset="0"/>
-                <a:ea typeface="Trebuchet MS" pitchFamily="34" charset="-122"/>
-                <a:cs typeface="Trebuchet MS" pitchFamily="34" charset="-120"/>
-              </a:rPr>
-              <a:t>Phonemes</a:t>
-            </a:r>
-            <a:endParaRPr lang="en-US" sz="1100" dirty="0"/>
-          </a:p>
-        </p:txBody>
-      </p:sp>
-      <p:sp>
-        <p:nvSpPr>
-          <p:cNvPr id="35" name="Shape 33"/>
-          <p:cNvSpPr/>
-          <p:nvPr/>
-        </p:nvSpPr>
-        <p:spPr>
-          <a:xfrm>
-            <a:off x="1874520" y="4096512"/>
-            <a:ext cx="6903720" cy="804672"/>
-          </a:xfrm>
-          <a:prstGeom prst="rect">
-            <a:avLst>
-              <a:gd name="adj" fmla="val 6818"/>
-            </a:avLst>
-          </a:prstGeom>
-          <a:solidFill>
-            <a:srgbClr val="F8FAFC"/>
-          </a:solidFill>
-          <a:ln w="12700">
-            <a:solidFill>
-              <a:srgbClr val="E2E8F0"/>
-            </a:solidFill>
             <a:prstDash val="dash"/>
           </a:ln>
         </p:spPr>
       </p:sp>
       <p:sp>
         <p:nvSpPr>
-          <p:cNvPr id="36" name="Text 34"/>
+          <p:cNvPr id="33" name="Text 31"/>
           <p:cNvSpPr/>
           <p:nvPr/>
         </p:nvSpPr>
@@ -25931,7 +25977,7 @@
                 <a:ea typeface="Calibri" pitchFamily="34" charset="-122"/>
                 <a:cs typeface="Calibri" pitchFamily="34" charset="-120"/>
               </a:rPr>
-              <a:t>Word Labs  •  wordlabs.app  •  Root: 'harm' = damage, injury, or hurt</a:t>
+              <a:t>Word Labs  •  wordlabs.app  •  Root: 'harm' = injury, damage, hurt</a:t>
             </a:r>
             <a:endParaRPr lang="en-US" sz="800" dirty="0"/>
           </a:p>
@@ -26070,7 +26116,7 @@
                 <a:ea typeface="Trebuchet MS" pitchFamily="34" charset="-122"/>
                 <a:cs typeface="Trebuchet MS" pitchFamily="34" charset="-120"/>
               </a:rPr>
-              <a:t>unharmed</a:t>
+              <a:t>harmless</a:t>
             </a:r>
             <a:endParaRPr lang="en-US" sz="2800" dirty="0"/>
           </a:p>
@@ -26150,7 +26196,7 @@
         </p:nvSpPr>
         <p:spPr>
           <a:xfrm>
-            <a:off x="2221992" y="2258568"/>
+            <a:off x="2938272" y="2258568"/>
             <a:ext cx="1828800" cy="292608"/>
           </a:xfrm>
           <a:prstGeom prst="rect">
@@ -26159,11 +26205,11 @@
             </a:avLst>
           </a:prstGeom>
           <a:solidFill>
-            <a:srgbClr val="DDD6FE"/>
+            <a:srgbClr val="CCFBF1"/>
           </a:solidFill>
           <a:ln w="19050">
             <a:solidFill>
-              <a:srgbClr val="7C3AED"/>
+              <a:srgbClr val="0D9488"/>
             </a:solidFill>
             <a:prstDash val="solid"/>
           </a:ln>
@@ -26184,7 +26230,7 @@
         </p:nvSpPr>
         <p:spPr>
           <a:xfrm>
-            <a:off x="2221992" y="2258568"/>
+            <a:off x="2938272" y="2258568"/>
             <a:ext cx="1828800" cy="292608"/>
           </a:xfrm>
           <a:prstGeom prst="rect">
@@ -26203,13 +26249,13 @@
             <a:r>
               <a:rPr lang="en-US" sz="1300" b="1" dirty="0">
                 <a:solidFill>
-                  <a:srgbClr val="4C1D95"/>
+                  <a:srgbClr val="0F766E"/>
                 </a:solidFill>
                 <a:latin typeface="Trebuchet MS" pitchFamily="34" charset="0"/>
                 <a:ea typeface="Trebuchet MS" pitchFamily="34" charset="-122"/>
                 <a:cs typeface="Trebuchet MS" pitchFamily="34" charset="-120"/>
               </a:rPr>
-              <a:t>un</a:t>
+              <a:t>harm</a:t>
             </a:r>
             <a:endParaRPr lang="en-US" sz="1300" dirty="0"/>
           </a:p>
@@ -26223,7 +26269,7 @@
         </p:nvSpPr>
         <p:spPr>
           <a:xfrm>
-            <a:off x="2221992" y="2569464"/>
+            <a:off x="2938272" y="2569464"/>
             <a:ext cx="1828800" cy="201168"/>
           </a:xfrm>
           <a:prstGeom prst="rect">
@@ -26248,7 +26294,7 @@
                 <a:ea typeface="Calibri" pitchFamily="34" charset="-122"/>
                 <a:cs typeface="Calibri" pitchFamily="34" charset="-120"/>
               </a:rPr>
-              <a:t>not</a:t>
+              <a:t>injury or damage</a:t>
             </a:r>
             <a:endParaRPr lang="en-US" sz="850" dirty="0"/>
           </a:p>
@@ -26262,7 +26308,7 @@
         </p:nvSpPr>
         <p:spPr>
           <a:xfrm>
-            <a:off x="4370832" y="2258568"/>
+            <a:off x="5803392" y="2258568"/>
             <a:ext cx="1828800" cy="292608"/>
           </a:xfrm>
           <a:prstGeom prst="rect">
@@ -26271,11 +26317,11 @@
             </a:avLst>
           </a:prstGeom>
           <a:solidFill>
-            <a:srgbClr val="CCFBF1"/>
+            <a:srgbClr val="DDD6FE"/>
           </a:solidFill>
           <a:ln w="19050">
             <a:solidFill>
-              <a:srgbClr val="0D9488"/>
+              <a:srgbClr val="7C3AED"/>
             </a:solidFill>
             <a:prstDash val="solid"/>
           </a:ln>
@@ -26296,7 +26342,7 @@
         </p:nvSpPr>
         <p:spPr>
           <a:xfrm>
-            <a:off x="4370832" y="2258568"/>
+            <a:off x="5803392" y="2258568"/>
             <a:ext cx="1828800" cy="292608"/>
           </a:xfrm>
           <a:prstGeom prst="rect">
@@ -26315,13 +26361,13 @@
             <a:r>
               <a:rPr lang="en-US" sz="1300" b="1" dirty="0">
                 <a:solidFill>
-                  <a:srgbClr val="0F766E"/>
+                  <a:srgbClr val="4C1D95"/>
                 </a:solidFill>
                 <a:latin typeface="Trebuchet MS" pitchFamily="34" charset="0"/>
                 <a:ea typeface="Trebuchet MS" pitchFamily="34" charset="-122"/>
                 <a:cs typeface="Trebuchet MS" pitchFamily="34" charset="-120"/>
               </a:rPr>
-              <a:t>harm</a:t>
+              <a:t>less</a:t>
             </a:r>
             <a:endParaRPr lang="en-US" sz="1300" dirty="0"/>
           </a:p>
@@ -26335,7 +26381,7 @@
         </p:nvSpPr>
         <p:spPr>
           <a:xfrm>
-            <a:off x="4370832" y="2569464"/>
+            <a:off x="5803392" y="2569464"/>
             <a:ext cx="1828800" cy="201168"/>
           </a:xfrm>
           <a:prstGeom prst="rect">
@@ -26360,7 +26406,7 @@
                 <a:ea typeface="Calibri" pitchFamily="34" charset="-122"/>
                 <a:cs typeface="Calibri" pitchFamily="34" charset="-120"/>
               </a:rPr>
-              <a:t>damage or injury</a:t>
+              <a:t>without</a:t>
             </a:r>
             <a:endParaRPr lang="en-US" sz="850" dirty="0"/>
           </a:p>
@@ -26374,30 +26420,23 @@
         </p:nvSpPr>
         <p:spPr>
           <a:xfrm>
-            <a:off x="6519672" y="2258568"/>
-            <a:ext cx="1828800" cy="292608"/>
+            <a:off x="365760" y="3273552"/>
+            <a:ext cx="1371600" cy="658368"/>
           </a:xfrm>
           <a:prstGeom prst="rect">
             <a:avLst>
-              <a:gd name="adj" fmla="val 25000"/>
+              <a:gd name="adj" fmla="val 8333"/>
             </a:avLst>
           </a:prstGeom>
           <a:solidFill>
-            <a:srgbClr val="FCE7F3"/>
-          </a:solidFill>
-          <a:ln w="19050">
-            <a:solidFill>
-              <a:srgbClr val="DB2777"/>
-            </a:solidFill>
-            <a:prstDash val="solid"/>
-          </a:ln>
-          <a:effectLst>
-            <a:outerShdw sx="100000" sy="100000" kx="0" ky="0" algn="bl" rotWithShape="0" blurRad="101600" dist="38100" dir="8100000">
-              <a:srgbClr val="000000">
-                <a:alpha val="12000"/>
-              </a:srgbClr>
-            </a:outerShdw>
-          </a:effectLst>
+            <a:srgbClr val="E2E8F0"/>
+          </a:solidFill>
+          <a:ln w="12700">
+            <a:solidFill>
+              <a:srgbClr val="E2E8F0"/>
+            </a:solidFill>
+            <a:prstDash val="solid"/>
+          </a:ln>
         </p:spPr>
       </p:sp>
       <p:sp>
@@ -26408,8 +26447,8 @@
         </p:nvSpPr>
         <p:spPr>
           <a:xfrm>
-            <a:off x="6519672" y="2258568"/>
-            <a:ext cx="1828800" cy="292608"/>
+            <a:off x="365760" y="3273552"/>
+            <a:ext cx="1371600" cy="658368"/>
           </a:xfrm>
           <a:prstGeom prst="rect">
             <a:avLst/>
@@ -26425,69 +26464,30 @@
               <a:buNone/>
             </a:pPr>
             <a:r>
-              <a:rPr lang="en-US" sz="1300" b="1" dirty="0">
-                <a:solidFill>
-                  <a:srgbClr val="9D174D"/>
+              <a:rPr lang="en-US" sz="1100" b="1" dirty="0">
+                <a:solidFill>
+                  <a:srgbClr val="475569"/>
                 </a:solidFill>
                 <a:latin typeface="Trebuchet MS" pitchFamily="34" charset="0"/>
                 <a:ea typeface="Trebuchet MS" pitchFamily="34" charset="-122"/>
                 <a:cs typeface="Trebuchet MS" pitchFamily="34" charset="-120"/>
               </a:rPr>
-              <a:t>ed</a:t>
-            </a:r>
-            <a:endParaRPr lang="en-US" sz="1300" dirty="0"/>
-          </a:p>
-        </p:txBody>
-      </p:sp>
-      <p:sp>
-        <p:nvSpPr>
-          <p:cNvPr id="24" name="Text 22"/>
-          <p:cNvSpPr/>
-          <p:nvPr/>
-        </p:nvSpPr>
-        <p:spPr>
-          <a:xfrm>
-            <a:off x="6519672" y="2569464"/>
-            <a:ext cx="1828800" cy="201168"/>
-          </a:xfrm>
-          <a:prstGeom prst="rect">
-            <a:avLst/>
-          </a:prstGeom>
-          <a:noFill/>
-          <a:ln/>
-        </p:spPr>
-        <p:txBody>
-          <a:bodyPr wrap="square" lIns="0" tIns="0" rIns="0" bIns="0" rtlCol="0" anchor="t"/>
-          <a:lstStyle/>
-          <a:p>
-            <a:pPr algn="ctr" indent="0" marL="0">
-              <a:buNone/>
-            </a:pPr>
-            <a:r>
-              <a:rPr lang="en-US" sz="850" dirty="0">
-                <a:solidFill>
-                  <a:srgbClr val="475569"/>
-                </a:solidFill>
-                <a:latin typeface="Calibri" pitchFamily="34" charset="0"/>
-                <a:ea typeface="Calibri" pitchFamily="34" charset="-122"/>
-                <a:cs typeface="Calibri" pitchFamily="34" charset="-120"/>
-              </a:rPr>
-              <a:t>past tense</a:t>
-            </a:r>
-            <a:endParaRPr lang="en-US" sz="850" dirty="0"/>
-          </a:p>
-        </p:txBody>
-      </p:sp>
-      <p:sp>
-        <p:nvSpPr>
-          <p:cNvPr id="25" name="Shape 23"/>
-          <p:cNvSpPr/>
-          <p:nvPr/>
-        </p:nvSpPr>
-        <p:spPr>
-          <a:xfrm>
-            <a:off x="365760" y="3273552"/>
-            <a:ext cx="1371600" cy="658368"/>
+              <a:t>Syllables</a:t>
+            </a:r>
+            <a:endParaRPr lang="en-US" sz="1100" dirty="0"/>
+          </a:p>
+        </p:txBody>
+      </p:sp>
+      <p:sp>
+        <p:nvSpPr>
+          <p:cNvPr id="24" name="Shape 22"/>
+          <p:cNvSpPr/>
+          <p:nvPr/>
+        </p:nvSpPr>
+        <p:spPr>
+          <a:xfrm>
+            <a:off x="1874520" y="3273552"/>
+            <a:ext cx="6903720" cy="658368"/>
           </a:xfrm>
           <a:prstGeom prst="rect">
             <a:avLst>
@@ -26495,11 +26495,38 @@
             </a:avLst>
           </a:prstGeom>
           <a:solidFill>
-            <a:srgbClr val="E2E8F0"/>
-          </a:solidFill>
-          <a:ln w="12700">
-            <a:solidFill>
-              <a:srgbClr val="E2E8F0"/>
+            <a:srgbClr val="CCFBF1"/>
+          </a:solidFill>
+          <a:ln w="12700">
+            <a:solidFill>
+              <a:srgbClr val="0D9488"/>
+            </a:solidFill>
+            <a:prstDash val="solid"/>
+          </a:ln>
+        </p:spPr>
+      </p:sp>
+      <p:sp>
+        <p:nvSpPr>
+          <p:cNvPr id="25" name="Shape 23"/>
+          <p:cNvSpPr/>
+          <p:nvPr/>
+        </p:nvSpPr>
+        <p:spPr>
+          <a:xfrm>
+            <a:off x="2999232" y="3364992"/>
+            <a:ext cx="1645920" cy="475488"/>
+          </a:xfrm>
+          <a:prstGeom prst="rect">
+            <a:avLst>
+              <a:gd name="adj" fmla="val 9615"/>
+            </a:avLst>
+          </a:prstGeom>
+          <a:solidFill>
+            <a:srgbClr val="FFFFFF"/>
+          </a:solidFill>
+          <a:ln w="12700">
+            <a:solidFill>
+              <a:srgbClr val="0D9488"/>
             </a:solidFill>
             <a:prstDash val="solid"/>
           </a:ln>
@@ -26513,8 +26540,8 @@
         </p:nvSpPr>
         <p:spPr>
           <a:xfrm>
-            <a:off x="365760" y="3273552"/>
-            <a:ext cx="1371600" cy="658368"/>
+            <a:off x="2999232" y="3364992"/>
+            <a:ext cx="1645920" cy="475488"/>
           </a:xfrm>
           <a:prstGeom prst="rect">
             <a:avLst/>
@@ -26530,15 +26557,186 @@
               <a:buNone/>
             </a:pPr>
             <a:r>
-              <a:rPr lang="en-US" sz="1100" b="1" dirty="0">
-                <a:solidFill>
-                  <a:srgbClr val="475569"/>
+              <a:rPr lang="en-US" sz="1400" b="1" dirty="0">
+                <a:solidFill>
+                  <a:srgbClr val="0D9488"/>
                 </a:solidFill>
                 <a:latin typeface="Trebuchet MS" pitchFamily="34" charset="0"/>
                 <a:ea typeface="Trebuchet MS" pitchFamily="34" charset="-122"/>
                 <a:cs typeface="Trebuchet MS" pitchFamily="34" charset="-120"/>
               </a:rPr>
-              <a:t>Syllables</a:t>
+              <a:t>harm</a:t>
+            </a:r>
+            <a:endParaRPr lang="en-US" sz="1400" dirty="0"/>
+          </a:p>
+        </p:txBody>
+      </p:sp>
+      <p:sp>
+        <p:nvSpPr>
+          <p:cNvPr id="27" name="Text 25"/>
+          <p:cNvSpPr/>
+          <p:nvPr/>
+        </p:nvSpPr>
+        <p:spPr>
+          <a:xfrm>
+            <a:off x="4645152" y="3364992"/>
+            <a:ext cx="1097280" cy="475488"/>
+          </a:xfrm>
+          <a:prstGeom prst="rect">
+            <a:avLst/>
+          </a:prstGeom>
+          <a:noFill/>
+          <a:ln/>
+        </p:spPr>
+        <p:txBody>
+          <a:bodyPr wrap="square" lIns="0" tIns="0" rIns="0" bIns="0" rtlCol="0" anchor="ctr"/>
+          <a:lstStyle/>
+          <a:p>
+            <a:pPr algn="ctr" indent="0" marL="0">
+              <a:buNone/>
+            </a:pPr>
+            <a:r>
+              <a:rPr lang="en-US" sz="1600" b="1" dirty="0">
+                <a:solidFill>
+                  <a:srgbClr val="0D9488"/>
+                </a:solidFill>
+                <a:latin typeface="Trebuchet MS" pitchFamily="34" charset="0"/>
+                <a:ea typeface="Trebuchet MS" pitchFamily="34" charset="-122"/>
+                <a:cs typeface="Trebuchet MS" pitchFamily="34" charset="-120"/>
+              </a:rPr>
+              <a:t>·</a:t>
+            </a:r>
+            <a:endParaRPr lang="en-US" sz="1600" dirty="0"/>
+          </a:p>
+        </p:txBody>
+      </p:sp>
+      <p:sp>
+        <p:nvSpPr>
+          <p:cNvPr id="28" name="Shape 26"/>
+          <p:cNvSpPr/>
+          <p:nvPr/>
+        </p:nvSpPr>
+        <p:spPr>
+          <a:xfrm>
+            <a:off x="5742432" y="3364992"/>
+            <a:ext cx="1645920" cy="475488"/>
+          </a:xfrm>
+          <a:prstGeom prst="rect">
+            <a:avLst>
+              <a:gd name="adj" fmla="val 9615"/>
+            </a:avLst>
+          </a:prstGeom>
+          <a:solidFill>
+            <a:srgbClr val="FFFFFF"/>
+          </a:solidFill>
+          <a:ln w="12700">
+            <a:solidFill>
+              <a:srgbClr val="0D9488"/>
+            </a:solidFill>
+            <a:prstDash val="solid"/>
+          </a:ln>
+        </p:spPr>
+      </p:sp>
+      <p:sp>
+        <p:nvSpPr>
+          <p:cNvPr id="29" name="Text 27"/>
+          <p:cNvSpPr/>
+          <p:nvPr/>
+        </p:nvSpPr>
+        <p:spPr>
+          <a:xfrm>
+            <a:off x="5742432" y="3364992"/>
+            <a:ext cx="1645920" cy="475488"/>
+          </a:xfrm>
+          <a:prstGeom prst="rect">
+            <a:avLst/>
+          </a:prstGeom>
+          <a:noFill/>
+          <a:ln/>
+        </p:spPr>
+        <p:txBody>
+          <a:bodyPr wrap="square" lIns="0" tIns="0" rIns="0" bIns="0" rtlCol="0" anchor="ctr"/>
+          <a:lstStyle/>
+          <a:p>
+            <a:pPr algn="ctr" indent="0" marL="0">
+              <a:buNone/>
+            </a:pPr>
+            <a:r>
+              <a:rPr lang="en-US" sz="1400" b="1" dirty="0">
+                <a:solidFill>
+                  <a:srgbClr val="0D9488"/>
+                </a:solidFill>
+                <a:latin typeface="Trebuchet MS" pitchFamily="34" charset="0"/>
+                <a:ea typeface="Trebuchet MS" pitchFamily="34" charset="-122"/>
+                <a:cs typeface="Trebuchet MS" pitchFamily="34" charset="-120"/>
+              </a:rPr>
+              <a:t>less</a:t>
+            </a:r>
+            <a:endParaRPr lang="en-US" sz="1400" dirty="0"/>
+          </a:p>
+        </p:txBody>
+      </p:sp>
+      <p:sp>
+        <p:nvSpPr>
+          <p:cNvPr id="30" name="Shape 28"/>
+          <p:cNvSpPr/>
+          <p:nvPr/>
+        </p:nvSpPr>
+        <p:spPr>
+          <a:xfrm>
+            <a:off x="365760" y="4096512"/>
+            <a:ext cx="1371600" cy="804672"/>
+          </a:xfrm>
+          <a:prstGeom prst="rect">
+            <a:avLst>
+              <a:gd name="adj" fmla="val 6818"/>
+            </a:avLst>
+          </a:prstGeom>
+          <a:solidFill>
+            <a:srgbClr val="E2E8F0"/>
+          </a:solidFill>
+          <a:ln w="12700">
+            <a:solidFill>
+              <a:srgbClr val="E2E8F0"/>
+            </a:solidFill>
+            <a:prstDash val="solid"/>
+          </a:ln>
+        </p:spPr>
+      </p:sp>
+      <p:sp>
+        <p:nvSpPr>
+          <p:cNvPr id="31" name="Text 29"/>
+          <p:cNvSpPr/>
+          <p:nvPr/>
+        </p:nvSpPr>
+        <p:spPr>
+          <a:xfrm>
+            <a:off x="365760" y="4096512"/>
+            <a:ext cx="1371600" cy="804672"/>
+          </a:xfrm>
+          <a:prstGeom prst="rect">
+            <a:avLst/>
+          </a:prstGeom>
+          <a:noFill/>
+          <a:ln/>
+        </p:spPr>
+        <p:txBody>
+          <a:bodyPr wrap="square" lIns="0" tIns="0" rIns="0" bIns="0" rtlCol="0" anchor="ctr"/>
+          <a:lstStyle/>
+          <a:p>
+            <a:pPr algn="ctr" indent="0" marL="0">
+              <a:buNone/>
+            </a:pPr>
+            <a:r>
+              <a:rPr lang="en-US" sz="1100" b="1" dirty="0">
+                <a:solidFill>
+                  <a:srgbClr val="475569"/>
+                </a:solidFill>
+                <a:latin typeface="Trebuchet MS" pitchFamily="34" charset="0"/>
+                <a:ea typeface="Trebuchet MS" pitchFamily="34" charset="-122"/>
+                <a:cs typeface="Trebuchet MS" pitchFamily="34" charset="-120"/>
+              </a:rPr>
+              <a:t>Phonemes</a:t>
             </a:r>
             <a:endParaRPr lang="en-US" sz="1100" dirty="0"/>
           </a:p>
@@ -26546,13 +26744,13 @@
       </p:sp>
       <p:sp>
         <p:nvSpPr>
-          <p:cNvPr id="27" name="Shape 25"/>
-          <p:cNvSpPr/>
-          <p:nvPr/>
-        </p:nvSpPr>
-        <p:spPr>
-          <a:xfrm>
-            <a:off x="1874520" y="3273552"/>
+          <p:cNvPr id="32" name="Shape 30"/>
+          <p:cNvSpPr/>
+          <p:nvPr/>
+        </p:nvSpPr>
+        <p:spPr>
+          <a:xfrm>
+            <a:off x="1874520" y="4096512"/>
             <a:ext cx="6903720" cy="658368"/>
           </a:xfrm>
           <a:prstGeom prst="rect">
@@ -26561,30 +26759,30 @@
             </a:avLst>
           </a:prstGeom>
           <a:solidFill>
-            <a:srgbClr val="CCFBF1"/>
-          </a:solidFill>
-          <a:ln w="12700">
-            <a:solidFill>
-              <a:srgbClr val="0D9488"/>
-            </a:solidFill>
-            <a:prstDash val="solid"/>
-          </a:ln>
-        </p:spPr>
-      </p:sp>
-      <p:sp>
-        <p:nvSpPr>
-          <p:cNvPr id="28" name="Shape 26"/>
-          <p:cNvSpPr/>
-          <p:nvPr/>
-        </p:nvSpPr>
-        <p:spPr>
-          <a:xfrm>
-            <a:off x="2999232" y="3364992"/>
-            <a:ext cx="1645920" cy="475488"/>
+            <a:srgbClr val="FCE7F3"/>
+          </a:solidFill>
+          <a:ln w="12700">
+            <a:solidFill>
+              <a:srgbClr val="DB2777"/>
+            </a:solidFill>
+            <a:prstDash val="solid"/>
+          </a:ln>
+        </p:spPr>
+      </p:sp>
+      <p:sp>
+        <p:nvSpPr>
+          <p:cNvPr id="33" name="Shape 31"/>
+          <p:cNvSpPr/>
+          <p:nvPr/>
+        </p:nvSpPr>
+        <p:spPr>
+          <a:xfrm>
+            <a:off x="2254649" y="4169664"/>
+            <a:ext cx="685800" cy="475488"/>
           </a:xfrm>
           <a:prstGeom prst="rect">
             <a:avLst>
-              <a:gd name="adj" fmla="val 9615"/>
+              <a:gd name="adj" fmla="val 7692"/>
             </a:avLst>
           </a:prstGeom>
           <a:solidFill>
@@ -26592,22 +26790,22 @@
           </a:solidFill>
           <a:ln w="12700">
             <a:solidFill>
-              <a:srgbClr val="0D9488"/>
-            </a:solidFill>
-            <a:prstDash val="solid"/>
-          </a:ln>
-        </p:spPr>
-      </p:sp>
-      <p:sp>
-        <p:nvSpPr>
-          <p:cNvPr id="29" name="Text 27"/>
-          <p:cNvSpPr/>
-          <p:nvPr/>
-        </p:nvSpPr>
-        <p:spPr>
-          <a:xfrm>
-            <a:off x="2999232" y="3364992"/>
-            <a:ext cx="1645920" cy="475488"/>
+              <a:srgbClr val="DB2777"/>
+            </a:solidFill>
+            <a:prstDash val="solid"/>
+          </a:ln>
+        </p:spPr>
+      </p:sp>
+      <p:sp>
+        <p:nvSpPr>
+          <p:cNvPr id="34" name="Text 32"/>
+          <p:cNvSpPr/>
+          <p:nvPr/>
+        </p:nvSpPr>
+        <p:spPr>
+          <a:xfrm>
+            <a:off x="2254649" y="4169664"/>
+            <a:ext cx="685800" cy="475488"/>
           </a:xfrm>
           <a:prstGeom prst="rect">
             <a:avLst/>
@@ -26623,30 +26821,57 @@
               <a:buNone/>
             </a:pPr>
             <a:r>
-              <a:rPr lang="en-US" sz="1400" b="1" dirty="0">
-                <a:solidFill>
-                  <a:srgbClr val="0D9488"/>
+              <a:rPr lang="en-US" sz="900" b="1" dirty="0">
+                <a:solidFill>
+                  <a:srgbClr val="9D174D"/>
                 </a:solidFill>
                 <a:latin typeface="Trebuchet MS" pitchFamily="34" charset="0"/>
                 <a:ea typeface="Trebuchet MS" pitchFamily="34" charset="-122"/>
                 <a:cs typeface="Trebuchet MS" pitchFamily="34" charset="-120"/>
               </a:rPr>
-              <a:t>un</a:t>
-            </a:r>
-            <a:endParaRPr lang="en-US" sz="1400" dirty="0"/>
-          </a:p>
-        </p:txBody>
-      </p:sp>
-      <p:sp>
-        <p:nvSpPr>
-          <p:cNvPr id="30" name="Text 28"/>
-          <p:cNvSpPr/>
-          <p:nvPr/>
-        </p:nvSpPr>
-        <p:spPr>
-          <a:xfrm>
-            <a:off x="4645152" y="3364992"/>
-            <a:ext cx="1097280" cy="475488"/>
+              <a:t>h</a:t>
+            </a:r>
+            <a:endParaRPr lang="en-US" sz="900" dirty="0"/>
+          </a:p>
+        </p:txBody>
+      </p:sp>
+      <p:sp>
+        <p:nvSpPr>
+          <p:cNvPr id="35" name="Shape 33"/>
+          <p:cNvSpPr/>
+          <p:nvPr/>
+        </p:nvSpPr>
+        <p:spPr>
+          <a:xfrm>
+            <a:off x="3293146" y="4169664"/>
+            <a:ext cx="685800" cy="475488"/>
+          </a:xfrm>
+          <a:prstGeom prst="rect">
+            <a:avLst>
+              <a:gd name="adj" fmla="val 7692"/>
+            </a:avLst>
+          </a:prstGeom>
+          <a:solidFill>
+            <a:srgbClr val="FFFFFF"/>
+          </a:solidFill>
+          <a:ln w="12700">
+            <a:solidFill>
+              <a:srgbClr val="DB2777"/>
+            </a:solidFill>
+            <a:prstDash val="solid"/>
+          </a:ln>
+        </p:spPr>
+      </p:sp>
+      <p:sp>
+        <p:nvSpPr>
+          <p:cNvPr id="36" name="Text 34"/>
+          <p:cNvSpPr/>
+          <p:nvPr/>
+        </p:nvSpPr>
+        <p:spPr>
+          <a:xfrm>
+            <a:off x="3293146" y="4169664"/>
+            <a:ext cx="685800" cy="475488"/>
           </a:xfrm>
           <a:prstGeom prst="rect">
             <a:avLst/>
@@ -26662,34 +26887,34 @@
               <a:buNone/>
             </a:pPr>
             <a:r>
-              <a:rPr lang="en-US" sz="1600" b="1" dirty="0">
-                <a:solidFill>
-                  <a:srgbClr val="0D9488"/>
+              <a:rPr lang="en-US" sz="900" b="1" dirty="0">
+                <a:solidFill>
+                  <a:srgbClr val="9D174D"/>
                 </a:solidFill>
                 <a:latin typeface="Trebuchet MS" pitchFamily="34" charset="0"/>
                 <a:ea typeface="Trebuchet MS" pitchFamily="34" charset="-122"/>
                 <a:cs typeface="Trebuchet MS" pitchFamily="34" charset="-120"/>
               </a:rPr>
-              <a:t>·</a:t>
-            </a:r>
-            <a:endParaRPr lang="en-US" sz="1600" dirty="0"/>
-          </a:p>
-        </p:txBody>
-      </p:sp>
-      <p:sp>
-        <p:nvSpPr>
-          <p:cNvPr id="31" name="Shape 29"/>
-          <p:cNvSpPr/>
-          <p:nvPr/>
-        </p:nvSpPr>
-        <p:spPr>
-          <a:xfrm>
-            <a:off x="5742432" y="3364992"/>
-            <a:ext cx="1645920" cy="475488"/>
+              <a:t>ar</a:t>
+            </a:r>
+            <a:endParaRPr lang="en-US" sz="900" dirty="0"/>
+          </a:p>
+        </p:txBody>
+      </p:sp>
+      <p:sp>
+        <p:nvSpPr>
+          <p:cNvPr id="37" name="Shape 35"/>
+          <p:cNvSpPr/>
+          <p:nvPr/>
+        </p:nvSpPr>
+        <p:spPr>
+          <a:xfrm>
+            <a:off x="4331643" y="4169664"/>
+            <a:ext cx="685800" cy="475488"/>
           </a:xfrm>
           <a:prstGeom prst="rect">
             <a:avLst>
-              <a:gd name="adj" fmla="val 9615"/>
+              <a:gd name="adj" fmla="val 7692"/>
             </a:avLst>
           </a:prstGeom>
           <a:solidFill>
@@ -26697,22 +26922,22 @@
           </a:solidFill>
           <a:ln w="12700">
             <a:solidFill>
-              <a:srgbClr val="0D9488"/>
-            </a:solidFill>
-            <a:prstDash val="solid"/>
-          </a:ln>
-        </p:spPr>
-      </p:sp>
-      <p:sp>
-        <p:nvSpPr>
-          <p:cNvPr id="32" name="Text 30"/>
-          <p:cNvSpPr/>
-          <p:nvPr/>
-        </p:nvSpPr>
-        <p:spPr>
-          <a:xfrm>
-            <a:off x="5742432" y="3364992"/>
-            <a:ext cx="1645920" cy="475488"/>
+              <a:srgbClr val="DB2777"/>
+            </a:solidFill>
+            <a:prstDash val="solid"/>
+          </a:ln>
+        </p:spPr>
+      </p:sp>
+      <p:sp>
+        <p:nvSpPr>
+          <p:cNvPr id="38" name="Text 36"/>
+          <p:cNvSpPr/>
+          <p:nvPr/>
+        </p:nvSpPr>
+        <p:spPr>
+          <a:xfrm>
+            <a:off x="4331643" y="4169664"/>
+            <a:ext cx="685800" cy="475488"/>
           </a:xfrm>
           <a:prstGeom prst="rect">
             <a:avLst/>
@@ -26728,57 +26953,57 @@
               <a:buNone/>
             </a:pPr>
             <a:r>
-              <a:rPr lang="en-US" sz="1400" b="1" dirty="0">
-                <a:solidFill>
-                  <a:srgbClr val="0D9488"/>
+              <a:rPr lang="en-US" sz="900" b="1" dirty="0">
+                <a:solidFill>
+                  <a:srgbClr val="9D174D"/>
                 </a:solidFill>
                 <a:latin typeface="Trebuchet MS" pitchFamily="34" charset="0"/>
                 <a:ea typeface="Trebuchet MS" pitchFamily="34" charset="-122"/>
                 <a:cs typeface="Trebuchet MS" pitchFamily="34" charset="-120"/>
               </a:rPr>
-              <a:t>harmed</a:t>
-            </a:r>
-            <a:endParaRPr lang="en-US" sz="1400" dirty="0"/>
-          </a:p>
-        </p:txBody>
-      </p:sp>
-      <p:sp>
-        <p:nvSpPr>
-          <p:cNvPr id="33" name="Shape 31"/>
-          <p:cNvSpPr/>
-          <p:nvPr/>
-        </p:nvSpPr>
-        <p:spPr>
-          <a:xfrm>
-            <a:off x="365760" y="4096512"/>
-            <a:ext cx="1371600" cy="804672"/>
+              <a:t>m</a:t>
+            </a:r>
+            <a:endParaRPr lang="en-US" sz="900" dirty="0"/>
+          </a:p>
+        </p:txBody>
+      </p:sp>
+      <p:sp>
+        <p:nvSpPr>
+          <p:cNvPr id="39" name="Shape 37"/>
+          <p:cNvSpPr/>
+          <p:nvPr/>
+        </p:nvSpPr>
+        <p:spPr>
+          <a:xfrm>
+            <a:off x="5370141" y="4169664"/>
+            <a:ext cx="685800" cy="475488"/>
           </a:xfrm>
           <a:prstGeom prst="rect">
             <a:avLst>
-              <a:gd name="adj" fmla="val 6818"/>
+              <a:gd name="adj" fmla="val 7692"/>
             </a:avLst>
           </a:prstGeom>
           <a:solidFill>
-            <a:srgbClr val="E2E8F0"/>
-          </a:solidFill>
-          <a:ln w="12700">
-            <a:solidFill>
-              <a:srgbClr val="E2E8F0"/>
-            </a:solidFill>
-            <a:prstDash val="solid"/>
-          </a:ln>
-        </p:spPr>
-      </p:sp>
-      <p:sp>
-        <p:nvSpPr>
-          <p:cNvPr id="34" name="Text 32"/>
-          <p:cNvSpPr/>
-          <p:nvPr/>
-        </p:nvSpPr>
-        <p:spPr>
-          <a:xfrm>
-            <a:off x="365760" y="4096512"/>
-            <a:ext cx="1371600" cy="804672"/>
+            <a:srgbClr val="FFFFFF"/>
+          </a:solidFill>
+          <a:ln w="12700">
+            <a:solidFill>
+              <a:srgbClr val="DB2777"/>
+            </a:solidFill>
+            <a:prstDash val="solid"/>
+          </a:ln>
+        </p:spPr>
+      </p:sp>
+      <p:sp>
+        <p:nvSpPr>
+          <p:cNvPr id="40" name="Text 38"/>
+          <p:cNvSpPr/>
+          <p:nvPr/>
+        </p:nvSpPr>
+        <p:spPr>
+          <a:xfrm>
+            <a:off x="5370141" y="4169664"/>
+            <a:ext cx="685800" cy="475488"/>
           </a:xfrm>
           <a:prstGeom prst="rect">
             <a:avLst/>
@@ -26794,56 +27019,29 @@
               <a:buNone/>
             </a:pPr>
             <a:r>
-              <a:rPr lang="en-US" sz="1100" b="1" dirty="0">
-                <a:solidFill>
-                  <a:srgbClr val="475569"/>
+              <a:rPr lang="en-US" sz="900" b="1" dirty="0">
+                <a:solidFill>
+                  <a:srgbClr val="9D174D"/>
                 </a:solidFill>
                 <a:latin typeface="Trebuchet MS" pitchFamily="34" charset="0"/>
                 <a:ea typeface="Trebuchet MS" pitchFamily="34" charset="-122"/>
                 <a:cs typeface="Trebuchet MS" pitchFamily="34" charset="-120"/>
               </a:rPr>
-              <a:t>Phonemes</a:t>
-            </a:r>
-            <a:endParaRPr lang="en-US" sz="1100" dirty="0"/>
-          </a:p>
-        </p:txBody>
-      </p:sp>
-      <p:sp>
-        <p:nvSpPr>
-          <p:cNvPr id="35" name="Shape 33"/>
-          <p:cNvSpPr/>
-          <p:nvPr/>
-        </p:nvSpPr>
-        <p:spPr>
-          <a:xfrm>
-            <a:off x="1874520" y="4096512"/>
-            <a:ext cx="6903720" cy="658368"/>
-          </a:xfrm>
-          <a:prstGeom prst="rect">
-            <a:avLst>
-              <a:gd name="adj" fmla="val 8333"/>
-            </a:avLst>
-          </a:prstGeom>
-          <a:solidFill>
-            <a:srgbClr val="FCE7F3"/>
-          </a:solidFill>
-          <a:ln w="12700">
-            <a:solidFill>
-              <a:srgbClr val="DB2777"/>
-            </a:solidFill>
-            <a:prstDash val="solid"/>
-          </a:ln>
-        </p:spPr>
-      </p:sp>
-      <p:sp>
-        <p:nvSpPr>
-          <p:cNvPr id="36" name="Shape 34"/>
-          <p:cNvSpPr/>
-          <p:nvPr/>
-        </p:nvSpPr>
-        <p:spPr>
-          <a:xfrm>
-            <a:off x="2254649" y="4169664"/>
+              <a:t>l</a:t>
+            </a:r>
+            <a:endParaRPr lang="en-US" sz="900" dirty="0"/>
+          </a:p>
+        </p:txBody>
+      </p:sp>
+      <p:sp>
+        <p:nvSpPr>
+          <p:cNvPr id="41" name="Shape 39"/>
+          <p:cNvSpPr/>
+          <p:nvPr/>
+        </p:nvSpPr>
+        <p:spPr>
+          <a:xfrm>
+            <a:off x="6408638" y="4169664"/>
             <a:ext cx="685800" cy="475488"/>
           </a:xfrm>
           <a:prstGeom prst="rect">
@@ -26864,13 +27062,13 @@
       </p:sp>
       <p:sp>
         <p:nvSpPr>
-          <p:cNvPr id="37" name="Text 35"/>
-          <p:cNvSpPr/>
-          <p:nvPr/>
-        </p:nvSpPr>
-        <p:spPr>
-          <a:xfrm>
-            <a:off x="2254649" y="4169664"/>
+          <p:cNvPr id="42" name="Text 40"/>
+          <p:cNvSpPr/>
+          <p:nvPr/>
+        </p:nvSpPr>
+        <p:spPr>
+          <a:xfrm>
+            <a:off x="6408638" y="4169664"/>
             <a:ext cx="685800" cy="475488"/>
           </a:xfrm>
           <a:prstGeom prst="rect">
@@ -26895,7 +27093,7 @@
                 <a:ea typeface="Trebuchet MS" pitchFamily="34" charset="-122"/>
                 <a:cs typeface="Trebuchet MS" pitchFamily="34" charset="-120"/>
               </a:rPr>
-              <a:t>u</a:t>
+              <a:t>e</a:t>
             </a:r>
             <a:endParaRPr lang="en-US" sz="900" dirty="0"/>
           </a:p>
@@ -26903,13 +27101,13 @@
       </p:sp>
       <p:sp>
         <p:nvSpPr>
-          <p:cNvPr id="38" name="Shape 36"/>
-          <p:cNvSpPr/>
-          <p:nvPr/>
-        </p:nvSpPr>
-        <p:spPr>
-          <a:xfrm>
-            <a:off x="3293146" y="4169664"/>
+          <p:cNvPr id="43" name="Shape 41"/>
+          <p:cNvSpPr/>
+          <p:nvPr/>
+        </p:nvSpPr>
+        <p:spPr>
+          <a:xfrm>
+            <a:off x="7447135" y="4169664"/>
             <a:ext cx="685800" cy="475488"/>
           </a:xfrm>
           <a:prstGeom prst="rect">
@@ -26930,13 +27128,13 @@
       </p:sp>
       <p:sp>
         <p:nvSpPr>
-          <p:cNvPr id="39" name="Text 37"/>
-          <p:cNvSpPr/>
-          <p:nvPr/>
-        </p:nvSpPr>
-        <p:spPr>
-          <a:xfrm>
-            <a:off x="3293146" y="4169664"/>
+          <p:cNvPr id="44" name="Text 42"/>
+          <p:cNvSpPr/>
+          <p:nvPr/>
+        </p:nvSpPr>
+        <p:spPr>
+          <a:xfrm>
+            <a:off x="7447135" y="4169664"/>
             <a:ext cx="685800" cy="475488"/>
           </a:xfrm>
           <a:prstGeom prst="rect">
@@ -26961,271 +27159,7 @@
                 <a:ea typeface="Trebuchet MS" pitchFamily="34" charset="-122"/>
                 <a:cs typeface="Trebuchet MS" pitchFamily="34" charset="-120"/>
               </a:rPr>
-              <a:t>n</a:t>
-            </a:r>
-            <a:endParaRPr lang="en-US" sz="900" dirty="0"/>
-          </a:p>
-        </p:txBody>
-      </p:sp>
-      <p:sp>
-        <p:nvSpPr>
-          <p:cNvPr id="40" name="Shape 38"/>
-          <p:cNvSpPr/>
-          <p:nvPr/>
-        </p:nvSpPr>
-        <p:spPr>
-          <a:xfrm>
-            <a:off x="4331643" y="4169664"/>
-            <a:ext cx="685800" cy="475488"/>
-          </a:xfrm>
-          <a:prstGeom prst="rect">
-            <a:avLst>
-              <a:gd name="adj" fmla="val 7692"/>
-            </a:avLst>
-          </a:prstGeom>
-          <a:solidFill>
-            <a:srgbClr val="FFFFFF"/>
-          </a:solidFill>
-          <a:ln w="12700">
-            <a:solidFill>
-              <a:srgbClr val="DB2777"/>
-            </a:solidFill>
-            <a:prstDash val="solid"/>
-          </a:ln>
-        </p:spPr>
-      </p:sp>
-      <p:sp>
-        <p:nvSpPr>
-          <p:cNvPr id="41" name="Text 39"/>
-          <p:cNvSpPr/>
-          <p:nvPr/>
-        </p:nvSpPr>
-        <p:spPr>
-          <a:xfrm>
-            <a:off x="4331643" y="4169664"/>
-            <a:ext cx="685800" cy="475488"/>
-          </a:xfrm>
-          <a:prstGeom prst="rect">
-            <a:avLst/>
-          </a:prstGeom>
-          <a:noFill/>
-          <a:ln/>
-        </p:spPr>
-        <p:txBody>
-          <a:bodyPr wrap="square" lIns="0" tIns="0" rIns="0" bIns="0" rtlCol="0" anchor="ctr"/>
-          <a:lstStyle/>
-          <a:p>
-            <a:pPr algn="ctr" indent="0" marL="0">
-              <a:buNone/>
-            </a:pPr>
-            <a:r>
-              <a:rPr lang="en-US" sz="900" b="1" dirty="0">
-                <a:solidFill>
-                  <a:srgbClr val="9D174D"/>
-                </a:solidFill>
-                <a:latin typeface="Trebuchet MS" pitchFamily="34" charset="0"/>
-                <a:ea typeface="Trebuchet MS" pitchFamily="34" charset="-122"/>
-                <a:cs typeface="Trebuchet MS" pitchFamily="34" charset="-120"/>
-              </a:rPr>
-              <a:t>h</a:t>
-            </a:r>
-            <a:endParaRPr lang="en-US" sz="900" dirty="0"/>
-          </a:p>
-        </p:txBody>
-      </p:sp>
-      <p:sp>
-        <p:nvSpPr>
-          <p:cNvPr id="42" name="Shape 40"/>
-          <p:cNvSpPr/>
-          <p:nvPr/>
-        </p:nvSpPr>
-        <p:spPr>
-          <a:xfrm>
-            <a:off x="5370141" y="4169664"/>
-            <a:ext cx="685800" cy="475488"/>
-          </a:xfrm>
-          <a:prstGeom prst="rect">
-            <a:avLst>
-              <a:gd name="adj" fmla="val 7692"/>
-            </a:avLst>
-          </a:prstGeom>
-          <a:solidFill>
-            <a:srgbClr val="FFFFFF"/>
-          </a:solidFill>
-          <a:ln w="12700">
-            <a:solidFill>
-              <a:srgbClr val="DB2777"/>
-            </a:solidFill>
-            <a:prstDash val="solid"/>
-          </a:ln>
-        </p:spPr>
-      </p:sp>
-      <p:sp>
-        <p:nvSpPr>
-          <p:cNvPr id="43" name="Text 41"/>
-          <p:cNvSpPr/>
-          <p:nvPr/>
-        </p:nvSpPr>
-        <p:spPr>
-          <a:xfrm>
-            <a:off x="5370141" y="4169664"/>
-            <a:ext cx="685800" cy="475488"/>
-          </a:xfrm>
-          <a:prstGeom prst="rect">
-            <a:avLst/>
-          </a:prstGeom>
-          <a:noFill/>
-          <a:ln/>
-        </p:spPr>
-        <p:txBody>
-          <a:bodyPr wrap="square" lIns="0" tIns="0" rIns="0" bIns="0" rtlCol="0" anchor="ctr"/>
-          <a:lstStyle/>
-          <a:p>
-            <a:pPr algn="ctr" indent="0" marL="0">
-              <a:buNone/>
-            </a:pPr>
-            <a:r>
-              <a:rPr lang="en-US" sz="900" b="1" dirty="0">
-                <a:solidFill>
-                  <a:srgbClr val="9D174D"/>
-                </a:solidFill>
-                <a:latin typeface="Trebuchet MS" pitchFamily="34" charset="0"/>
-                <a:ea typeface="Trebuchet MS" pitchFamily="34" charset="-122"/>
-                <a:cs typeface="Trebuchet MS" pitchFamily="34" charset="-120"/>
-              </a:rPr>
-              <a:t>ar</a:t>
-            </a:r>
-            <a:endParaRPr lang="en-US" sz="900" dirty="0"/>
-          </a:p>
-        </p:txBody>
-      </p:sp>
-      <p:sp>
-        <p:nvSpPr>
-          <p:cNvPr id="44" name="Shape 42"/>
-          <p:cNvSpPr/>
-          <p:nvPr/>
-        </p:nvSpPr>
-        <p:spPr>
-          <a:xfrm>
-            <a:off x="6408638" y="4169664"/>
-            <a:ext cx="685800" cy="475488"/>
-          </a:xfrm>
-          <a:prstGeom prst="rect">
-            <a:avLst>
-              <a:gd name="adj" fmla="val 7692"/>
-            </a:avLst>
-          </a:prstGeom>
-          <a:solidFill>
-            <a:srgbClr val="FFFFFF"/>
-          </a:solidFill>
-          <a:ln w="12700">
-            <a:solidFill>
-              <a:srgbClr val="DB2777"/>
-            </a:solidFill>
-            <a:prstDash val="solid"/>
-          </a:ln>
-        </p:spPr>
-      </p:sp>
-      <p:sp>
-        <p:nvSpPr>
-          <p:cNvPr id="45" name="Text 43"/>
-          <p:cNvSpPr/>
-          <p:nvPr/>
-        </p:nvSpPr>
-        <p:spPr>
-          <a:xfrm>
-            <a:off x="6408638" y="4169664"/>
-            <a:ext cx="685800" cy="475488"/>
-          </a:xfrm>
-          <a:prstGeom prst="rect">
-            <a:avLst/>
-          </a:prstGeom>
-          <a:noFill/>
-          <a:ln/>
-        </p:spPr>
-        <p:txBody>
-          <a:bodyPr wrap="square" lIns="0" tIns="0" rIns="0" bIns="0" rtlCol="0" anchor="ctr"/>
-          <a:lstStyle/>
-          <a:p>
-            <a:pPr algn="ctr" indent="0" marL="0">
-              <a:buNone/>
-            </a:pPr>
-            <a:r>
-              <a:rPr lang="en-US" sz="900" b="1" dirty="0">
-                <a:solidFill>
-                  <a:srgbClr val="9D174D"/>
-                </a:solidFill>
-                <a:latin typeface="Trebuchet MS" pitchFamily="34" charset="0"/>
-                <a:ea typeface="Trebuchet MS" pitchFamily="34" charset="-122"/>
-                <a:cs typeface="Trebuchet MS" pitchFamily="34" charset="-120"/>
-              </a:rPr>
-              <a:t>m</a:t>
-            </a:r>
-            <a:endParaRPr lang="en-US" sz="900" dirty="0"/>
-          </a:p>
-        </p:txBody>
-      </p:sp>
-      <p:sp>
-        <p:nvSpPr>
-          <p:cNvPr id="46" name="Shape 44"/>
-          <p:cNvSpPr/>
-          <p:nvPr/>
-        </p:nvSpPr>
-        <p:spPr>
-          <a:xfrm>
-            <a:off x="7447135" y="4169664"/>
-            <a:ext cx="685800" cy="475488"/>
-          </a:xfrm>
-          <a:prstGeom prst="rect">
-            <a:avLst>
-              <a:gd name="adj" fmla="val 7692"/>
-            </a:avLst>
-          </a:prstGeom>
-          <a:solidFill>
-            <a:srgbClr val="FFFFFF"/>
-          </a:solidFill>
-          <a:ln w="12700">
-            <a:solidFill>
-              <a:srgbClr val="DB2777"/>
-            </a:solidFill>
-            <a:prstDash val="solid"/>
-          </a:ln>
-        </p:spPr>
-      </p:sp>
-      <p:sp>
-        <p:nvSpPr>
-          <p:cNvPr id="47" name="Text 45"/>
-          <p:cNvSpPr/>
-          <p:nvPr/>
-        </p:nvSpPr>
-        <p:spPr>
-          <a:xfrm>
-            <a:off x="7447135" y="4169664"/>
-            <a:ext cx="685800" cy="475488"/>
-          </a:xfrm>
-          <a:prstGeom prst="rect">
-            <a:avLst/>
-          </a:prstGeom>
-          <a:noFill/>
-          <a:ln/>
-        </p:spPr>
-        <p:txBody>
-          <a:bodyPr wrap="square" lIns="0" tIns="0" rIns="0" bIns="0" rtlCol="0" anchor="ctr"/>
-          <a:lstStyle/>
-          <a:p>
-            <a:pPr algn="ctr" indent="0" marL="0">
-              <a:buNone/>
-            </a:pPr>
-            <a:r>
-              <a:rPr lang="en-US" sz="900" b="1" dirty="0">
-                <a:solidFill>
-                  <a:srgbClr val="9D174D"/>
-                </a:solidFill>
-                <a:latin typeface="Trebuchet MS" pitchFamily="34" charset="0"/>
-                <a:ea typeface="Trebuchet MS" pitchFamily="34" charset="-122"/>
-                <a:cs typeface="Trebuchet MS" pitchFamily="34" charset="-120"/>
-              </a:rPr>
-              <a:t>d</a:t>
+              <a:t>ss</a:t>
             </a:r>
             <a:endParaRPr lang="en-US" sz="900" dirty="0"/>
           </a:p>
@@ -27517,7 +27451,7 @@
                 <a:ea typeface="Calibri" pitchFamily="34" charset="-122"/>
                 <a:cs typeface="Calibri" pitchFamily="34" charset="-120"/>
               </a:rPr>
-              <a:t>Word Labs  •  wordlabs.app  •  Root: 'harm' = damage, injury, or hurt</a:t>
+              <a:t>Word Labs  •  wordlabs.app  •  Root: 'harm' = injury, damage, hurt</a:t>
             </a:r>
             <a:endParaRPr lang="en-US" sz="800" dirty="0"/>
           </a:p>
@@ -27656,7 +27590,7 @@
                 <a:ea typeface="Trebuchet MS" pitchFamily="34" charset="-122"/>
                 <a:cs typeface="Trebuchet MS" pitchFamily="34" charset="-120"/>
               </a:rPr>
-              <a:t>harmlessly</a:t>
+              <a:t>harmfulness</a:t>
             </a:r>
             <a:endParaRPr lang="en-US" sz="2800" dirty="0"/>
           </a:p>
@@ -28344,7 +28278,7 @@
                 <a:ea typeface="Calibri" pitchFamily="34" charset="-122"/>
                 <a:cs typeface="Calibri" pitchFamily="34" charset="-120"/>
               </a:rPr>
-              <a:t>Word Labs  •  wordlabs.app  •  Root: 'harm' = damage, injury, or hurt</a:t>
+              <a:t>Word Labs  •  wordlabs.app  •  Root: 'harm' = injury, damage, hurt</a:t>
             </a:r>
             <a:endParaRPr lang="en-US" sz="800" dirty="0"/>
           </a:p>
@@ -28483,7 +28417,7 @@
                 <a:ea typeface="Trebuchet MS" pitchFamily="34" charset="-122"/>
                 <a:cs typeface="Trebuchet MS" pitchFamily="34" charset="-120"/>
               </a:rPr>
-              <a:t>harmlessly</a:t>
+              <a:t>harmfulness</a:t>
             </a:r>
             <a:endParaRPr lang="en-US" sz="2800" dirty="0"/>
           </a:p>
@@ -28661,7 +28595,7 @@
                 <a:ea typeface="Calibri" pitchFamily="34" charset="-122"/>
                 <a:cs typeface="Calibri" pitchFamily="34" charset="-120"/>
               </a:rPr>
-              <a:t>damage or injury</a:t>
+              <a:t>injury or damage</a:t>
             </a:r>
             <a:endParaRPr lang="en-US" sz="850" dirty="0"/>
           </a:p>
@@ -28684,11 +28618,11 @@
             </a:avLst>
           </a:prstGeom>
           <a:solidFill>
-            <a:srgbClr val="DDD6FE"/>
+            <a:srgbClr val="FCE7F3"/>
           </a:solidFill>
           <a:ln w="19050">
             <a:solidFill>
-              <a:srgbClr val="7C3AED"/>
+              <a:srgbClr val="DB2777"/>
             </a:solidFill>
             <a:prstDash val="solid"/>
           </a:ln>
@@ -28728,13 +28662,13 @@
             <a:r>
               <a:rPr lang="en-US" sz="1300" b="1" dirty="0">
                 <a:solidFill>
-                  <a:srgbClr val="4C1D95"/>
+                  <a:srgbClr val="9D174D"/>
                 </a:solidFill>
                 <a:latin typeface="Trebuchet MS" pitchFamily="34" charset="0"/>
                 <a:ea typeface="Trebuchet MS" pitchFamily="34" charset="-122"/>
                 <a:cs typeface="Trebuchet MS" pitchFamily="34" charset="-120"/>
               </a:rPr>
-              <a:t>less</a:t>
+              <a:t>ful</a:t>
             </a:r>
             <a:endParaRPr lang="en-US" sz="1300" dirty="0"/>
           </a:p>
@@ -28773,7 +28707,7 @@
                 <a:ea typeface="Calibri" pitchFamily="34" charset="-122"/>
                 <a:cs typeface="Calibri" pitchFamily="34" charset="-120"/>
               </a:rPr>
-              <a:t>without</a:t>
+              <a:t>full of or having</a:t>
             </a:r>
             <a:endParaRPr lang="en-US" sz="850" dirty="0"/>
           </a:p>
@@ -28846,7 +28780,7 @@
                 <a:ea typeface="Trebuchet MS" pitchFamily="34" charset="-122"/>
                 <a:cs typeface="Trebuchet MS" pitchFamily="34" charset="-120"/>
               </a:rPr>
-              <a:t>ly</a:t>
+              <a:t>ness</a:t>
             </a:r>
             <a:endParaRPr lang="en-US" sz="1300" dirty="0"/>
           </a:p>
@@ -28885,7 +28819,7 @@
                 <a:ea typeface="Calibri" pitchFamily="34" charset="-122"/>
                 <a:cs typeface="Calibri" pitchFamily="34" charset="-120"/>
               </a:rPr>
-              <a:t>in a way that is</a:t>
+              <a:t>state or quality of being</a:t>
             </a:r>
             <a:endParaRPr lang="en-US" sz="850" dirty="0"/>
           </a:p>
@@ -29441,7 +29375,7 @@
                 <a:ea typeface="Calibri" pitchFamily="34" charset="-122"/>
                 <a:cs typeface="Calibri" pitchFamily="34" charset="-120"/>
               </a:rPr>
-              <a:t>Word Labs  •  wordlabs.app  •  Root: 'harm' = damage, injury, or hurt</a:t>
+              <a:t>Word Labs  •  wordlabs.app  •  Root: 'harm' = injury, damage, hurt</a:t>
             </a:r>
             <a:endParaRPr lang="en-US" sz="800" dirty="0"/>
           </a:p>
@@ -29580,7 +29514,7 @@
                 <a:ea typeface="Trebuchet MS" pitchFamily="34" charset="-122"/>
                 <a:cs typeface="Trebuchet MS" pitchFamily="34" charset="-120"/>
               </a:rPr>
-              <a:t>harmlessly</a:t>
+              <a:t>harmfulness</a:t>
             </a:r>
             <a:endParaRPr lang="en-US" sz="2800" dirty="0"/>
           </a:p>
@@ -29758,7 +29692,7 @@
                 <a:ea typeface="Calibri" pitchFamily="34" charset="-122"/>
                 <a:cs typeface="Calibri" pitchFamily="34" charset="-120"/>
               </a:rPr>
-              <a:t>damage or injury</a:t>
+              <a:t>injury or damage</a:t>
             </a:r>
             <a:endParaRPr lang="en-US" sz="850" dirty="0"/>
           </a:p>
@@ -29781,11 +29715,11 @@
             </a:avLst>
           </a:prstGeom>
           <a:solidFill>
-            <a:srgbClr val="DDD6FE"/>
+            <a:srgbClr val="FCE7F3"/>
           </a:solidFill>
           <a:ln w="19050">
             <a:solidFill>
-              <a:srgbClr val="7C3AED"/>
+              <a:srgbClr val="DB2777"/>
             </a:solidFill>
             <a:prstDash val="solid"/>
           </a:ln>
@@ -29825,13 +29759,13 @@
             <a:r>
               <a:rPr lang="en-US" sz="1300" b="1" dirty="0">
                 <a:solidFill>
-                  <a:srgbClr val="4C1D95"/>
+                  <a:srgbClr val="9D174D"/>
                 </a:solidFill>
                 <a:latin typeface="Trebuchet MS" pitchFamily="34" charset="0"/>
                 <a:ea typeface="Trebuchet MS" pitchFamily="34" charset="-122"/>
                 <a:cs typeface="Trebuchet MS" pitchFamily="34" charset="-120"/>
               </a:rPr>
-              <a:t>less</a:t>
+              <a:t>ful</a:t>
             </a:r>
             <a:endParaRPr lang="en-US" sz="1300" dirty="0"/>
           </a:p>
@@ -29870,7 +29804,7 @@
                 <a:ea typeface="Calibri" pitchFamily="34" charset="-122"/>
                 <a:cs typeface="Calibri" pitchFamily="34" charset="-120"/>
               </a:rPr>
-              <a:t>without</a:t>
+              <a:t>full of or having</a:t>
             </a:r>
             <a:endParaRPr lang="en-US" sz="850" dirty="0"/>
           </a:p>
@@ -29943,7 +29877,7 @@
                 <a:ea typeface="Trebuchet MS" pitchFamily="34" charset="-122"/>
                 <a:cs typeface="Trebuchet MS" pitchFamily="34" charset="-120"/>
               </a:rPr>
-              <a:t>ly</a:t>
+              <a:t>ness</a:t>
             </a:r>
             <a:endParaRPr lang="en-US" sz="1300" dirty="0"/>
           </a:p>
@@ -29982,7 +29916,7 @@
                 <a:ea typeface="Calibri" pitchFamily="34" charset="-122"/>
                 <a:cs typeface="Calibri" pitchFamily="34" charset="-120"/>
               </a:rPr>
-              <a:t>in a way that is</a:t>
+              <a:t>state or quality of being</a:t>
             </a:r>
             <a:endParaRPr lang="en-US" sz="850" dirty="0"/>
           </a:p>
@@ -30246,7 +30180,7 @@
                 <a:ea typeface="Trebuchet MS" pitchFamily="34" charset="-122"/>
                 <a:cs typeface="Trebuchet MS" pitchFamily="34" charset="-120"/>
               </a:rPr>
-              <a:t>less</a:t>
+              <a:t>ful</a:t>
             </a:r>
             <a:endParaRPr lang="en-US" sz="1400" dirty="0"/>
           </a:p>
@@ -30351,7 +30285,7 @@
                 <a:ea typeface="Trebuchet MS" pitchFamily="34" charset="-122"/>
                 <a:cs typeface="Trebuchet MS" pitchFamily="34" charset="-120"/>
               </a:rPr>
-              <a:t>ly</a:t>
+              <a:t>ness</a:t>
             </a:r>
             <a:endParaRPr lang="en-US" sz="1400" dirty="0"/>
           </a:p>
@@ -30775,7 +30709,7 @@
                 <a:ea typeface="Calibri" pitchFamily="34" charset="-122"/>
                 <a:cs typeface="Calibri" pitchFamily="34" charset="-120"/>
               </a:rPr>
-              <a:t>Word Labs  •  wordlabs.app  •  Root: 'harm' = damage, injury, or hurt</a:t>
+              <a:t>Word Labs  •  wordlabs.app  •  Root: 'harm' = injury, damage, hurt</a:t>
             </a:r>
             <a:endParaRPr lang="en-US" sz="800" dirty="0"/>
           </a:p>
@@ -30914,7 +30848,7 @@
                 <a:ea typeface="Trebuchet MS" pitchFamily="34" charset="-122"/>
                 <a:cs typeface="Trebuchet MS" pitchFamily="34" charset="-120"/>
               </a:rPr>
-              <a:t>harmlessly</a:t>
+              <a:t>harmfulness</a:t>
             </a:r>
             <a:endParaRPr lang="en-US" sz="2800" dirty="0"/>
           </a:p>
@@ -31092,7 +31026,7 @@
                 <a:ea typeface="Calibri" pitchFamily="34" charset="-122"/>
                 <a:cs typeface="Calibri" pitchFamily="34" charset="-120"/>
               </a:rPr>
-              <a:t>damage or injury</a:t>
+              <a:t>injury or damage</a:t>
             </a:r>
             <a:endParaRPr lang="en-US" sz="850" dirty="0"/>
           </a:p>
@@ -31115,11 +31049,11 @@
             </a:avLst>
           </a:prstGeom>
           <a:solidFill>
-            <a:srgbClr val="DDD6FE"/>
+            <a:srgbClr val="FCE7F3"/>
           </a:solidFill>
           <a:ln w="19050">
             <a:solidFill>
-              <a:srgbClr val="7C3AED"/>
+              <a:srgbClr val="DB2777"/>
             </a:solidFill>
             <a:prstDash val="solid"/>
           </a:ln>
@@ -31159,13 +31093,13 @@
             <a:r>
               <a:rPr lang="en-US" sz="1300" b="1" dirty="0">
                 <a:solidFill>
-                  <a:srgbClr val="4C1D95"/>
+                  <a:srgbClr val="9D174D"/>
                 </a:solidFill>
                 <a:latin typeface="Trebuchet MS" pitchFamily="34" charset="0"/>
                 <a:ea typeface="Trebuchet MS" pitchFamily="34" charset="-122"/>
                 <a:cs typeface="Trebuchet MS" pitchFamily="34" charset="-120"/>
               </a:rPr>
-              <a:t>less</a:t>
+              <a:t>ful</a:t>
             </a:r>
             <a:endParaRPr lang="en-US" sz="1300" dirty="0"/>
           </a:p>
@@ -31204,7 +31138,7 @@
                 <a:ea typeface="Calibri" pitchFamily="34" charset="-122"/>
                 <a:cs typeface="Calibri" pitchFamily="34" charset="-120"/>
               </a:rPr>
-              <a:t>without</a:t>
+              <a:t>full of or having</a:t>
             </a:r>
             <a:endParaRPr lang="en-US" sz="850" dirty="0"/>
           </a:p>
@@ -31277,7 +31211,7 @@
                 <a:ea typeface="Trebuchet MS" pitchFamily="34" charset="-122"/>
                 <a:cs typeface="Trebuchet MS" pitchFamily="34" charset="-120"/>
               </a:rPr>
-              <a:t>ly</a:t>
+              <a:t>ness</a:t>
             </a:r>
             <a:endParaRPr lang="en-US" sz="1300" dirty="0"/>
           </a:p>
@@ -31316,7 +31250,7 @@
                 <a:ea typeface="Calibri" pitchFamily="34" charset="-122"/>
                 <a:cs typeface="Calibri" pitchFamily="34" charset="-120"/>
               </a:rPr>
-              <a:t>in a way that is</a:t>
+              <a:t>state or quality of being</a:t>
             </a:r>
             <a:endParaRPr lang="en-US" sz="850" dirty="0"/>
           </a:p>
@@ -31580,7 +31514,7 @@
                 <a:ea typeface="Trebuchet MS" pitchFamily="34" charset="-122"/>
                 <a:cs typeface="Trebuchet MS" pitchFamily="34" charset="-120"/>
               </a:rPr>
-              <a:t>less</a:t>
+              <a:t>ful</a:t>
             </a:r>
             <a:endParaRPr lang="en-US" sz="1400" dirty="0"/>
           </a:p>
@@ -31685,7 +31619,7 @@
                 <a:ea typeface="Trebuchet MS" pitchFamily="34" charset="-122"/>
                 <a:cs typeface="Trebuchet MS" pitchFamily="34" charset="-120"/>
               </a:rPr>
-              <a:t>ly</a:t>
+              <a:t>ness</a:t>
             </a:r>
             <a:endParaRPr lang="en-US" sz="1400" dirty="0"/>
           </a:p>
@@ -31792,8 +31726,8 @@
         </p:nvSpPr>
         <p:spPr>
           <a:xfrm>
-            <a:off x="2023872" y="4169664"/>
-            <a:ext cx="685800" cy="475488"/>
+            <a:off x="1951330" y="4169664"/>
+            <a:ext cx="676656" cy="475488"/>
           </a:xfrm>
           <a:prstGeom prst="rect">
             <a:avLst>
@@ -31819,8 +31753,8 @@
         </p:nvSpPr>
         <p:spPr>
           <a:xfrm>
-            <a:off x="2023872" y="4169664"/>
-            <a:ext cx="685800" cy="475488"/>
+            <a:off x="1951330" y="4169664"/>
+            <a:ext cx="676656" cy="475488"/>
           </a:xfrm>
           <a:prstGeom prst="rect">
             <a:avLst/>
@@ -31858,8 +31792,8 @@
         </p:nvSpPr>
         <p:spPr>
           <a:xfrm>
-            <a:off x="2831592" y="4169664"/>
-            <a:ext cx="685800" cy="475488"/>
+            <a:off x="2677363" y="4169664"/>
+            <a:ext cx="676656" cy="475488"/>
           </a:xfrm>
           <a:prstGeom prst="rect">
             <a:avLst>
@@ -31885,8 +31819,8 @@
         </p:nvSpPr>
         <p:spPr>
           <a:xfrm>
-            <a:off x="2831592" y="4169664"/>
-            <a:ext cx="685800" cy="475488"/>
+            <a:off x="2677363" y="4169664"/>
+            <a:ext cx="676656" cy="475488"/>
           </a:xfrm>
           <a:prstGeom prst="rect">
             <a:avLst/>
@@ -31924,8 +31858,8 @@
         </p:nvSpPr>
         <p:spPr>
           <a:xfrm>
-            <a:off x="3639312" y="4169664"/>
-            <a:ext cx="685800" cy="475488"/>
+            <a:off x="3403397" y="4169664"/>
+            <a:ext cx="676656" cy="475488"/>
           </a:xfrm>
           <a:prstGeom prst="rect">
             <a:avLst>
@@ -31951,8 +31885,8 @@
         </p:nvSpPr>
         <p:spPr>
           <a:xfrm>
-            <a:off x="3639312" y="4169664"/>
-            <a:ext cx="685800" cy="475488"/>
+            <a:off x="3403397" y="4169664"/>
+            <a:ext cx="676656" cy="475488"/>
           </a:xfrm>
           <a:prstGeom prst="rect">
             <a:avLst/>
@@ -31990,8 +31924,8 @@
         </p:nvSpPr>
         <p:spPr>
           <a:xfrm>
-            <a:off x="4447032" y="4169664"/>
-            <a:ext cx="685800" cy="475488"/>
+            <a:off x="4129430" y="4169664"/>
+            <a:ext cx="676656" cy="475488"/>
           </a:xfrm>
           <a:prstGeom prst="rect">
             <a:avLst>
@@ -32017,8 +31951,8 @@
         </p:nvSpPr>
         <p:spPr>
           <a:xfrm>
-            <a:off x="4447032" y="4169664"/>
-            <a:ext cx="685800" cy="475488"/>
+            <a:off x="4129430" y="4169664"/>
+            <a:ext cx="676656" cy="475488"/>
           </a:xfrm>
           <a:prstGeom prst="rect">
             <a:avLst/>
@@ -32042,7 +31976,7 @@
                 <a:ea typeface="Trebuchet MS" pitchFamily="34" charset="-122"/>
                 <a:cs typeface="Trebuchet MS" pitchFamily="34" charset="-120"/>
               </a:rPr>
-              <a:t>l</a:t>
+              <a:t>f</a:t>
             </a:r>
             <a:endParaRPr lang="en-US" sz="900" dirty="0"/>
           </a:p>
@@ -32056,8 +31990,8 @@
         </p:nvSpPr>
         <p:spPr>
           <a:xfrm>
-            <a:off x="5254752" y="4169664"/>
-            <a:ext cx="685800" cy="475488"/>
+            <a:off x="4855464" y="4169664"/>
+            <a:ext cx="676656" cy="475488"/>
           </a:xfrm>
           <a:prstGeom prst="rect">
             <a:avLst>
@@ -32083,8 +32017,8 @@
         </p:nvSpPr>
         <p:spPr>
           <a:xfrm>
-            <a:off x="5254752" y="4169664"/>
-            <a:ext cx="685800" cy="475488"/>
+            <a:off x="4855464" y="4169664"/>
+            <a:ext cx="676656" cy="475488"/>
           </a:xfrm>
           <a:prstGeom prst="rect">
             <a:avLst/>
@@ -32108,7 +32042,7 @@
                 <a:ea typeface="Trebuchet MS" pitchFamily="34" charset="-122"/>
                 <a:cs typeface="Trebuchet MS" pitchFamily="34" charset="-120"/>
               </a:rPr>
-              <a:t>e</a:t>
+              <a:t>u</a:t>
             </a:r>
             <a:endParaRPr lang="en-US" sz="900" dirty="0"/>
           </a:p>
@@ -32122,8 +32056,8 @@
         </p:nvSpPr>
         <p:spPr>
           <a:xfrm>
-            <a:off x="6062472" y="4169664"/>
-            <a:ext cx="685800" cy="475488"/>
+            <a:off x="5581498" y="4169664"/>
+            <a:ext cx="676656" cy="475488"/>
           </a:xfrm>
           <a:prstGeom prst="rect">
             <a:avLst>
@@ -32149,8 +32083,8 @@
         </p:nvSpPr>
         <p:spPr>
           <a:xfrm>
-            <a:off x="6062472" y="4169664"/>
-            <a:ext cx="685800" cy="475488"/>
+            <a:off x="5581498" y="4169664"/>
+            <a:ext cx="676656" cy="475488"/>
           </a:xfrm>
           <a:prstGeom prst="rect">
             <a:avLst/>
@@ -32174,7 +32108,7 @@
                 <a:ea typeface="Trebuchet MS" pitchFamily="34" charset="-122"/>
                 <a:cs typeface="Trebuchet MS" pitchFamily="34" charset="-120"/>
               </a:rPr>
-              <a:t>ss</a:t>
+              <a:t>l</a:t>
             </a:r>
             <a:endParaRPr lang="en-US" sz="900" dirty="0"/>
           </a:p>
@@ -32188,8 +32122,8 @@
         </p:nvSpPr>
         <p:spPr>
           <a:xfrm>
-            <a:off x="6870192" y="4169664"/>
-            <a:ext cx="685800" cy="475488"/>
+            <a:off x="6307531" y="4169664"/>
+            <a:ext cx="676656" cy="475488"/>
           </a:xfrm>
           <a:prstGeom prst="rect">
             <a:avLst>
@@ -32215,8 +32149,8 @@
         </p:nvSpPr>
         <p:spPr>
           <a:xfrm>
-            <a:off x="6870192" y="4169664"/>
-            <a:ext cx="685800" cy="475488"/>
+            <a:off x="6307531" y="4169664"/>
+            <a:ext cx="676656" cy="475488"/>
           </a:xfrm>
           <a:prstGeom prst="rect">
             <a:avLst/>
@@ -32240,7 +32174,7 @@
                 <a:ea typeface="Trebuchet MS" pitchFamily="34" charset="-122"/>
                 <a:cs typeface="Trebuchet MS" pitchFamily="34" charset="-120"/>
               </a:rPr>
-              <a:t>l</a:t>
+              <a:t>n</a:t>
             </a:r>
             <a:endParaRPr lang="en-US" sz="900" dirty="0"/>
           </a:p>
@@ -32254,8 +32188,8 @@
         </p:nvSpPr>
         <p:spPr>
           <a:xfrm>
-            <a:off x="7677912" y="4169664"/>
-            <a:ext cx="685800" cy="475488"/>
+            <a:off x="7033565" y="4169664"/>
+            <a:ext cx="676656" cy="475488"/>
           </a:xfrm>
           <a:prstGeom prst="rect">
             <a:avLst>
@@ -32281,8 +32215,8 @@
         </p:nvSpPr>
         <p:spPr>
           <a:xfrm>
-            <a:off x="7677912" y="4169664"/>
-            <a:ext cx="685800" cy="475488"/>
+            <a:off x="7033565" y="4169664"/>
+            <a:ext cx="676656" cy="475488"/>
           </a:xfrm>
           <a:prstGeom prst="rect">
             <a:avLst/>
@@ -32306,7 +32240,73 @@
                 <a:ea typeface="Trebuchet MS" pitchFamily="34" charset="-122"/>
                 <a:cs typeface="Trebuchet MS" pitchFamily="34" charset="-120"/>
               </a:rPr>
-              <a:t>ee</a:t>
+              <a:t>e</a:t>
+            </a:r>
+            <a:endParaRPr lang="en-US" sz="900" dirty="0"/>
+          </a:p>
+        </p:txBody>
+      </p:sp>
+      <p:sp>
+        <p:nvSpPr>
+          <p:cNvPr id="55" name="Shape 53"/>
+          <p:cNvSpPr/>
+          <p:nvPr/>
+        </p:nvSpPr>
+        <p:spPr>
+          <a:xfrm>
+            <a:off x="7759598" y="4169664"/>
+            <a:ext cx="676656" cy="475488"/>
+          </a:xfrm>
+          <a:prstGeom prst="rect">
+            <a:avLst>
+              <a:gd name="adj" fmla="val 7692"/>
+            </a:avLst>
+          </a:prstGeom>
+          <a:solidFill>
+            <a:srgbClr val="FFFFFF"/>
+          </a:solidFill>
+          <a:ln w="12700">
+            <a:solidFill>
+              <a:srgbClr val="DB2777"/>
+            </a:solidFill>
+            <a:prstDash val="solid"/>
+          </a:ln>
+        </p:spPr>
+      </p:sp>
+      <p:sp>
+        <p:nvSpPr>
+          <p:cNvPr id="56" name="Text 54"/>
+          <p:cNvSpPr/>
+          <p:nvPr/>
+        </p:nvSpPr>
+        <p:spPr>
+          <a:xfrm>
+            <a:off x="7759598" y="4169664"/>
+            <a:ext cx="676656" cy="475488"/>
+          </a:xfrm>
+          <a:prstGeom prst="rect">
+            <a:avLst/>
+          </a:prstGeom>
+          <a:noFill/>
+          <a:ln/>
+        </p:spPr>
+        <p:txBody>
+          <a:bodyPr wrap="square" lIns="0" tIns="0" rIns="0" bIns="0" rtlCol="0" anchor="ctr"/>
+          <a:lstStyle/>
+          <a:p>
+            <a:pPr algn="ctr" indent="0" marL="0">
+              <a:buNone/>
+            </a:pPr>
+            <a:r>
+              <a:rPr lang="en-US" sz="900" b="1" dirty="0">
+                <a:solidFill>
+                  <a:srgbClr val="9D174D"/>
+                </a:solidFill>
+                <a:latin typeface="Trebuchet MS" pitchFamily="34" charset="0"/>
+                <a:ea typeface="Trebuchet MS" pitchFamily="34" charset="-122"/>
+                <a:cs typeface="Trebuchet MS" pitchFamily="34" charset="-120"/>
+              </a:rPr>
+              <a:t>ss</a:t>
             </a:r>
             <a:endParaRPr lang="en-US" sz="900" dirty="0"/>
           </a:p>
@@ -32598,7 +32598,7 @@
                 <a:ea typeface="Calibri" pitchFamily="34" charset="-122"/>
                 <a:cs typeface="Calibri" pitchFamily="34" charset="-120"/>
               </a:rPr>
-              <a:t>Word Labs  •  wordlabs.app  •  Root: 'harm' = damage, injury, or hurt</a:t>
+              <a:t>Word Labs  •  wordlabs.app  •  Root: 'harm' = injury, damage, hurt</a:t>
             </a:r>
             <a:endParaRPr lang="en-US" sz="800" dirty="0"/>
           </a:p>
@@ -33767,7 +33767,7 @@
                 <a:ea typeface="Calibri" pitchFamily="34" charset="-122"/>
                 <a:cs typeface="Calibri" pitchFamily="34" charset="-120"/>
               </a:rPr>
-              <a:t>Word Labs  •  wordlabs.app  •  Root: 'harm' = damage, injury, or hurt</a:t>
+              <a:t>Word Labs  •  wordlabs.app  •  Root: 'harm' = injury, damage, hurt</a:t>
             </a:r>
             <a:endParaRPr lang="en-US" sz="800" dirty="0"/>
           </a:p>
@@ -34808,7 +34808,7 @@
                 <a:ea typeface="Trebuchet MS" pitchFamily="34" charset="-122"/>
                 <a:cs typeface="Trebuchet MS" pitchFamily="34" charset="-120"/>
               </a:rPr>
-              <a:t>-lessly</a:t>
+              <a:t>-ful</a:t>
             </a:r>
             <a:endParaRPr lang="en-US" sz="1300" dirty="0"/>
           </a:p>
@@ -35045,7 +35045,7 @@
                 <a:ea typeface="Trebuchet MS" pitchFamily="34" charset="-122"/>
                 <a:cs typeface="Trebuchet MS" pitchFamily="34" charset="-120"/>
               </a:rPr>
-              <a:t>unharmed</a:t>
+              <a:t>harmed</a:t>
             </a:r>
             <a:endParaRPr lang="en-US" sz="1200" dirty="0"/>
           </a:p>
@@ -35177,7 +35177,7 @@
                 <a:ea typeface="Trebuchet MS" pitchFamily="34" charset="-122"/>
                 <a:cs typeface="Trebuchet MS" pitchFamily="34" charset="-120"/>
               </a:rPr>
-              <a:t>harmed</a:t>
+              <a:t>unharmed</a:t>
             </a:r>
             <a:endParaRPr lang="en-US" sz="1200" dirty="0"/>
           </a:p>
@@ -35243,7 +35243,7 @@
                 <a:ea typeface="Trebuchet MS" pitchFamily="34" charset="-122"/>
                 <a:cs typeface="Trebuchet MS" pitchFamily="34" charset="-120"/>
               </a:rPr>
-              <a:t>harmlessly</a:t>
+              <a:t>harmfully</a:t>
             </a:r>
             <a:endParaRPr lang="en-US" sz="1200" dirty="0"/>
           </a:p>
@@ -35375,7 +35375,7 @@
                 <a:ea typeface="Trebuchet MS" pitchFamily="34" charset="-122"/>
                 <a:cs typeface="Trebuchet MS" pitchFamily="34" charset="-120"/>
               </a:rPr>
-              <a:t>harmfulness</a:t>
+              <a:t>harmlessness</a:t>
             </a:r>
             <a:endParaRPr lang="en-US" sz="1200" dirty="0"/>
           </a:p>
@@ -35667,7 +35667,7 @@
                 <a:ea typeface="Calibri" pitchFamily="34" charset="-122"/>
                 <a:cs typeface="Calibri" pitchFamily="34" charset="-120"/>
               </a:rPr>
-              <a:t>Word Labs  •  wordlabs.app  •  Root: 'harm' = damage, injury, or hurt</a:t>
+              <a:t>Word Labs  •  wordlabs.app  •  Root: 'harm' = injury, damage, hurt</a:t>
             </a:r>
             <a:endParaRPr lang="en-US" sz="800" dirty="0"/>
           </a:p>
@@ -35831,7 +35831,7 @@
                 <a:ea typeface="Calibri" pitchFamily="34" charset="-122"/>
                 <a:cs typeface="Calibri" pitchFamily="34" charset="-120"/>
               </a:rPr>
-              <a:t>The core part of a word carrying its basic meaning. For example, 'harm' means 'damage, injury, or hurt'.</a:t>
+              <a:t>The core part of a word carrying its basic meaning. For example, 'harm' means 'injury, damage, hurt'.</a:t>
             </a:r>
             <a:endParaRPr lang="en-US" sz="1350" dirty="0"/>
           </a:p>
@@ -36451,7 +36451,7 @@
                 <a:ea typeface="Calibri" pitchFamily="34" charset="-122"/>
                 <a:cs typeface="Calibri" pitchFamily="34" charset="-120"/>
               </a:rPr>
-              <a:t>Word Labs  •  wordlabs.app  •  Root: 'harm' = damage, injury, or hurt</a:t>
+              <a:t>Word Labs  •  wordlabs.app  •  Root: 'harm' = injury, damage, hurt</a:t>
             </a:r>
             <a:endParaRPr lang="en-US" sz="800" dirty="0"/>
           </a:p>
@@ -36563,7 +36563,7 @@
                 <a:ea typeface="Calibri" pitchFamily="34" charset="-122"/>
                 <a:cs typeface="Calibri" pitchFamily="34" charset="-120"/>
               </a:rPr>
-              <a:t>1.  The word 'harmless' means something that cannot cause any damage or hurt.</a:t>
+              <a:t>1.  The root 'harm' comes from ancient Greek.</a:t>
             </a:r>
             <a:endParaRPr lang="en-US" sz="1300" dirty="0"/>
           </a:p>
@@ -36586,11 +36586,11 @@
             </a:avLst>
           </a:prstGeom>
           <a:solidFill>
-            <a:srgbClr val="DCFCE7"/>
-          </a:solidFill>
-          <a:ln w="12700">
-            <a:solidFill>
-              <a:srgbClr val="16A34A"/>
+            <a:srgbClr val="FEE2E2"/>
+          </a:solidFill>
+          <a:ln w="12700">
+            <a:solidFill>
+              <a:srgbClr val="DC2626"/>
             </a:solidFill>
             <a:prstDash val="solid"/>
           </a:ln>
@@ -36623,13 +36623,13 @@
             <a:r>
               <a:rPr lang="en-US" sz="1100" b="1" dirty="0">
                 <a:solidFill>
-                  <a:srgbClr val="16A34A"/>
+                  <a:srgbClr val="DC2626"/>
                 </a:solidFill>
                 <a:latin typeface="Trebuchet MS" pitchFamily="34" charset="0"/>
                 <a:ea typeface="Trebuchet MS" pitchFamily="34" charset="-122"/>
                 <a:cs typeface="Trebuchet MS" pitchFamily="34" charset="-120"/>
               </a:rPr>
-              <a:t>TRUE</a:t>
+              <a:t>FALSE</a:t>
             </a:r>
             <a:endParaRPr lang="en-US" sz="1100" dirty="0"/>
           </a:p>
@@ -36702,7 +36702,7 @@
                 <a:ea typeface="Calibri" pitchFamily="34" charset="-122"/>
                 <a:cs typeface="Calibri" pitchFamily="34" charset="-120"/>
               </a:rPr>
-              <a:t>2.  The root 'harm' comes from ancient Greek.</a:t>
+              <a:t>2.  The suffix '-ful' in 'harmful' means full of or having a lot of.</a:t>
             </a:r>
             <a:endParaRPr lang="en-US" sz="1300" dirty="0"/>
           </a:p>
@@ -36725,11 +36725,11 @@
             </a:avLst>
           </a:prstGeom>
           <a:solidFill>
-            <a:srgbClr val="FEE2E2"/>
-          </a:solidFill>
-          <a:ln w="12700">
-            <a:solidFill>
-              <a:srgbClr val="DC2626"/>
+            <a:srgbClr val="DCFCE7"/>
+          </a:solidFill>
+          <a:ln w="12700">
+            <a:solidFill>
+              <a:srgbClr val="16A34A"/>
             </a:solidFill>
             <a:prstDash val="solid"/>
           </a:ln>
@@ -36762,13 +36762,13 @@
             <a:r>
               <a:rPr lang="en-US" sz="1100" b="1" dirty="0">
                 <a:solidFill>
-                  <a:srgbClr val="DC2626"/>
+                  <a:srgbClr val="16A34A"/>
                 </a:solidFill>
                 <a:latin typeface="Trebuchet MS" pitchFamily="34" charset="0"/>
                 <a:ea typeface="Trebuchet MS" pitchFamily="34" charset="-122"/>
                 <a:cs typeface="Trebuchet MS" pitchFamily="34" charset="-120"/>
               </a:rPr>
-              <a:t>FALSE</a:t>
+              <a:t>TRUE</a:t>
             </a:r>
             <a:endParaRPr lang="en-US" sz="1100" dirty="0"/>
           </a:p>
@@ -36841,7 +36841,7 @@
                 <a:ea typeface="Calibri" pitchFamily="34" charset="-122"/>
                 <a:cs typeface="Calibri" pitchFamily="34" charset="-120"/>
               </a:rPr>
-              <a:t>3.  The word 'unharmed' uses the prefix 'un-', meaning 'not'.</a:t>
+              <a:t>3.  'Harmless' and 'harmful' mean the same thing.</a:t>
             </a:r>
             <a:endParaRPr lang="en-US" sz="1300" dirty="0"/>
           </a:p>
@@ -36864,11 +36864,11 @@
             </a:avLst>
           </a:prstGeom>
           <a:solidFill>
-            <a:srgbClr val="DCFCE7"/>
-          </a:solidFill>
-          <a:ln w="12700">
-            <a:solidFill>
-              <a:srgbClr val="16A34A"/>
+            <a:srgbClr val="FEE2E2"/>
+          </a:solidFill>
+          <a:ln w="12700">
+            <a:solidFill>
+              <a:srgbClr val="DC2626"/>
             </a:solidFill>
             <a:prstDash val="solid"/>
           </a:ln>
@@ -36901,13 +36901,13 @@
             <a:r>
               <a:rPr lang="en-US" sz="1100" b="1" dirty="0">
                 <a:solidFill>
-                  <a:srgbClr val="16A34A"/>
+                  <a:srgbClr val="DC2626"/>
                 </a:solidFill>
                 <a:latin typeface="Trebuchet MS" pitchFamily="34" charset="0"/>
                 <a:ea typeface="Trebuchet MS" pitchFamily="34" charset="-122"/>
                 <a:cs typeface="Trebuchet MS" pitchFamily="34" charset="-120"/>
               </a:rPr>
-              <a:t>TRUE</a:t>
+              <a:t>FALSE</a:t>
             </a:r>
             <a:endParaRPr lang="en-US" sz="1100" dirty="0"/>
           </a:p>
@@ -36980,7 +36980,7 @@
                 <a:ea typeface="Calibri" pitchFamily="34" charset="-122"/>
                 <a:cs typeface="Calibri" pitchFamily="34" charset="-120"/>
               </a:rPr>
-              <a:t>4.  The suffix '-ful' can be added to 'harm' to make the word 'harmful', meaning full of danger.</a:t>
+              <a:t>4.  The word 'harmless' means something cannot cause injury or damage.</a:t>
             </a:r>
             <a:endParaRPr lang="en-US" sz="1300" dirty="0"/>
           </a:p>
@@ -37119,7 +37119,7 @@
                 <a:ea typeface="Calibri" pitchFamily="34" charset="-122"/>
                 <a:cs typeface="Calibri" pitchFamily="34" charset="-120"/>
               </a:rPr>
-              <a:t>5.  The word 'harmful' means the same thing as 'harmless'.</a:t>
+              <a:t>5.  Adding the prefix 'un' to 'harmed' creates a word meaning not injured.</a:t>
             </a:r>
             <a:endParaRPr lang="en-US" sz="1300" dirty="0"/>
           </a:p>
@@ -37142,11 +37142,11 @@
             </a:avLst>
           </a:prstGeom>
           <a:solidFill>
-            <a:srgbClr val="FEE2E2"/>
-          </a:solidFill>
-          <a:ln w="12700">
-            <a:solidFill>
-              <a:srgbClr val="DC2626"/>
+            <a:srgbClr val="DCFCE7"/>
+          </a:solidFill>
+          <a:ln w="12700">
+            <a:solidFill>
+              <a:srgbClr val="16A34A"/>
             </a:solidFill>
             <a:prstDash val="solid"/>
           </a:ln>
@@ -37179,13 +37179,13 @@
             <a:r>
               <a:rPr lang="en-US" sz="1100" b="1" dirty="0">
                 <a:solidFill>
-                  <a:srgbClr val="DC2626"/>
+                  <a:srgbClr val="16A34A"/>
                 </a:solidFill>
                 <a:latin typeface="Trebuchet MS" pitchFamily="34" charset="0"/>
                 <a:ea typeface="Trebuchet MS" pitchFamily="34" charset="-122"/>
                 <a:cs typeface="Trebuchet MS" pitchFamily="34" charset="-120"/>
               </a:rPr>
-              <a:t>FALSE</a:t>
+              <a:t>TRUE</a:t>
             </a:r>
             <a:endParaRPr lang="en-US" sz="1100" dirty="0"/>
           </a:p>
@@ -37477,7 +37477,7 @@
                 <a:ea typeface="Calibri" pitchFamily="34" charset="-122"/>
                 <a:cs typeface="Calibri" pitchFamily="34" charset="-120"/>
               </a:rPr>
-              <a:t>Word Labs  •  wordlabs.app  •  Root: 'harm' = damage, injury, or hurt</a:t>
+              <a:t>Word Labs  •  wordlabs.app  •  Root: 'harm' = injury, damage, hurt</a:t>
             </a:r>
             <a:endParaRPr lang="en-US" sz="800" dirty="0"/>
           </a:p>
@@ -37614,7 +37614,7 @@
                 <a:ea typeface="Trebuchet MS" pitchFamily="34" charset="-122"/>
                 <a:cs typeface="Trebuchet MS" pitchFamily="34" charset="-120"/>
               </a:rPr>
-              <a:t>damage, injury, or hurt</a:t>
+              <a:t>injury, damage, hurt</a:t>
             </a:r>
             <a:endParaRPr lang="en-US" sz="2000" dirty="0"/>
           </a:p>
@@ -37890,7 +37890,7 @@
                 <a:ea typeface="Trebuchet MS" pitchFamily="34" charset="-122"/>
                 <a:cs typeface="Trebuchet MS" pitchFamily="34" charset="-120"/>
               </a:rPr>
-              <a:t>unharmed</a:t>
+              <a:t>harmed</a:t>
             </a:r>
             <a:endParaRPr lang="en-US" sz="1300" dirty="0"/>
           </a:p>
@@ -38022,7 +38022,7 @@
                 <a:ea typeface="Trebuchet MS" pitchFamily="34" charset="-122"/>
                 <a:cs typeface="Trebuchet MS" pitchFamily="34" charset="-120"/>
               </a:rPr>
-              <a:t>harmed</a:t>
+              <a:t>unharmed</a:t>
             </a:r>
             <a:endParaRPr lang="en-US" sz="1300" dirty="0"/>
           </a:p>
@@ -38088,7 +38088,7 @@
                 <a:ea typeface="Trebuchet MS" pitchFamily="34" charset="-122"/>
                 <a:cs typeface="Trebuchet MS" pitchFamily="34" charset="-120"/>
               </a:rPr>
-              <a:t>harmlessly</a:t>
+              <a:t>harmfully</a:t>
             </a:r>
             <a:endParaRPr lang="en-US" sz="1300" dirty="0"/>
           </a:p>
@@ -38446,7 +38446,7 @@
                 <a:ea typeface="Calibri" pitchFamily="34" charset="-122"/>
                 <a:cs typeface="Calibri" pitchFamily="34" charset="-120"/>
               </a:rPr>
-              <a:t>Word Labs  •  wordlabs.app  •  Root: 'harm' = damage, injury, or hurt</a:t>
+              <a:t>Word Labs  •  wordlabs.app  •  Root: 'harm' = injury, damage, hurt</a:t>
             </a:r>
             <a:endParaRPr lang="en-US" sz="800" dirty="0"/>
           </a:p>
@@ -39487,7 +39487,7 @@
                 <a:ea typeface="Trebuchet MS" pitchFamily="34" charset="-122"/>
                 <a:cs typeface="Trebuchet MS" pitchFamily="34" charset="-120"/>
               </a:rPr>
-              <a:t>-lessly</a:t>
+              <a:t>-ful</a:t>
             </a:r>
             <a:endParaRPr lang="en-US" sz="1300" dirty="0"/>
           </a:p>
@@ -40220,7 +40220,7 @@
                 <a:ea typeface="Calibri" pitchFamily="34" charset="-122"/>
                 <a:cs typeface="Calibri" pitchFamily="34" charset="-120"/>
               </a:rPr>
-              <a:t>Word Labs  •  wordlabs.app  •  Root: 'harm' = damage, injury, or hurt</a:t>
+              <a:t>Word Labs  •  wordlabs.app  •  Root: 'harm' = injury, damage, hurt</a:t>
             </a:r>
             <a:endParaRPr lang="en-US" sz="800" dirty="0"/>
           </a:p>
@@ -40398,7 +40398,7 @@
                 <a:ea typeface="Calibri" pitchFamily="34" charset="-122"/>
                 <a:cs typeface="Calibri" pitchFamily="34" charset="-120"/>
               </a:rPr>
-              <a:t>Was hurt or damaged by something or someone.</a:t>
+              <a:t>When a person or animal has not been hurt or injured at all.</a:t>
             </a:r>
             <a:endParaRPr lang="en-US" sz="1200" dirty="0"/>
           </a:p>
@@ -40537,7 +40537,7 @@
                 <a:ea typeface="Calibri" pitchFamily="34" charset="-122"/>
                 <a:cs typeface="Calibri" pitchFamily="34" charset="-120"/>
               </a:rPr>
-              <a:t>Not hurt or damaged in any way after something dangerous happened.</a:t>
+              <a:t>When someone or something has been injured or hurt.</a:t>
             </a:r>
             <a:endParaRPr lang="en-US" sz="1200" dirty="0"/>
           </a:p>
@@ -40610,7 +40610,7 @@
                 <a:ea typeface="Trebuchet MS" pitchFamily="34" charset="-122"/>
                 <a:cs typeface="Trebuchet MS" pitchFamily="34" charset="-120"/>
               </a:rPr>
-              <a:t>unharmed</a:t>
+              <a:t>harmed</a:t>
             </a:r>
             <a:endParaRPr lang="en-US" sz="1200" dirty="0"/>
           </a:p>
@@ -40676,7 +40676,7 @@
                 <a:ea typeface="Calibri" pitchFamily="34" charset="-122"/>
                 <a:cs typeface="Calibri" pitchFamily="34" charset="-120"/>
               </a:rPr>
-              <a:t>In a way that causes no damage or injury to anyone or anything.</a:t>
+              <a:t>Doing something in a way that causes damage or hurt.</a:t>
             </a:r>
             <a:endParaRPr lang="en-US" sz="1200" dirty="0"/>
           </a:p>
@@ -40815,7 +40815,7 @@
                 <a:ea typeface="Calibri" pitchFamily="34" charset="-122"/>
                 <a:cs typeface="Calibri" pitchFamily="34" charset="-120"/>
               </a:rPr>
-              <a:t>In the act of causing damage or injury to someone or something.</a:t>
+              <a:t>The act of causing damage or injury to someone or something right now.</a:t>
             </a:r>
             <a:endParaRPr lang="en-US" sz="1200" dirty="0"/>
           </a:p>
@@ -40888,7 +40888,7 @@
                 <a:ea typeface="Trebuchet MS" pitchFamily="34" charset="-122"/>
                 <a:cs typeface="Trebuchet MS" pitchFamily="34" charset="-120"/>
               </a:rPr>
-              <a:t>harmed</a:t>
+              <a:t>unharmed</a:t>
             </a:r>
             <a:endParaRPr lang="en-US" sz="1200" dirty="0"/>
           </a:p>
@@ -41027,7 +41027,7 @@
                 <a:ea typeface="Trebuchet MS" pitchFamily="34" charset="-122"/>
                 <a:cs typeface="Trebuchet MS" pitchFamily="34" charset="-120"/>
               </a:rPr>
-              <a:t>harmlessly</a:t>
+              <a:t>harmfully</a:t>
             </a:r>
             <a:endParaRPr lang="en-US" sz="1200" dirty="0"/>
           </a:p>
@@ -41093,7 +41093,7 @@
                 <a:ea typeface="Calibri" pitchFamily="34" charset="-122"/>
                 <a:cs typeface="Calibri" pitchFamily="34" charset="-120"/>
               </a:rPr>
-              <a:t>When people or things do not work well together and there is disagreement or conflict.</a:t>
+              <a:t>When people do not get along and there is conflict or tension between them.</a:t>
             </a:r>
             <a:endParaRPr lang="en-US" sz="1200" dirty="0"/>
           </a:p>
@@ -41232,7 +41232,7 @@
                 <a:ea typeface="Calibri" pitchFamily="34" charset="-122"/>
                 <a:cs typeface="Calibri" pitchFamily="34" charset="-120"/>
               </a:rPr>
-              <a:t>Something that will not cause any damage or hurt to anyone.</a:t>
+              <a:t>Something that will not hurt you or cause any damage at all.</a:t>
             </a:r>
             <a:endParaRPr lang="en-US" sz="1200" dirty="0"/>
           </a:p>
@@ -41524,7 +41524,7 @@
                 <a:ea typeface="Calibri" pitchFamily="34" charset="-122"/>
                 <a:cs typeface="Calibri" pitchFamily="34" charset="-120"/>
               </a:rPr>
-              <a:t>Word Labs  •  wordlabs.app  •  Root: 'harm' = damage, injury, or hurt</a:t>
+              <a:t>Word Labs  •  wordlabs.app  •  Root: 'harm' = injury, damage, hurt</a:t>
             </a:r>
             <a:endParaRPr lang="en-US" sz="800" dirty="0"/>
           </a:p>
@@ -41727,7 +41727,7 @@
                 <a:ea typeface="Calibri" pitchFamily="34" charset="-122"/>
                 <a:cs typeface="Calibri" pitchFamily="34" charset="-120"/>
               </a:rPr>
-              <a:t>The scientists warned that the chemical could be harmful to animals living near the river.</a:t>
+              <a:t>The scientists checked that the chemical was harmless before letting the students touch it.</a:t>
             </a:r>
             <a:endParaRPr lang="en-US" sz="1500" dirty="0"/>
           </a:p>
@@ -41891,7 +41891,7 @@
                 <a:ea typeface="Calibri" pitchFamily="34" charset="-122"/>
                 <a:cs typeface="Calibri" pitchFamily="34" charset="-120"/>
               </a:rPr>
-              <a:t>Luckily, the spider found in the classroom was completely harmless and was released outside.</a:t>
+              <a:t>The firefighters rushed into the building to make sure everyone escaped unharmed.</a:t>
             </a:r>
             <a:endParaRPr lang="en-US" sz="1500" dirty="0"/>
           </a:p>
@@ -42055,7 +42055,7 @@
                 <a:ea typeface="Calibri" pitchFamily="34" charset="-122"/>
                 <a:cs typeface="Calibri" pitchFamily="34" charset="-120"/>
               </a:rPr>
-              <a:t>The rescue team was relieved to find all the hikers unharmed after the storm passed through the mountains.</a:t>
+              <a:t>We must think carefully about harmful habits that can damage our health over time.</a:t>
             </a:r>
             <a:endParaRPr lang="en-US" sz="1500" dirty="0"/>
           </a:p>

--- a/output/wordlabs-harm-3day.pptx
+++ b/output/wordlabs-harm-3day.pptx
@@ -10781,7 +10781,7 @@
         </p:nvSpPr>
         <p:spPr>
           <a:xfrm>
-            <a:off x="2254649" y="4169664"/>
+            <a:off x="2124837" y="4169664"/>
             <a:ext cx="685800" cy="475488"/>
           </a:xfrm>
           <a:prstGeom prst="rect">
@@ -10808,7 +10808,7 @@
         </p:nvSpPr>
         <p:spPr>
           <a:xfrm>
-            <a:off x="2254649" y="4169664"/>
+            <a:off x="2124837" y="4169664"/>
             <a:ext cx="685800" cy="475488"/>
           </a:xfrm>
           <a:prstGeom prst="rect">
@@ -10847,7 +10847,7 @@
         </p:nvSpPr>
         <p:spPr>
           <a:xfrm>
-            <a:off x="3293146" y="4169664"/>
+            <a:off x="3033522" y="4169664"/>
             <a:ext cx="685800" cy="475488"/>
           </a:xfrm>
           <a:prstGeom prst="rect">
@@ -10874,7 +10874,7 @@
         </p:nvSpPr>
         <p:spPr>
           <a:xfrm>
-            <a:off x="3293146" y="4169664"/>
+            <a:off x="3033522" y="4169664"/>
             <a:ext cx="685800" cy="475488"/>
           </a:xfrm>
           <a:prstGeom prst="rect">
@@ -10913,7 +10913,7 @@
         </p:nvSpPr>
         <p:spPr>
           <a:xfrm>
-            <a:off x="4331643" y="4169664"/>
+            <a:off x="3942207" y="4169664"/>
             <a:ext cx="685800" cy="475488"/>
           </a:xfrm>
           <a:prstGeom prst="rect">
@@ -10940,7 +10940,7 @@
         </p:nvSpPr>
         <p:spPr>
           <a:xfrm>
-            <a:off x="4331643" y="4169664"/>
+            <a:off x="3942207" y="4169664"/>
             <a:ext cx="685800" cy="475488"/>
           </a:xfrm>
           <a:prstGeom prst="rect">
@@ -10979,7 +10979,7 @@
         </p:nvSpPr>
         <p:spPr>
           <a:xfrm>
-            <a:off x="5370141" y="4169664"/>
+            <a:off x="4850892" y="4169664"/>
             <a:ext cx="685800" cy="475488"/>
           </a:xfrm>
           <a:prstGeom prst="rect">
@@ -11006,7 +11006,7 @@
         </p:nvSpPr>
         <p:spPr>
           <a:xfrm>
-            <a:off x="5370141" y="4169664"/>
+            <a:off x="4850892" y="4169664"/>
             <a:ext cx="685800" cy="475488"/>
           </a:xfrm>
           <a:prstGeom prst="rect">
@@ -11045,7 +11045,7 @@
         </p:nvSpPr>
         <p:spPr>
           <a:xfrm>
-            <a:off x="6408638" y="4169664"/>
+            <a:off x="5759577" y="4169664"/>
             <a:ext cx="685800" cy="475488"/>
           </a:xfrm>
           <a:prstGeom prst="rect">
@@ -11072,7 +11072,7 @@
         </p:nvSpPr>
         <p:spPr>
           <a:xfrm>
-            <a:off x="6408638" y="4169664"/>
+            <a:off x="5759577" y="4169664"/>
             <a:ext cx="685800" cy="475488"/>
           </a:xfrm>
           <a:prstGeom prst="rect">
@@ -11111,7 +11111,7 @@
         </p:nvSpPr>
         <p:spPr>
           <a:xfrm>
-            <a:off x="7447135" y="4169664"/>
+            <a:off x="6668262" y="4169664"/>
             <a:ext cx="685800" cy="475488"/>
           </a:xfrm>
           <a:prstGeom prst="rect">
@@ -11138,7 +11138,73 @@
         </p:nvSpPr>
         <p:spPr>
           <a:xfrm>
-            <a:off x="7447135" y="4169664"/>
+            <a:off x="6668262" y="4169664"/>
+            <a:ext cx="685800" cy="475488"/>
+          </a:xfrm>
+          <a:prstGeom prst="rect">
+            <a:avLst/>
+          </a:prstGeom>
+          <a:noFill/>
+          <a:ln/>
+        </p:spPr>
+        <p:txBody>
+          <a:bodyPr wrap="square" lIns="0" tIns="0" rIns="0" bIns="0" rtlCol="0" anchor="ctr"/>
+          <a:lstStyle/>
+          <a:p>
+            <a:pPr algn="ctr" indent="0" marL="0">
+              <a:buNone/>
+            </a:pPr>
+            <a:r>
+              <a:rPr lang="en-US" sz="900" b="1" dirty="0">
+                <a:solidFill>
+                  <a:srgbClr val="9D174D"/>
+                </a:solidFill>
+                <a:latin typeface="Trebuchet MS" pitchFamily="34" charset="0"/>
+                <a:ea typeface="Trebuchet MS" pitchFamily="34" charset="-122"/>
+                <a:cs typeface="Trebuchet MS" pitchFamily="34" charset="-120"/>
+              </a:rPr>
+              <a:t>e</a:t>
+            </a:r>
+            <a:endParaRPr lang="en-US" sz="900" dirty="0"/>
+          </a:p>
+        </p:txBody>
+      </p:sp>
+      <p:sp>
+        <p:nvSpPr>
+          <p:cNvPr id="48" name="Shape 46"/>
+          <p:cNvSpPr/>
+          <p:nvPr/>
+        </p:nvSpPr>
+        <p:spPr>
+          <a:xfrm>
+            <a:off x="7576947" y="4169664"/>
+            <a:ext cx="685800" cy="475488"/>
+          </a:xfrm>
+          <a:prstGeom prst="rect">
+            <a:avLst>
+              <a:gd name="adj" fmla="val 7692"/>
+            </a:avLst>
+          </a:prstGeom>
+          <a:solidFill>
+            <a:srgbClr val="FFFFFF"/>
+          </a:solidFill>
+          <a:ln w="12700">
+            <a:solidFill>
+              <a:srgbClr val="DB2777"/>
+            </a:solidFill>
+            <a:prstDash val="solid"/>
+          </a:ln>
+        </p:spPr>
+      </p:sp>
+      <p:sp>
+        <p:nvSpPr>
+          <p:cNvPr id="49" name="Text 47"/>
+          <p:cNvSpPr/>
+          <p:nvPr/>
+        </p:nvSpPr>
+        <p:spPr>
+          <a:xfrm>
+            <a:off x="7576947" y="4169664"/>
             <a:ext cx="685800" cy="475488"/>
           </a:xfrm>
           <a:prstGeom prst="rect">
@@ -36702,7 +36768,7 @@
                 <a:ea typeface="Calibri" pitchFamily="34" charset="-122"/>
                 <a:cs typeface="Calibri" pitchFamily="34" charset="-120"/>
               </a:rPr>
-              <a:t>2.  The suffix '-ful' in 'harmful' means full of or having a lot of.</a:t>
+              <a:t>2.  'Harmless' and 'harmful' mean the same thing.</a:t>
             </a:r>
             <a:endParaRPr lang="en-US" sz="1300" dirty="0"/>
           </a:p>
@@ -36725,11 +36791,11 @@
             </a:avLst>
           </a:prstGeom>
           <a:solidFill>
-            <a:srgbClr val="DCFCE7"/>
-          </a:solidFill>
-          <a:ln w="12700">
-            <a:solidFill>
-              <a:srgbClr val="16A34A"/>
+            <a:srgbClr val="FEE2E2"/>
+          </a:solidFill>
+          <a:ln w="12700">
+            <a:solidFill>
+              <a:srgbClr val="DC2626"/>
             </a:solidFill>
             <a:prstDash val="solid"/>
           </a:ln>
@@ -36762,13 +36828,13 @@
             <a:r>
               <a:rPr lang="en-US" sz="1100" b="1" dirty="0">
                 <a:solidFill>
-                  <a:srgbClr val="16A34A"/>
+                  <a:srgbClr val="DC2626"/>
                 </a:solidFill>
                 <a:latin typeface="Trebuchet MS" pitchFamily="34" charset="0"/>
                 <a:ea typeface="Trebuchet MS" pitchFamily="34" charset="-122"/>
                 <a:cs typeface="Trebuchet MS" pitchFamily="34" charset="-120"/>
               </a:rPr>
-              <a:t>TRUE</a:t>
+              <a:t>FALSE</a:t>
             </a:r>
             <a:endParaRPr lang="en-US" sz="1100" dirty="0"/>
           </a:p>
@@ -36841,7 +36907,7 @@
                 <a:ea typeface="Calibri" pitchFamily="34" charset="-122"/>
                 <a:cs typeface="Calibri" pitchFamily="34" charset="-120"/>
               </a:rPr>
-              <a:t>3.  'Harmless' and 'harmful' mean the same thing.</a:t>
+              <a:t>3.  Adding the prefix 'un' to 'harmed' creates a word meaning not injured.</a:t>
             </a:r>
             <a:endParaRPr lang="en-US" sz="1300" dirty="0"/>
           </a:p>
@@ -36864,11 +36930,11 @@
             </a:avLst>
           </a:prstGeom>
           <a:solidFill>
-            <a:srgbClr val="FEE2E2"/>
-          </a:solidFill>
-          <a:ln w="12700">
-            <a:solidFill>
-              <a:srgbClr val="DC2626"/>
+            <a:srgbClr val="DCFCE7"/>
+          </a:solidFill>
+          <a:ln w="12700">
+            <a:solidFill>
+              <a:srgbClr val="16A34A"/>
             </a:solidFill>
             <a:prstDash val="solid"/>
           </a:ln>
@@ -36901,13 +36967,13 @@
             <a:r>
               <a:rPr lang="en-US" sz="1100" b="1" dirty="0">
                 <a:solidFill>
-                  <a:srgbClr val="DC2626"/>
+                  <a:srgbClr val="16A34A"/>
                 </a:solidFill>
                 <a:latin typeface="Trebuchet MS" pitchFamily="34" charset="0"/>
                 <a:ea typeface="Trebuchet MS" pitchFamily="34" charset="-122"/>
                 <a:cs typeface="Trebuchet MS" pitchFamily="34" charset="-120"/>
               </a:rPr>
-              <a:t>FALSE</a:t>
+              <a:t>TRUE</a:t>
             </a:r>
             <a:endParaRPr lang="en-US" sz="1100" dirty="0"/>
           </a:p>
@@ -37119,7 +37185,7 @@
                 <a:ea typeface="Calibri" pitchFamily="34" charset="-122"/>
                 <a:cs typeface="Calibri" pitchFamily="34" charset="-120"/>
               </a:rPr>
-              <a:t>5.  Adding the prefix 'un' to 'harmed' creates a word meaning not injured.</a:t>
+              <a:t>5.  The suffix '-ful' in 'harmful' means full of or having a lot of.</a:t>
             </a:r>
             <a:endParaRPr lang="en-US" sz="1300" dirty="0"/>
           </a:p>
